--- a/assets/decks/episodio-08-data-products-open.pptx
+++ b/assets/decks/episodio-08-data-products-open.pptx
@@ -2,31 +2,31 @@
 <file path=ppt/presentation.xml><?xml version="1.0" encoding="utf-8"?>
 <p:presentation xmlns:p="http://schemas.openxmlformats.org/presentationml/2006/main">
   <p:sldMasterIdLst>
-    <p:sldMasterId xmlns:r="http://schemas.openxmlformats.org/officeDocument/2006/relationships" id="2147483648" r:id="R7ad6a0e55d614c2c"/>
-    <p:sldMasterId xmlns:r="http://schemas.openxmlformats.org/officeDocument/2006/relationships" id="2147483650" r:id="R51720c2769bb4b6d"/>
+    <p:sldMasterId xmlns:r="http://schemas.openxmlformats.org/officeDocument/2006/relationships" id="2147483648" r:id="R180011a90ed34949"/>
+    <p:sldMasterId xmlns:r="http://schemas.openxmlformats.org/officeDocument/2006/relationships" id="2147483650" r:id="R4298089256684cd6"/>
   </p:sldMasterIdLst>
   <p:notesMasterIdLst>
-    <p:notesMasterId xmlns:r="http://schemas.openxmlformats.org/officeDocument/2006/relationships" r:id="R61411e6770c54627"/>
+    <p:notesMasterId xmlns:r="http://schemas.openxmlformats.org/officeDocument/2006/relationships" r:id="Rf97c5a7c2ea649c4"/>
   </p:notesMasterIdLst>
   <p:sldIdLst>
-    <p:sldId xmlns:r="http://schemas.openxmlformats.org/officeDocument/2006/relationships" id="256" r:id="Rd173d3ffffd44b0d"/>
-    <p:sldId xmlns:r="http://schemas.openxmlformats.org/officeDocument/2006/relationships" id="257" r:id="R55a696a39f444717"/>
-    <p:sldId xmlns:r="http://schemas.openxmlformats.org/officeDocument/2006/relationships" id="258" r:id="Rfe1f3dbe45474aa7"/>
-    <p:sldId xmlns:r="http://schemas.openxmlformats.org/officeDocument/2006/relationships" id="259" r:id="R524bcde52f8d4358"/>
-    <p:sldId xmlns:r="http://schemas.openxmlformats.org/officeDocument/2006/relationships" id="260" r:id="R46c95bed61fc4d4c"/>
-    <p:sldId xmlns:r="http://schemas.openxmlformats.org/officeDocument/2006/relationships" id="261" r:id="R8531abac64b24913"/>
-    <p:sldId xmlns:r="http://schemas.openxmlformats.org/officeDocument/2006/relationships" id="262" r:id="Rb3ea836b1b7e4e8d"/>
-    <p:sldId xmlns:r="http://schemas.openxmlformats.org/officeDocument/2006/relationships" id="263" r:id="R75745f773b684f6a"/>
-    <p:sldId xmlns:r="http://schemas.openxmlformats.org/officeDocument/2006/relationships" id="264" r:id="R473a76e2ad87435c"/>
-    <p:sldId xmlns:r="http://schemas.openxmlformats.org/officeDocument/2006/relationships" id="265" r:id="R1d8550ccebb04e4e"/>
-    <p:sldId xmlns:r="http://schemas.openxmlformats.org/officeDocument/2006/relationships" id="266" r:id="R9e9741074db14228"/>
-    <p:sldId xmlns:r="http://schemas.openxmlformats.org/officeDocument/2006/relationships" id="267" r:id="Ra7d8c314729b412d"/>
-    <p:sldId xmlns:r="http://schemas.openxmlformats.org/officeDocument/2006/relationships" id="268" r:id="Reee6a8bfb3e44197"/>
-    <p:sldId xmlns:r="http://schemas.openxmlformats.org/officeDocument/2006/relationships" id="269" r:id="Raad9e3e70dbe48ac"/>
-    <p:sldId xmlns:r="http://schemas.openxmlformats.org/officeDocument/2006/relationships" id="270" r:id="R8be63cfec35f4916"/>
-    <p:sldId xmlns:r="http://schemas.openxmlformats.org/officeDocument/2006/relationships" id="271" r:id="Re57d21ae33f34a31"/>
-    <p:sldId xmlns:r="http://schemas.openxmlformats.org/officeDocument/2006/relationships" id="272" r:id="R7b55be5731224bdf"/>
-    <p:sldId xmlns:r="http://schemas.openxmlformats.org/officeDocument/2006/relationships" id="273" r:id="R01810fa1fe3b4c5e"/>
+    <p:sldId xmlns:r="http://schemas.openxmlformats.org/officeDocument/2006/relationships" id="256" r:id="R9b6ac114680a4e56"/>
+    <p:sldId xmlns:r="http://schemas.openxmlformats.org/officeDocument/2006/relationships" id="257" r:id="Re2718390516a4472"/>
+    <p:sldId xmlns:r="http://schemas.openxmlformats.org/officeDocument/2006/relationships" id="258" r:id="R3102f4299b534381"/>
+    <p:sldId xmlns:r="http://schemas.openxmlformats.org/officeDocument/2006/relationships" id="259" r:id="R3229dd328ef245fc"/>
+    <p:sldId xmlns:r="http://schemas.openxmlformats.org/officeDocument/2006/relationships" id="260" r:id="Rfb936508f7d14a74"/>
+    <p:sldId xmlns:r="http://schemas.openxmlformats.org/officeDocument/2006/relationships" id="261" r:id="R49c56148285240fa"/>
+    <p:sldId xmlns:r="http://schemas.openxmlformats.org/officeDocument/2006/relationships" id="262" r:id="R4163c37efc904865"/>
+    <p:sldId xmlns:r="http://schemas.openxmlformats.org/officeDocument/2006/relationships" id="263" r:id="Rbec8404affe64a9a"/>
+    <p:sldId xmlns:r="http://schemas.openxmlformats.org/officeDocument/2006/relationships" id="264" r:id="R5f21dfd907ef428b"/>
+    <p:sldId xmlns:r="http://schemas.openxmlformats.org/officeDocument/2006/relationships" id="265" r:id="R559e861b90954e2d"/>
+    <p:sldId xmlns:r="http://schemas.openxmlformats.org/officeDocument/2006/relationships" id="266" r:id="Rfa3d7c7627c34e33"/>
+    <p:sldId xmlns:r="http://schemas.openxmlformats.org/officeDocument/2006/relationships" id="267" r:id="R074a2c6f9f344d65"/>
+    <p:sldId xmlns:r="http://schemas.openxmlformats.org/officeDocument/2006/relationships" id="268" r:id="R8d12515dabc7446d"/>
+    <p:sldId xmlns:r="http://schemas.openxmlformats.org/officeDocument/2006/relationships" id="269" r:id="R456ebe854b424b44"/>
+    <p:sldId xmlns:r="http://schemas.openxmlformats.org/officeDocument/2006/relationships" id="270" r:id="R8ac4a2820a0d4fcc"/>
+    <p:sldId xmlns:r="http://schemas.openxmlformats.org/officeDocument/2006/relationships" id="271" r:id="Rb94382d561684f5f"/>
+    <p:sldId xmlns:r="http://schemas.openxmlformats.org/officeDocument/2006/relationships" id="272" r:id="R774db91614c34130"/>
+    <p:sldId xmlns:r="http://schemas.openxmlformats.org/officeDocument/2006/relationships" id="273" r:id="Rb72390dcc4ab44c9"/>
   </p:sldIdLst>
   <p:sldSz cx="12192000" cy="6858000"/>
   <p:notesSz cx="6858000" cy="9144000"/>
@@ -460,7 +460,57 @@
           <a:lstStyle xmlns:a="http://schemas.openxmlformats.org/drawingml/2006/main"/>
           <a:p xmlns:a="http://schemas.openxmlformats.org/drawingml/2006/main">
             <a:r>
-              <a:t>Apresente o objetivo do EPISÓDIO 8 e conecte-o ao checkpoint executável. Produto de dados não é uma pasta Gold com nome novo.</a:t>
+              <a:t>[Roteiro recomendado]</a:t>
+            </a:r>
+          </a:p>
+          <a:p xmlns:a="http://schemas.openxmlformats.org/drawingml/2006/main">
+            <a:r>
+              <a:t>[Tempo sugerido: 00:45]</a:t>
+            </a:r>
+          </a:p>
+          <a:p xmlns:a="http://schemas.openxmlformats.org/drawingml/2006/main">
+            <a:r>
+              <a:t/>
+            </a:r>
+          </a:p>
+          <a:p xmlns:a="http://schemas.openxmlformats.org/drawingml/2006/main">
+            <a:r>
+              <a:t>Fala sugerida:</a:t>
+            </a:r>
+          </a:p>
+          <a:p xmlns:a="http://schemas.openxmlformats.org/drawingml/2006/main">
+            <a:r>
+              <a:t>Bem-vindo ao episódio 8 do dbt Moderno na Prática. Hoje vamos trabalhar o tema “Data products sem depender de Mesh”. Domínios e interfaces públicas com recursos abertos. O objetivo não é apenas conhecer o conceito: vamos conectá-lo ao laboratório e terminar com uma evidência que você consegue reproduzir no seu próprio ambiente. Ao longo da aula, separe sempre o que é recurso aberto e estável daquilo que aparecerá apenas no Radar.</a:t>
+            </a:r>
+          </a:p>
+          <a:p xmlns:a="http://schemas.openxmlformats.org/drawingml/2006/main">
+            <a:r>
+              <a:t/>
+            </a:r>
+          </a:p>
+          <a:p xmlns:a="http://schemas.openxmlformats.org/drawingml/2006/main">
+            <a:r>
+              <a:t>O que destacar:</a:t>
+            </a:r>
+          </a:p>
+          <a:p xmlns:a="http://schemas.openxmlformats.org/drawingml/2006/main">
+            <a:r>
+              <a:t>- Apresente o título, situe o checkpoint 08 e deixe claro que a aula faz parte da trilha open/stable.</a:t>
+            </a:r>
+          </a:p>
+          <a:p xmlns:a="http://schemas.openxmlformats.org/drawingml/2006/main">
+            <a:r>
+              <a:t/>
+            </a:r>
+          </a:p>
+          <a:p xmlns:a="http://schemas.openxmlformats.org/drawingml/2006/main">
+            <a:r>
+              <a:t>Transição:</a:t>
+            </a:r>
+          </a:p>
+          <a:p xmlns:a="http://schemas.openxmlformats.org/drawingml/2006/main">
+            <a:r>
+              <a:t>Com esse ponto estabelecido, avance para “Produto de dados não é uma pasta Gold com nome novo.”.</a:t>
             </a:r>
           </a:p>
           <a:p xmlns:a="http://schemas.openxmlformats.org/drawingml/2006/main">
@@ -575,7 +625,57 @@
           <a:lstStyle xmlns:a="http://schemas.openxmlformats.org/drawingml/2006/main"/>
           <a:p xmlns:a="http://schemas.openxmlformats.org/drawingml/2006/main">
             <a:r>
-              <a:t>Use a composição para explicar visualmente: Autonomia, segurança e ciclos independentes precisam superar a complexidade. Ownership real Release independente Governança de dependência</a:t>
+              <a:t>[Roteiro recomendado]</a:t>
+            </a:r>
+          </a:p>
+          <a:p xmlns:a="http://schemas.openxmlformats.org/drawingml/2006/main">
+            <a:r>
+              <a:t>[Tempo sugerido: 00:55]</a:t>
+            </a:r>
+          </a:p>
+          <a:p xmlns:a="http://schemas.openxmlformats.org/drawingml/2006/main">
+            <a:r>
+              <a:t/>
+            </a:r>
+          </a:p>
+          <a:p xmlns:a="http://schemas.openxmlformats.org/drawingml/2006/main">
+            <a:r>
+              <a:t>Fala sugerida:</a:t>
+            </a:r>
+          </a:p>
+          <a:p xmlns:a="http://schemas.openxmlformats.org/drawingml/2006/main">
+            <a:r>
+              <a:t>Agora vamos ler a ideia visualmente. Autonomia, segurança e ciclos independentes precisam superar a complexidade. Siga a composição na ordem mostrada e conecte monorepo, Multi-project, Ownership real, Release independente e Governança de dependência. A imagem ou o fluxo não cria uma regra nova; ele torna visível a relação que acabamos de explicar. Use a disposição dos elementos para reforçar causa, dependência ou comparação.</a:t>
+            </a:r>
+          </a:p>
+          <a:p xmlns:a="http://schemas.openxmlformats.org/drawingml/2006/main">
+            <a:r>
+              <a:t/>
+            </a:r>
+          </a:p>
+          <a:p xmlns:a="http://schemas.openxmlformats.org/drawingml/2006/main">
+            <a:r>
+              <a:t>O que destacar:</a:t>
+            </a:r>
+          </a:p>
+          <a:p xmlns:a="http://schemas.openxmlformats.org/drawingml/2006/main">
+            <a:r>
+              <a:t>- Acompanhe o fluxo ou a comparação com o cursor e preserve a ordem de leitura do slide.</a:t>
+            </a:r>
+          </a:p>
+          <a:p xmlns:a="http://schemas.openxmlformats.org/drawingml/2006/main">
+            <a:r>
+              <a:t/>
+            </a:r>
+          </a:p>
+          <a:p xmlns:a="http://schemas.openxmlformats.org/drawingml/2006/main">
+            <a:r>
+              <a:t>Transição:</a:t>
+            </a:r>
+          </a:p>
+          <a:p xmlns:a="http://schemas.openxmlformats.org/drawingml/2006/main">
+            <a:r>
+              <a:t>Com esse ponto estabelecido, avance para “Demonstração — execute”.</a:t>
             </a:r>
           </a:p>
           <a:p xmlns:a="http://schemas.openxmlformats.org/drawingml/2006/main">
@@ -690,7 +790,57 @@
           <a:lstStyle xmlns:a="http://schemas.openxmlformats.org/drawingml/2006/main"/>
           <a:p xmlns:a="http://schemas.openxmlformats.org/drawingml/2006/main">
             <a:r>
-              <a:t>Execute python course.py checkpoint 08. Pause para o aluno acompanhar o terminal.</a:t>
+              <a:t>[Roteiro recomendado]</a:t>
+            </a:r>
+          </a:p>
+          <a:p xmlns:a="http://schemas.openxmlformats.org/drawingml/2006/main">
+            <a:r>
+              <a:t>[Tempo sugerido: 01:20]</a:t>
+            </a:r>
+          </a:p>
+          <a:p xmlns:a="http://schemas.openxmlformats.org/drawingml/2006/main">
+            <a:r>
+              <a:t/>
+            </a:r>
+          </a:p>
+          <a:p xmlns:a="http://schemas.openxmlformats.org/drawingml/2006/main">
+            <a:r>
+              <a:t>Fala sugerida:</a:t>
+            </a:r>
+          </a:p>
+          <a:p xmlns:a="http://schemas.openxmlformats.org/drawingml/2006/main">
+            <a:r>
+              <a:t>Agora vamos sair da explicação e comprovar o comportamento. Execute os comandos exatamente como aparecem: python course.py checkpoint 08. Não é necessário ativar o ambiente virtual manualmente; o launcher do curso seleciona o ambiente correto. Antes de avançar, confirme que o comando iniciou sem erro e dê tempo para o aluno acompanhar a mesma etapa.</a:t>
+            </a:r>
+          </a:p>
+          <a:p xmlns:a="http://schemas.openxmlformats.org/drawingml/2006/main">
+            <a:r>
+              <a:t/>
+            </a:r>
+          </a:p>
+          <a:p xmlns:a="http://schemas.openxmlformats.org/drawingml/2006/main">
+            <a:r>
+              <a:t>O que destacar:</a:t>
+            </a:r>
+          </a:p>
+          <a:p xmlns:a="http://schemas.openxmlformats.org/drawingml/2006/main">
+            <a:r>
+              <a:t>- Mostre o comando completo, execute uma linha por vez quando houver mais de uma e mantenha o terminal visível.</a:t>
+            </a:r>
+          </a:p>
+          <a:p xmlns:a="http://schemas.openxmlformats.org/drawingml/2006/main">
+            <a:r>
+              <a:t/>
+            </a:r>
+          </a:p>
+          <a:p xmlns:a="http://schemas.openxmlformats.org/drawingml/2006/main">
+            <a:r>
+              <a:t>Transição:</a:t>
+            </a:r>
+          </a:p>
+          <a:p xmlns:a="http://schemas.openxmlformats.org/drawingml/2006/main">
+            <a:r>
+              <a:t>Com esse ponto estabelecido, avance para “Demonstração — observe”.</a:t>
             </a:r>
           </a:p>
           <a:p xmlns:a="http://schemas.openxmlformats.org/drawingml/2006/main">
@@ -805,7 +955,57 @@
           <a:lstStyle xmlns:a="http://schemas.openxmlformats.org/drawingml/2006/main"/>
           <a:p xmlns:a="http://schemas.openxmlformats.org/drawingml/2006/main">
             <a:r>
-              <a:t>Durante a execução, destaque: Domínios declarados; Dependências públicas; Refs privadas bloqueadas.</a:t>
+              <a:t>[Roteiro recomendado]</a:t>
+            </a:r>
+          </a:p>
+          <a:p xmlns:a="http://schemas.openxmlformats.org/drawingml/2006/main">
+            <a:r>
+              <a:t>[Tempo sugerido: 01:10]</a:t>
+            </a:r>
+          </a:p>
+          <a:p xmlns:a="http://schemas.openxmlformats.org/drawingml/2006/main">
+            <a:r>
+              <a:t/>
+            </a:r>
+          </a:p>
+          <a:p xmlns:a="http://schemas.openxmlformats.org/drawingml/2006/main">
+            <a:r>
+              <a:t>Fala sugerida:</a:t>
+            </a:r>
+          </a:p>
+          <a:p xmlns:a="http://schemas.openxmlformats.org/drawingml/2006/main">
+            <a:r>
+              <a:t>Enquanto a execução acontece, não olhe apenas para a mensagem final. Observe domínios declarados, Dependências públicas e Refs privadas bloqueadas. Cada sinal responde a uma pergunta diferente sobre o pipeline. Se um deles divergir, interrompa a demonstração e investigue; o objetivo do hands-on é produzir evidência, não apenas chegar rapidamente a uma tela verde.</a:t>
+            </a:r>
+          </a:p>
+          <a:p xmlns:a="http://schemas.openxmlformats.org/drawingml/2006/main">
+            <a:r>
+              <a:t/>
+            </a:r>
+          </a:p>
+          <a:p xmlns:a="http://schemas.openxmlformats.org/drawingml/2006/main">
+            <a:r>
+              <a:t>O que destacar:</a:t>
+            </a:r>
+          </a:p>
+          <a:p xmlns:a="http://schemas.openxmlformats.org/drawingml/2006/main">
+            <a:r>
+              <a:t>- Marque cada observação quando ela aparecer no terminal ou no artifact correspondente.</a:t>
+            </a:r>
+          </a:p>
+          <a:p xmlns:a="http://schemas.openxmlformats.org/drawingml/2006/main">
+            <a:r>
+              <a:t/>
+            </a:r>
+          </a:p>
+          <a:p xmlns:a="http://schemas.openxmlformats.org/drawingml/2006/main">
+            <a:r>
+              <a:t>Transição:</a:t>
+            </a:r>
+          </a:p>
+          <a:p xmlns:a="http://schemas.openxmlformats.org/drawingml/2006/main">
+            <a:r>
+              <a:t>Com esse ponto estabelecido, avance para “RESULTADO ESPERADO”.</a:t>
             </a:r>
           </a:p>
           <a:p xmlns:a="http://schemas.openxmlformats.org/drawingml/2006/main">
@@ -920,7 +1120,57 @@
           <a:lstStyle xmlns:a="http://schemas.openxmlformats.org/drawingml/2006/main"/>
           <a:p xmlns:a="http://schemas.openxmlformats.org/drawingml/2006/main">
             <a:r>
-              <a:t>Confirme o resultado esperado: Data products sem cross-project pago. Se o valor divergir, não avance sem investigar.</a:t>
+              <a:t>[Roteiro recomendado]</a:t>
+            </a:r>
+          </a:p>
+          <a:p xmlns:a="http://schemas.openxmlformats.org/drawingml/2006/main">
+            <a:r>
+              <a:t>[Tempo sugerido: 00:45]</a:t>
+            </a:r>
+          </a:p>
+          <a:p xmlns:a="http://schemas.openxmlformats.org/drawingml/2006/main">
+            <a:r>
+              <a:t/>
+            </a:r>
+          </a:p>
+          <a:p xmlns:a="http://schemas.openxmlformats.org/drawingml/2006/main">
+            <a:r>
+              <a:t>Fala sugerida:</a:t>
+            </a:r>
+          </a:p>
+          <a:p xmlns:a="http://schemas.openxmlformats.org/drawingml/2006/main">
+            <a:r>
+              <a:t>Este é o ponto de parada da demonstração: Data products sem cross-project pago. Esse resultado confirma que a etapa executada produziu a evidência esperada para o checkpoint 08. Se o valor, o status ou o artifact estiver diferente, não trate a divergência como detalhe de ambiente. Use o diagnóstico do curso e só avance quando a causa estiver compreendida.</a:t>
+            </a:r>
+          </a:p>
+          <a:p xmlns:a="http://schemas.openxmlformats.org/drawingml/2006/main">
+            <a:r>
+              <a:t/>
+            </a:r>
+          </a:p>
+          <a:p xmlns:a="http://schemas.openxmlformats.org/drawingml/2006/main">
+            <a:r>
+              <a:t>O que destacar:</a:t>
+            </a:r>
+          </a:p>
+          <a:p xmlns:a="http://schemas.openxmlformats.org/drawingml/2006/main">
+            <a:r>
+              <a:t>- Compare o resultado do terminal com a frase central do slide e registre a evidência antes de continuar.</a:t>
+            </a:r>
+          </a:p>
+          <a:p xmlns:a="http://schemas.openxmlformats.org/drawingml/2006/main">
+            <a:r>
+              <a:t/>
+            </a:r>
+          </a:p>
+          <a:p xmlns:a="http://schemas.openxmlformats.org/drawingml/2006/main">
+            <a:r>
+              <a:t>Transição:</a:t>
+            </a:r>
+          </a:p>
+          <a:p xmlns:a="http://schemas.openxmlformats.org/drawingml/2006/main">
+            <a:r>
+              <a:t>Com esse ponto estabelecido, avance para “O mesmo recurso afeta três decisões”.</a:t>
             </a:r>
           </a:p>
           <a:p xmlns:a="http://schemas.openxmlformats.org/drawingml/2006/main">
@@ -1035,7 +1285,57 @@
           <a:lstStyle xmlns:a="http://schemas.openxmlformats.org/drawingml/2006/main"/>
           <a:p xmlns:a="http://schemas.openxmlformats.org/drawingml/2006/main">
             <a:r>
-              <a:t>Conecte a técnica aos efeitos: Governança: limites claros; FinOps: evite duplicação; IA: contexto por domínio. Não prometa economia sem medição.</a:t>
+              <a:t>[Roteiro recomendado]</a:t>
+            </a:r>
+          </a:p>
+          <a:p xmlns:a="http://schemas.openxmlformats.org/drawingml/2006/main">
+            <a:r>
+              <a:t>[Tempo sugerido: 01:00]</a:t>
+            </a:r>
+          </a:p>
+          <a:p xmlns:a="http://schemas.openxmlformats.org/drawingml/2006/main">
+            <a:r>
+              <a:t/>
+            </a:r>
+          </a:p>
+          <a:p xmlns:a="http://schemas.openxmlformats.org/drawingml/2006/main">
+            <a:r>
+              <a:t>Fala sugerida:</a:t>
+            </a:r>
+          </a:p>
+          <a:p xmlns:a="http://schemas.openxmlformats.org/drawingml/2006/main">
+            <a:r>
+              <a:t>Antes de seguir, conecte a técnica às decisões que ela afeta: Governança: limites claros, FinOps: evite duplicação e IA: contexto por domínio. Governança define responsabilidade e consistência; FinOps pergunta quanto trabalho estamos repetindo; e IA depende do contexto que decidimos expor. A mesma implementação pode melhorar os três eixos, mas os ganhos devem ser medidos separadamente.</a:t>
+            </a:r>
+          </a:p>
+          <a:p xmlns:a="http://schemas.openxmlformats.org/drawingml/2006/main">
+            <a:r>
+              <a:t/>
+            </a:r>
+          </a:p>
+          <a:p xmlns:a="http://schemas.openxmlformats.org/drawingml/2006/main">
+            <a:r>
+              <a:t>O que destacar:</a:t>
+            </a:r>
+          </a:p>
+          <a:p xmlns:a="http://schemas.openxmlformats.org/drawingml/2006/main">
+            <a:r>
+              <a:t>- Percorra os três eixos e evite apresentar economia ou acurácia como consequência automática.</a:t>
+            </a:r>
+          </a:p>
+          <a:p xmlns:a="http://schemas.openxmlformats.org/drawingml/2006/main">
+            <a:r>
+              <a:t/>
+            </a:r>
+          </a:p>
+          <a:p xmlns:a="http://schemas.openxmlformats.org/drawingml/2006/main">
+            <a:r>
+              <a:t>Transição:</a:t>
+            </a:r>
+          </a:p>
+          <a:p xmlns:a="http://schemas.openxmlformats.org/drawingml/2006/main">
+            <a:r>
+              <a:t>Com esse ponto estabelecido, avance para “10 domínios”.</a:t>
             </a:r>
           </a:p>
           <a:p xmlns:a="http://schemas.openxmlformats.org/drawingml/2006/main">
@@ -1150,7 +1450,57 @@
           <a:lstStyle xmlns:a="http://schemas.openxmlformats.org/drawingml/2006/main"/>
           <a:p xmlns:a="http://schemas.openxmlformats.org/drawingml/2006/main">
             <a:r>
-              <a:t>10 domínios: padrão anonimizado do projeto privado. Estrutura reproduzida com Olist; nenhum código proprietário.</a:t>
+              <a:t>[Roteiro recomendado]</a:t>
+            </a:r>
+          </a:p>
+          <a:p xmlns:a="http://schemas.openxmlformats.org/drawingml/2006/main">
+            <a:r>
+              <a:t>[Tempo sugerido: 00:55]</a:t>
+            </a:r>
+          </a:p>
+          <a:p xmlns:a="http://schemas.openxmlformats.org/drawingml/2006/main">
+            <a:r>
+              <a:t/>
+            </a:r>
+          </a:p>
+          <a:p xmlns:a="http://schemas.openxmlformats.org/drawingml/2006/main">
+            <a:r>
+              <a:t>Fala sugerida:</a:t>
+            </a:r>
+          </a:p>
+          <a:p xmlns:a="http://schemas.openxmlformats.org/drawingml/2006/main">
+            <a:r>
+              <a:t>Aqui temos 10 domínios: padrão anonimizado do projeto privado. O número ajuda a dimensionar o exemplo, mas precisa ser lido com a ressalva correta. Estrutura reproduzida com Olist; nenhum código proprietário. Use o case como evidência contextual e não como promessa de que outro projeto repetirá o mesmo resultado sem as mesmas condições.</a:t>
+            </a:r>
+          </a:p>
+          <a:p xmlns:a="http://schemas.openxmlformats.org/drawingml/2006/main">
+            <a:r>
+              <a:t/>
+            </a:r>
+          </a:p>
+          <a:p xmlns:a="http://schemas.openxmlformats.org/drawingml/2006/main">
+            <a:r>
+              <a:t>O que destacar:</a:t>
+            </a:r>
+          </a:p>
+          <a:p xmlns:a="http://schemas.openxmlformats.org/drawingml/2006/main">
+            <a:r>
+              <a:t>- Apresente primeiro o número, depois a definição e termine obrigatoriamente com a ressalva.</a:t>
+            </a:r>
+          </a:p>
+          <a:p xmlns:a="http://schemas.openxmlformats.org/drawingml/2006/main">
+            <a:r>
+              <a:t/>
+            </a:r>
+          </a:p>
+          <a:p xmlns:a="http://schemas.openxmlformats.org/drawingml/2006/main">
+            <a:r>
+              <a:t>Transição:</a:t>
+            </a:r>
+          </a:p>
+          <a:p xmlns:a="http://schemas.openxmlformats.org/drawingml/2006/main">
+            <a:r>
+              <a:t>Com esse ponto estabelecido, avance para “Limitações que precisam permanecer visíveis”.</a:t>
             </a:r>
           </a:p>
           <a:p xmlns:a="http://schemas.openxmlformats.org/drawingml/2006/main">
@@ -1265,7 +1615,57 @@
           <a:lstStyle xmlns:a="http://schemas.openxmlformats.org/drawingml/2006/main"/>
           <a:p xmlns:a="http://schemas.openxmlformats.org/drawingml/2006/main">
             <a:r>
-              <a:t>Apresente os limites sem minimizá-los: Multi-project aumenta coordenação; Package não substitui ownership; Cross-project gerenciado fica fora.</a:t>
+              <a:t>[Roteiro recomendado]</a:t>
+            </a:r>
+          </a:p>
+          <a:p xmlns:a="http://schemas.openxmlformats.org/drawingml/2006/main">
+            <a:r>
+              <a:t>[Tempo sugerido: 01:00]</a:t>
+            </a:r>
+          </a:p>
+          <a:p xmlns:a="http://schemas.openxmlformats.org/drawingml/2006/main">
+            <a:r>
+              <a:t/>
+            </a:r>
+          </a:p>
+          <a:p xmlns:a="http://schemas.openxmlformats.org/drawingml/2006/main">
+            <a:r>
+              <a:t>Fala sugerida:</a:t>
+            </a:r>
+          </a:p>
+          <a:p xmlns:a="http://schemas.openxmlformats.org/drawingml/2006/main">
+            <a:r>
+              <a:t>Também precisamos declarar os limites da recomendação. Neste cenário, considere multi-project aumenta coordenação, Package não substitui ownership e Cross-project gerenciado fica fora. Esses pontos não anulam a técnica; eles delimitam onde a demonstração é válida e quais condições precisam ser verificadas antes de levar o padrão para produção. Tratar limites como parte do design evita transformar uma boa prática em regra universal.</a:t>
+            </a:r>
+          </a:p>
+          <a:p xmlns:a="http://schemas.openxmlformats.org/drawingml/2006/main">
+            <a:r>
+              <a:t/>
+            </a:r>
+          </a:p>
+          <a:p xmlns:a="http://schemas.openxmlformats.org/drawingml/2006/main">
+            <a:r>
+              <a:t>O que destacar:</a:t>
+            </a:r>
+          </a:p>
+          <a:p xmlns:a="http://schemas.openxmlformats.org/drawingml/2006/main">
+            <a:r>
+              <a:t>- Leia os limites com o mesmo peso dado aos benefícios e diferencie restrição do laboratório de restrição do produto.</a:t>
+            </a:r>
+          </a:p>
+          <a:p xmlns:a="http://schemas.openxmlformats.org/drawingml/2006/main">
+            <a:r>
+              <a:t/>
+            </a:r>
+          </a:p>
+          <a:p xmlns:a="http://schemas.openxmlformats.org/drawingml/2006/main">
+            <a:r>
+              <a:t>Transição:</a:t>
+            </a:r>
+          </a:p>
+          <a:p xmlns:a="http://schemas.openxmlformats.org/drawingml/2006/main">
+            <a:r>
+              <a:t>Com esse ponto estabelecido, avance para “RADAR”.</a:t>
             </a:r>
           </a:p>
           <a:p xmlns:a="http://schemas.openxmlformats.org/drawingml/2006/main">
@@ -1380,7 +1780,57 @@
           <a:lstStyle xmlns:a="http://schemas.openxmlformats.org/drawingml/2006/main"/>
           <a:p xmlns:a="http://schemas.openxmlformats.org/drawingml/2006/main">
             <a:r>
-              <a:t>Mesh Enterprise entra somente quando dependência organizacional justificar o custo. Reforce que beta e preview não fazem parte da aceitação.</a:t>
+              <a:t>[Roteiro recomendado]</a:t>
+            </a:r>
+          </a:p>
+          <a:p xmlns:a="http://schemas.openxmlformats.org/drawingml/2006/main">
+            <a:r>
+              <a:t>[Tempo sugerido: 00:55]</a:t>
+            </a:r>
+          </a:p>
+          <a:p xmlns:a="http://schemas.openxmlformats.org/drawingml/2006/main">
+            <a:r>
+              <a:t/>
+            </a:r>
+          </a:p>
+          <a:p xmlns:a="http://schemas.openxmlformats.org/drawingml/2006/main">
+            <a:r>
+              <a:t>Fala sugerida:</a:t>
+            </a:r>
+          </a:p>
+          <a:p xmlns:a="http://schemas.openxmlformats.org/drawingml/2006/main">
+            <a:r>
+              <a:t>Este é o nosso Radar: Mesh Enterprise entra somente quando dependência organizacional justificar o custo. A intenção é mostrar a direção da ferramenta sem misturar preview com o caminho suportado da aula. Novidade observada não é recomendação de produção. Para adotar qualquer recurso futuro, confirme maturidade, adaptador, documentação e impacto sobre o projeto antes de alterar o baseline estável.</a:t>
+            </a:r>
+          </a:p>
+          <a:p xmlns:a="http://schemas.openxmlformats.org/drawingml/2006/main">
+            <a:r>
+              <a:t/>
+            </a:r>
+          </a:p>
+          <a:p xmlns:a="http://schemas.openxmlformats.org/drawingml/2006/main">
+            <a:r>
+              <a:t>O que destacar:</a:t>
+            </a:r>
+          </a:p>
+          <a:p xmlns:a="http://schemas.openxmlformats.org/drawingml/2006/main">
+            <a:r>
+              <a:t>- Reforce visualmente a regra do rodapé e não execute comandos beta ou preview como parte obrigatória da aula.</a:t>
+            </a:r>
+          </a:p>
+          <a:p xmlns:a="http://schemas.openxmlformats.org/drawingml/2006/main">
+            <a:r>
+              <a:t/>
+            </a:r>
+          </a:p>
+          <a:p xmlns:a="http://schemas.openxmlformats.org/drawingml/2006/main">
+            <a:r>
+              <a:t>Transição:</a:t>
+            </a:r>
+          </a:p>
+          <a:p xmlns:a="http://schemas.openxmlformats.org/drawingml/2006/main">
+            <a:r>
+              <a:t>Com esse ponto estabelecido, avance para “PRÓXIMO PASSO”.</a:t>
             </a:r>
           </a:p>
           <a:p xmlns:a="http://schemas.openxmlformats.org/drawingml/2006/main">
@@ -1495,7 +1945,57 @@
           <a:lstStyle xmlns:a="http://schemas.openxmlformats.org/drawingml/2006/main"/>
           <a:p xmlns:a="http://schemas.openxmlformats.org/drawingml/2006/main">
             <a:r>
-              <a:t>Defina um domínio, sua interface pública e duas dependências proibidas. Encerre conectando a aula ao próximo checkpoint.</a:t>
+              <a:t>[Roteiro recomendado]</a:t>
+            </a:r>
+          </a:p>
+          <a:p xmlns:a="http://schemas.openxmlformats.org/drawingml/2006/main">
+            <a:r>
+              <a:t>[Tempo sugerido: 00:40]</a:t>
+            </a:r>
+          </a:p>
+          <a:p xmlns:a="http://schemas.openxmlformats.org/drawingml/2006/main">
+            <a:r>
+              <a:t/>
+            </a:r>
+          </a:p>
+          <a:p xmlns:a="http://schemas.openxmlformats.org/drawingml/2006/main">
+            <a:r>
+              <a:t>Fala sugerida:</a:t>
+            </a:r>
+          </a:p>
+          <a:p xmlns:a="http://schemas.openxmlformats.org/drawingml/2006/main">
+            <a:r>
+              <a:t>Defina um domínio, sua interface pública e duas dependências proibidas. Faça essa etapa antes de seguir para o próximo episódio, porque o curso é cumulativo e o checkpoint atual se torna a base da aula seguinte. Se houver divergência, use o relatório de suporte e registre o que foi observado. O objetivo é avançar com um estado conhecido e reproduzível, não apenas assistir ao conteúdo.</a:t>
+            </a:r>
+          </a:p>
+          <a:p xmlns:a="http://schemas.openxmlformats.org/drawingml/2006/main">
+            <a:r>
+              <a:t/>
+            </a:r>
+          </a:p>
+          <a:p xmlns:a="http://schemas.openxmlformats.org/drawingml/2006/main">
+            <a:r>
+              <a:t>O que destacar:</a:t>
+            </a:r>
+          </a:p>
+          <a:p xmlns:a="http://schemas.openxmlformats.org/drawingml/2006/main">
+            <a:r>
+              <a:t>- Mostre o checkpoint e indique no repositório onde ficam o roteiro, os comandos e as referências da aula.</a:t>
+            </a:r>
+          </a:p>
+          <a:p xmlns:a="http://schemas.openxmlformats.org/drawingml/2006/main">
+            <a:r>
+              <a:t/>
+            </a:r>
+          </a:p>
+          <a:p xmlns:a="http://schemas.openxmlformats.org/drawingml/2006/main">
+            <a:r>
+              <a:t>Transição:</a:t>
+            </a:r>
+          </a:p>
+          <a:p xmlns:a="http://schemas.openxmlformats.org/drawingml/2006/main">
+            <a:r>
+              <a:t>Encerre retomando a pergunta inicial e confirme que o aluno sabe qual ação executar depois do episódio 8.</a:t>
             </a:r>
           </a:p>
           <a:p xmlns:a="http://schemas.openxmlformats.org/drawingml/2006/main">
@@ -1610,7 +2110,57 @@
           <a:lstStyle xmlns:a="http://schemas.openxmlformats.org/drawingml/2006/main"/>
           <a:p xmlns:a="http://schemas.openxmlformats.org/drawingml/2006/main">
             <a:r>
-              <a:t>Produto de dados não é uma pasta Gold com nome novo. Use o diagrama para antecipar o problema que será comprovado no laboratório.</a:t>
+              <a:t>[Roteiro recomendado]</a:t>
+            </a:r>
+          </a:p>
+          <a:p xmlns:a="http://schemas.openxmlformats.org/drawingml/2006/main">
+            <a:r>
+              <a:t>[Tempo sugerido: 01:00]</a:t>
+            </a:r>
+          </a:p>
+          <a:p xmlns:a="http://schemas.openxmlformats.org/drawingml/2006/main">
+            <a:r>
+              <a:t/>
+            </a:r>
+          </a:p>
+          <a:p xmlns:a="http://schemas.openxmlformats.org/drawingml/2006/main">
+            <a:r>
+              <a:t>Fala sugerida:</a:t>
+            </a:r>
+          </a:p>
+          <a:p xmlns:a="http://schemas.openxmlformats.org/drawingml/2006/main">
+            <a:r>
+              <a:t>Quero começar com uma provocação: Produto de dados não é uma pasta Gold com nome novo. Essa pergunta orienta toda a aula. Em vez de aceitar uma afirmação porque ela parece correta, vamos procurar uma definição verificável e uma demonstração executável. Guarde essa tensão, porque voltaremos a ela quando compararmos o conceito com o resultado do laboratório.</a:t>
+            </a:r>
+          </a:p>
+          <a:p xmlns:a="http://schemas.openxmlformats.org/drawingml/2006/main">
+            <a:r>
+              <a:t/>
+            </a:r>
+          </a:p>
+          <a:p xmlns:a="http://schemas.openxmlformats.org/drawingml/2006/main">
+            <a:r>
+              <a:t>O que destacar:</a:t>
+            </a:r>
+          </a:p>
+          <a:p xmlns:a="http://schemas.openxmlformats.org/drawingml/2006/main">
+            <a:r>
+              <a:t>- Dê uma pausa depois da provocação e use o diagrama como mapa do problema, sem explicar todas as etapas ainda.</a:t>
+            </a:r>
+          </a:p>
+          <a:p xmlns:a="http://schemas.openxmlformats.org/drawingml/2006/main">
+            <a:r>
+              <a:t/>
+            </a:r>
+          </a:p>
+          <a:p xmlns:a="http://schemas.openxmlformats.org/drawingml/2006/main">
+            <a:r>
+              <a:t>Transição:</a:t>
+            </a:r>
+          </a:p>
+          <a:p xmlns:a="http://schemas.openxmlformats.org/drawingml/2006/main">
+            <a:r>
+              <a:t>Com esse ponto estabelecido, avance para “Ao final, você consegue...”.</a:t>
             </a:r>
           </a:p>
           <a:p xmlns:a="http://schemas.openxmlformats.org/drawingml/2006/main">
@@ -1725,7 +2275,57 @@
           <a:lstStyle xmlns:a="http://schemas.openxmlformats.org/drawingml/2006/main"/>
           <a:p xmlns:a="http://schemas.openxmlformats.org/drawingml/2006/main">
             <a:r>
-              <a:t>Explique os três resultados observáveis da aula: Definir domínio e interface; Evitar dependência privada; Escolher quando separar projetos.</a:t>
+              <a:t>[Roteiro recomendado]</a:t>
+            </a:r>
+          </a:p>
+          <a:p xmlns:a="http://schemas.openxmlformats.org/drawingml/2006/main">
+            <a:r>
+              <a:t>[Tempo sugerido: 01:00]</a:t>
+            </a:r>
+          </a:p>
+          <a:p xmlns:a="http://schemas.openxmlformats.org/drawingml/2006/main">
+            <a:r>
+              <a:t/>
+            </a:r>
+          </a:p>
+          <a:p xmlns:a="http://schemas.openxmlformats.org/drawingml/2006/main">
+            <a:r>
+              <a:t>Fala sugerida:</a:t>
+            </a:r>
+          </a:p>
+          <a:p xmlns:a="http://schemas.openxmlformats.org/drawingml/2006/main">
+            <a:r>
+              <a:t>Ao final desta aula, você deverá conseguir definir domínio e interface, Evitar dependência privada e Escolher quando separar projetos. Esses resultados formam uma sequência: primeiro entendemos a regra, depois observamos sua representação no projeto e, por fim, comprovamos o comportamento no checkpoint. Se alguma dessas três partes não estiver clara, volte ao slide correspondente antes de executar a demonstração.</a:t>
+            </a:r>
+          </a:p>
+          <a:p xmlns:a="http://schemas.openxmlformats.org/drawingml/2006/main">
+            <a:r>
+              <a:t/>
+            </a:r>
+          </a:p>
+          <a:p xmlns:a="http://schemas.openxmlformats.org/drawingml/2006/main">
+            <a:r>
+              <a:t>O que destacar:</a:t>
+            </a:r>
+          </a:p>
+          <a:p xmlns:a="http://schemas.openxmlformats.org/drawingml/2006/main">
+            <a:r>
+              <a:t>- Percorra os objetivos da esquerda para a direita e apresente-os como resultados observáveis, não como uma agenda abstrata.</a:t>
+            </a:r>
+          </a:p>
+          <a:p xmlns:a="http://schemas.openxmlformats.org/drawingml/2006/main">
+            <a:r>
+              <a:t/>
+            </a:r>
+          </a:p>
+          <a:p xmlns:a="http://schemas.openxmlformats.org/drawingml/2006/main">
+            <a:r>
+              <a:t>Transição:</a:t>
+            </a:r>
+          </a:p>
+          <a:p xmlns:a="http://schemas.openxmlformats.org/drawingml/2006/main">
+            <a:r>
+              <a:t>Com esse ponto estabelecido, avance para “Produto combina contrato e responsabilidade”.</a:t>
             </a:r>
           </a:p>
           <a:p xmlns:a="http://schemas.openxmlformats.org/drawingml/2006/main">
@@ -1840,7 +2440,57 @@
           <a:lstStyle xmlns:a="http://schemas.openxmlformats.org/drawingml/2006/main"/>
           <a:p xmlns:a="http://schemas.openxmlformats.org/drawingml/2006/main">
             <a:r>
-              <a:t>Interface, owner, SLA e consumidores importam mais que a pasta. Desenvolva os pontos: Quem produz; O que promete; Quem consome.</a:t>
+              <a:t>[Roteiro recomendado]</a:t>
+            </a:r>
+          </a:p>
+          <a:p xmlns:a="http://schemas.openxmlformats.org/drawingml/2006/main">
+            <a:r>
+              <a:t>[Tempo sugerido: 01:10]</a:t>
+            </a:r>
+          </a:p>
+          <a:p xmlns:a="http://schemas.openxmlformats.org/drawingml/2006/main">
+            <a:r>
+              <a:t/>
+            </a:r>
+          </a:p>
+          <a:p xmlns:a="http://schemas.openxmlformats.org/drawingml/2006/main">
+            <a:r>
+              <a:t>Fala sugerida:</a:t>
+            </a:r>
+          </a:p>
+          <a:p xmlns:a="http://schemas.openxmlformats.org/drawingml/2006/main">
+            <a:r>
+              <a:t>A mensagem principal deste slide é: Interface, owner, SLA e consumidores importam mais que a pasta. Para tornar isso concreto, observe quem produz, O que promete e Quem consome. Esses pontos devem ser entendidos em conjunto; não são funcionalidades isoladas. No projeto, essa combinação transforma uma convenção informal em algo que pode ser revisado, testado ou consumido de maneira consistente.</a:t>
+            </a:r>
+          </a:p>
+          <a:p xmlns:a="http://schemas.openxmlformats.org/drawingml/2006/main">
+            <a:r>
+              <a:t/>
+            </a:r>
+          </a:p>
+          <a:p xmlns:a="http://schemas.openxmlformats.org/drawingml/2006/main">
+            <a:r>
+              <a:t>O que destacar:</a:t>
+            </a:r>
+          </a:p>
+          <a:p xmlns:a="http://schemas.openxmlformats.org/drawingml/2006/main">
+            <a:r>
+              <a:t>- Comece pelo título, leia a afirmação abaixo dele e depois desenvolva os itens sem repetir o texto palavra por palavra.</a:t>
+            </a:r>
+          </a:p>
+          <a:p xmlns:a="http://schemas.openxmlformats.org/drawingml/2006/main">
+            <a:r>
+              <a:t/>
+            </a:r>
+          </a:p>
+          <a:p xmlns:a="http://schemas.openxmlformats.org/drawingml/2006/main">
+            <a:r>
+              <a:t>Transição:</a:t>
+            </a:r>
+          </a:p>
+          <a:p xmlns:a="http://schemas.openxmlformats.org/drawingml/2006/main">
+            <a:r>
+              <a:t>Com esse ponto estabelecido, avance para “Separações horizontal e vertical resolvem problemas diferentes”.</a:t>
             </a:r>
           </a:p>
           <a:p xmlns:a="http://schemas.openxmlformats.org/drawingml/2006/main">
@@ -1955,7 +2605,57 @@
           <a:lstStyle xmlns:a="http://schemas.openxmlformats.org/drawingml/2006/main"/>
           <a:p xmlns:a="http://schemas.openxmlformats.org/drawingml/2006/main">
             <a:r>
-              <a:t>A topologia deve seguir ownership e ciclo de mudança. Desenvolva os pontos: Por domínio; Por camada; Por plataforma.</a:t>
+              <a:t>[Roteiro recomendado]</a:t>
+            </a:r>
+          </a:p>
+          <a:p xmlns:a="http://schemas.openxmlformats.org/drawingml/2006/main">
+            <a:r>
+              <a:t>[Tempo sugerido: 01:10]</a:t>
+            </a:r>
+          </a:p>
+          <a:p xmlns:a="http://schemas.openxmlformats.org/drawingml/2006/main">
+            <a:r>
+              <a:t/>
+            </a:r>
+          </a:p>
+          <a:p xmlns:a="http://schemas.openxmlformats.org/drawingml/2006/main">
+            <a:r>
+              <a:t>Fala sugerida:</a:t>
+            </a:r>
+          </a:p>
+          <a:p xmlns:a="http://schemas.openxmlformats.org/drawingml/2006/main">
+            <a:r>
+              <a:t>A mensagem principal deste slide é: A topologia deve seguir ownership e ciclo de mudança. Para tornar isso concreto, observe por domínio, Por camada e Por plataforma. Esses pontos devem ser entendidos em conjunto; não são funcionalidades isoladas. No projeto, essa combinação transforma uma convenção informal em algo que pode ser revisado, testado ou consumido de maneira consistente.</a:t>
+            </a:r>
+          </a:p>
+          <a:p xmlns:a="http://schemas.openxmlformats.org/drawingml/2006/main">
+            <a:r>
+              <a:t/>
+            </a:r>
+          </a:p>
+          <a:p xmlns:a="http://schemas.openxmlformats.org/drawingml/2006/main">
+            <a:r>
+              <a:t>O que destacar:</a:t>
+            </a:r>
+          </a:p>
+          <a:p xmlns:a="http://schemas.openxmlformats.org/drawingml/2006/main">
+            <a:r>
+              <a:t>- Comece pelo título, leia a afirmação abaixo dele e depois desenvolva os itens sem repetir o texto palavra por palavra.</a:t>
+            </a:r>
+          </a:p>
+          <a:p xmlns:a="http://schemas.openxmlformats.org/drawingml/2006/main">
+            <a:r>
+              <a:t/>
+            </a:r>
+          </a:p>
+          <a:p xmlns:a="http://schemas.openxmlformats.org/drawingml/2006/main">
+            <a:r>
+              <a:t>Transição:</a:t>
+            </a:r>
+          </a:p>
+          <a:p xmlns:a="http://schemas.openxmlformats.org/drawingml/2006/main">
+            <a:r>
+              <a:t>Com esse ponto estabelecido, avance para “Separações horizontal e vertical resolvem problemas diferentes”.</a:t>
             </a:r>
           </a:p>
           <a:p xmlns:a="http://schemas.openxmlformats.org/drawingml/2006/main">
@@ -2070,7 +2770,57 @@
           <a:lstStyle xmlns:a="http://schemas.openxmlformats.org/drawingml/2006/main"/>
           <a:p xmlns:a="http://schemas.openxmlformats.org/drawingml/2006/main">
             <a:r>
-              <a:t>Use a composição para explicar visualmente: A topologia deve seguir ownership e ciclo de mudança. Por domínio Por camada Por plataforma</a:t>
+              <a:t>[Roteiro recomendado]</a:t>
+            </a:r>
+          </a:p>
+          <a:p xmlns:a="http://schemas.openxmlformats.org/drawingml/2006/main">
+            <a:r>
+              <a:t>[Tempo sugerido: 00:55]</a:t>
+            </a:r>
+          </a:p>
+          <a:p xmlns:a="http://schemas.openxmlformats.org/drawingml/2006/main">
+            <a:r>
+              <a:t/>
+            </a:r>
+          </a:p>
+          <a:p xmlns:a="http://schemas.openxmlformats.org/drawingml/2006/main">
+            <a:r>
+              <a:t>Fala sugerida:</a:t>
+            </a:r>
+          </a:p>
+          <a:p xmlns:a="http://schemas.openxmlformats.org/drawingml/2006/main">
+            <a:r>
+              <a:t>Agora vamos ler a ideia visualmente. A topologia deve seguir ownership e ciclo de mudança. Siga a composição na ordem mostrada e conecte os elementos principais. A imagem ou o fluxo não cria uma regra nova; ele torna visível a relação que acabamos de explicar. A figura é identificada como figura oficial dbt Labs — Apache 2.0</a:t>
+            </a:r>
+          </a:p>
+          <a:p xmlns:a="http://schemas.openxmlformats.org/drawingml/2006/main">
+            <a:r>
+              <a:t/>
+            </a:r>
+          </a:p>
+          <a:p xmlns:a="http://schemas.openxmlformats.org/drawingml/2006/main">
+            <a:r>
+              <a:t>O que destacar:</a:t>
+            </a:r>
+          </a:p>
+          <a:p xmlns:a="http://schemas.openxmlformats.org/drawingml/2006/main">
+            <a:r>
+              <a:t>- Aponte a legenda e deixe explícito quando a figura é oficial; as anotações do curso ficam fora da imagem.</a:t>
+            </a:r>
+          </a:p>
+          <a:p xmlns:a="http://schemas.openxmlformats.org/drawingml/2006/main">
+            <a:r>
+              <a:t/>
+            </a:r>
+          </a:p>
+          <a:p xmlns:a="http://schemas.openxmlformats.org/drawingml/2006/main">
+            <a:r>
+              <a:t>Transição:</a:t>
+            </a:r>
+          </a:p>
+          <a:p xmlns:a="http://schemas.openxmlformats.org/drawingml/2006/main">
+            <a:r>
+              <a:t>Com esse ponto estabelecido, avance para “Core aberto já oferece limites úteis”.</a:t>
             </a:r>
           </a:p>
           <a:p xmlns:a="http://schemas.openxmlformats.org/drawingml/2006/main">
@@ -2190,7 +2940,57 @@
           <a:lstStyle xmlns:a="http://schemas.openxmlformats.org/drawingml/2006/main"/>
           <a:p xmlns:a="http://schemas.openxmlformats.org/drawingml/2006/main">
             <a:r>
-              <a:t>Groups, access, packages e refs organizam dependências dentro do projeto. Desenvolva os pontos: Interfaces públicas; Modelos privados; Packages versionados.</a:t>
+              <a:t>[Roteiro recomendado]</a:t>
+            </a:r>
+          </a:p>
+          <a:p xmlns:a="http://schemas.openxmlformats.org/drawingml/2006/main">
+            <a:r>
+              <a:t>[Tempo sugerido: 01:10]</a:t>
+            </a:r>
+          </a:p>
+          <a:p xmlns:a="http://schemas.openxmlformats.org/drawingml/2006/main">
+            <a:r>
+              <a:t/>
+            </a:r>
+          </a:p>
+          <a:p xmlns:a="http://schemas.openxmlformats.org/drawingml/2006/main">
+            <a:r>
+              <a:t>Fala sugerida:</a:t>
+            </a:r>
+          </a:p>
+          <a:p xmlns:a="http://schemas.openxmlformats.org/drawingml/2006/main">
+            <a:r>
+              <a:t>A mensagem principal deste slide é: Groups, access, packages e refs organizam dependências dentro do projeto. Para tornar isso concreto, observe interfaces públicas, Modelos privados e Packages versionados. Esses pontos devem ser entendidos em conjunto; não são funcionalidades isoladas. No projeto, essa combinação transforma uma convenção informal em algo que pode ser revisado, testado ou consumido de maneira consistente.</a:t>
+            </a:r>
+          </a:p>
+          <a:p xmlns:a="http://schemas.openxmlformats.org/drawingml/2006/main">
+            <a:r>
+              <a:t/>
+            </a:r>
+          </a:p>
+          <a:p xmlns:a="http://schemas.openxmlformats.org/drawingml/2006/main">
+            <a:r>
+              <a:t>O que destacar:</a:t>
+            </a:r>
+          </a:p>
+          <a:p xmlns:a="http://schemas.openxmlformats.org/drawingml/2006/main">
+            <a:r>
+              <a:t>- Comece pelo título, leia a afirmação abaixo dele e depois desenvolva os itens sem repetir o texto palavra por palavra.</a:t>
+            </a:r>
+          </a:p>
+          <a:p xmlns:a="http://schemas.openxmlformats.org/drawingml/2006/main">
+            <a:r>
+              <a:t/>
+            </a:r>
+          </a:p>
+          <a:p xmlns:a="http://schemas.openxmlformats.org/drawingml/2006/main">
+            <a:r>
+              <a:t>Transição:</a:t>
+            </a:r>
+          </a:p>
+          <a:p xmlns:a="http://schemas.openxmlformats.org/drawingml/2006/main">
+            <a:r>
+              <a:t>Com esse ponto estabelecido, avance para “Core aberto já oferece limites úteis”.</a:t>
             </a:r>
           </a:p>
           <a:p xmlns:a="http://schemas.openxmlformats.org/drawingml/2006/main">
@@ -2305,7 +3105,57 @@
           <a:lstStyle xmlns:a="http://schemas.openxmlformats.org/drawingml/2006/main"/>
           <a:p xmlns:a="http://schemas.openxmlformats.org/drawingml/2006/main">
             <a:r>
-              <a:t>Use a composição para explicar visualmente: Groups, access, packages e refs organizam dependências dentro do projeto. Interfaces públicas Modelos privados Packages versionados</a:t>
+              <a:t>[Roteiro recomendado]</a:t>
+            </a:r>
+          </a:p>
+          <a:p xmlns:a="http://schemas.openxmlformats.org/drawingml/2006/main">
+            <a:r>
+              <a:t>[Tempo sugerido: 00:55]</a:t>
+            </a:r>
+          </a:p>
+          <a:p xmlns:a="http://schemas.openxmlformats.org/drawingml/2006/main">
+            <a:r>
+              <a:t/>
+            </a:r>
+          </a:p>
+          <a:p xmlns:a="http://schemas.openxmlformats.org/drawingml/2006/main">
+            <a:r>
+              <a:t>Fala sugerida:</a:t>
+            </a:r>
+          </a:p>
+          <a:p xmlns:a="http://schemas.openxmlformats.org/drawingml/2006/main">
+            <a:r>
+              <a:t>Agora vamos ler a ideia visualmente. Groups, access, packages e refs organizam dependências dentro do projeto. Siga a composição na ordem mostrada e conecte os elementos principais. A imagem ou o fluxo não cria uma regra nova; ele torna visível a relação que acabamos de explicar. Use a disposição dos elementos para reforçar causa, dependência ou comparação.</a:t>
+            </a:r>
+          </a:p>
+          <a:p xmlns:a="http://schemas.openxmlformats.org/drawingml/2006/main">
+            <a:r>
+              <a:t/>
+            </a:r>
+          </a:p>
+          <a:p xmlns:a="http://schemas.openxmlformats.org/drawingml/2006/main">
+            <a:r>
+              <a:t>O que destacar:</a:t>
+            </a:r>
+          </a:p>
+          <a:p xmlns:a="http://schemas.openxmlformats.org/drawingml/2006/main">
+            <a:r>
+              <a:t>- Acompanhe o fluxo ou a comparação com o cursor e preserve a ordem de leitura do slide.</a:t>
+            </a:r>
+          </a:p>
+          <a:p xmlns:a="http://schemas.openxmlformats.org/drawingml/2006/main">
+            <a:r>
+              <a:t/>
+            </a:r>
+          </a:p>
+          <a:p xmlns:a="http://schemas.openxmlformats.org/drawingml/2006/main">
+            <a:r>
+              <a:t>Transição:</a:t>
+            </a:r>
+          </a:p>
+          <a:p xmlns:a="http://schemas.openxmlformats.org/drawingml/2006/main">
+            <a:r>
+              <a:t>Com esse ponto estabelecido, avance para “Separe fisicamente quando o custo se paga”.</a:t>
             </a:r>
           </a:p>
           <a:p xmlns:a="http://schemas.openxmlformats.org/drawingml/2006/main">
@@ -2420,7 +3270,57 @@
           <a:lstStyle xmlns:a="http://schemas.openxmlformats.org/drawingml/2006/main"/>
           <a:p xmlns:a="http://schemas.openxmlformats.org/drawingml/2006/main">
             <a:r>
-              <a:t>Autonomia, segurança e ciclos independentes precisam superar a complexidade. Desenvolva os pontos: Ownership real; Release independente; Governança de dependência.</a:t>
+              <a:t>[Roteiro recomendado]</a:t>
+            </a:r>
+          </a:p>
+          <a:p xmlns:a="http://schemas.openxmlformats.org/drawingml/2006/main">
+            <a:r>
+              <a:t>[Tempo sugerido: 01:10]</a:t>
+            </a:r>
+          </a:p>
+          <a:p xmlns:a="http://schemas.openxmlformats.org/drawingml/2006/main">
+            <a:r>
+              <a:t/>
+            </a:r>
+          </a:p>
+          <a:p xmlns:a="http://schemas.openxmlformats.org/drawingml/2006/main">
+            <a:r>
+              <a:t>Fala sugerida:</a:t>
+            </a:r>
+          </a:p>
+          <a:p xmlns:a="http://schemas.openxmlformats.org/drawingml/2006/main">
+            <a:r>
+              <a:t>A mensagem principal deste slide é: Autonomia, segurança e ciclos independentes precisam superar a complexidade. Para tornar isso concreto, observe ownership real, Release independente e Governança de dependência. Esses pontos devem ser entendidos em conjunto; não são funcionalidades isoladas. No projeto, essa combinação transforma uma convenção informal em algo que pode ser revisado, testado ou consumido de maneira consistente.</a:t>
+            </a:r>
+          </a:p>
+          <a:p xmlns:a="http://schemas.openxmlformats.org/drawingml/2006/main">
+            <a:r>
+              <a:t/>
+            </a:r>
+          </a:p>
+          <a:p xmlns:a="http://schemas.openxmlformats.org/drawingml/2006/main">
+            <a:r>
+              <a:t>O que destacar:</a:t>
+            </a:r>
+          </a:p>
+          <a:p xmlns:a="http://schemas.openxmlformats.org/drawingml/2006/main">
+            <a:r>
+              <a:t>- Comece pelo título, leia a afirmação abaixo dele e depois desenvolva os itens sem repetir o texto palavra por palavra.</a:t>
+            </a:r>
+          </a:p>
+          <a:p xmlns:a="http://schemas.openxmlformats.org/drawingml/2006/main">
+            <a:r>
+              <a:t/>
+            </a:r>
+          </a:p>
+          <a:p xmlns:a="http://schemas.openxmlformats.org/drawingml/2006/main">
+            <a:r>
+              <a:t>Transição:</a:t>
+            </a:r>
+          </a:p>
+          <a:p xmlns:a="http://schemas.openxmlformats.org/drawingml/2006/main">
+            <a:r>
+              <a:t>Com esse ponto estabelecido, avance para “Separe fisicamente quando o custo se paga”.</a:t>
             </a:r>
           </a:p>
           <a:p xmlns:a="http://schemas.openxmlformats.org/drawingml/2006/main">
@@ -2567,7 +3467,7 @@
   </p:cSld>
   <p:clrMap bg1="lt1" tx1="dk1" bg2="lt2" tx2="dk2" accent1="accent1" accent2="accent2" accent3="accent3" accent4="accent4" accent5="accent5" accent6="accent6" hlink="hlink" folHlink="folHlink"/>
   <p:sldLayoutIdLst>
-    <p:sldLayoutId xmlns:r="http://schemas.openxmlformats.org/officeDocument/2006/relationships" id="2147483649" r:id="R3bcf35068d894ff3"/>
+    <p:sldLayoutId xmlns:r="http://schemas.openxmlformats.org/officeDocument/2006/relationships" id="2147483649" r:id="R5affb24eed474574"/>
   </p:sldLayoutIdLst>
   <p:txStyles>
     <p:titleStyle>
@@ -2865,8 +3765,8 @@
   </p:cSld>
   <p:clrMap bg1="lt1" tx1="dk1" bg2="lt2" tx2="dk2" accent1="accent1" accent2="accent2" accent3="accent3" accent4="accent4" accent5="accent5" accent6="accent6" hlink="hlink" folHlink="folHlink"/>
   <p:sldLayoutIdLst>
-    <p:sldLayoutId xmlns:r="http://schemas.openxmlformats.org/officeDocument/2006/relationships" id="2147483651" r:id="Rb621c0ec26e8486e"/>
-    <p:sldLayoutId xmlns:r="http://schemas.openxmlformats.org/officeDocument/2006/relationships" id="2147483652" r:id="R290cc1743ad44201"/>
+    <p:sldLayoutId xmlns:r="http://schemas.openxmlformats.org/officeDocument/2006/relationships" id="2147483651" r:id="R2c2206e7639f4666"/>
+    <p:sldLayoutId xmlns:r="http://schemas.openxmlformats.org/officeDocument/2006/relationships" id="2147483652" r:id="R73ffd2c34c3f47ee"/>
   </p:sldLayoutIdLst>
 </p:sldMaster>
 </file>
@@ -3390,14 +4290,14 @@
       </p:grpSpPr>
       <p:pic>
         <p:nvPicPr>
-          <p:cNvPr id="9" name="" descr="Ilustração conceitual autoral da capa: EPISÓDIO 8 — Data products sem depender de Mesh."/>
+          <p:cNvPr id="10" name="" descr="Ilustração conceitual autoral da capa: EPISÓDIO 8 — Data products sem depender de Mesh."/>
           <p:cNvPicPr>
             <a:picLocks xmlns:a="http://schemas.openxmlformats.org/drawingml/2006/main" noChangeAspect="1"/>
           </p:cNvPicPr>
           <p:nvPr/>
         </p:nvPicPr>
         <p:blipFill>
-          <a:blip xmlns:r="http://schemas.openxmlformats.org/officeDocument/2006/relationships" xmlns:a="http://schemas.openxmlformats.org/drawingml/2006/main" r:embed="Rddd36d72640546a4"/>
+          <a:blip xmlns:r="http://schemas.openxmlformats.org/officeDocument/2006/relationships" xmlns:a="http://schemas.openxmlformats.org/drawingml/2006/main" r:embed="R5b9963656a864eaf"/>
           <a:srcRect xmlns:a="http://schemas.openxmlformats.org/drawingml/2006/main" l="19785" t="0" r="19785" b="0"/>
           <a:stretch xmlns:a="http://schemas.openxmlformats.org/drawingml/2006/main">
             <a:fillRect l="0" t="0" r="0" b="0"/>
@@ -3510,6 +4410,7 @@
           <a:lstStyle xmlns:a="http://schemas.openxmlformats.org/drawingml/2006/main"/>
           <a:p xmlns:a="http://schemas.openxmlformats.org/drawingml/2006/main">
             <a:pPr>
+              <a:buNone/>
               <a:defRPr sz="1350" b="1">
                 <a:solidFill>
                   <a:srgbClr val="1EC5FF"/>
@@ -3560,6 +4461,7 @@
           <a:lstStyle xmlns:a="http://schemas.openxmlformats.org/drawingml/2006/main"/>
           <a:p xmlns:a="http://schemas.openxmlformats.org/drawingml/2006/main">
             <a:pPr>
+              <a:buNone/>
               <a:defRPr sz="3225" b="1">
                 <a:solidFill>
                   <a:srgbClr val="FFFFFF"/>
@@ -3610,6 +4512,7 @@
           <a:lstStyle xmlns:a="http://schemas.openxmlformats.org/drawingml/2006/main"/>
           <a:p xmlns:a="http://schemas.openxmlformats.org/drawingml/2006/main">
             <a:pPr>
+              <a:buNone/>
               <a:defRPr sz="1800">
                 <a:solidFill>
                   <a:srgbClr val="E2F2FF"/>
@@ -3691,6 +4594,7 @@
           <a:lstStyle xmlns:a="http://schemas.openxmlformats.org/drawingml/2006/main"/>
           <a:p xmlns:a="http://schemas.openxmlformats.org/drawingml/2006/main">
             <a:pPr>
+              <a:buNone/>
               <a:defRPr sz="1200" b="1">
                 <a:solidFill>
                   <a:srgbClr val="FFFFFF">
@@ -3782,6 +4686,7 @@
           <a:lstStyle xmlns:a="http://schemas.openxmlformats.org/drawingml/2006/main"/>
           <a:p xmlns:a="http://schemas.openxmlformats.org/drawingml/2006/main">
             <a:pPr>
+              <a:buNone/>
               <a:defRPr sz="2925" b="1">
                 <a:solidFill>
                   <a:srgbClr val="FFFFFF"/>
@@ -3832,6 +4737,7 @@
           <a:lstStyle xmlns:a="http://schemas.openxmlformats.org/drawingml/2006/main"/>
           <a:p xmlns:a="http://schemas.openxmlformats.org/drawingml/2006/main">
             <a:pPr>
+              <a:buNone/>
               <a:defRPr sz="2100" b="1">
                 <a:solidFill>
                   <a:srgbClr val="1EC5FF"/>
@@ -3882,6 +4788,7 @@
           <a:lstStyle xmlns:a="http://schemas.openxmlformats.org/drawingml/2006/main"/>
           <a:p xmlns:a="http://schemas.openxmlformats.org/drawingml/2006/main">
             <a:pPr>
+              <a:buNone/>
               <a:defRPr sz="2100" b="1">
                 <a:solidFill>
                   <a:srgbClr val="2DBE8C"/>
@@ -3965,6 +4872,7 @@
           <a:lstStyle xmlns:a="http://schemas.openxmlformats.org/drawingml/2006/main"/>
           <a:p xmlns:a="http://schemas.openxmlformats.org/drawingml/2006/main">
             <a:pPr>
+              <a:buNone/>
               <a:defRPr sz="1650">
                 <a:solidFill>
                   <a:srgbClr val="FFFFFF"/>
@@ -3982,6 +4890,7 @@
           </a:p>
           <a:p xmlns:a="http://schemas.openxmlformats.org/drawingml/2006/main">
             <a:pPr>
+              <a:buNone/>
               <a:defRPr sz="1650">
                 <a:solidFill>
                   <a:srgbClr val="FFFFFF"/>
@@ -4032,6 +4941,7 @@
           <a:lstStyle xmlns:a="http://schemas.openxmlformats.org/drawingml/2006/main"/>
           <a:p xmlns:a="http://schemas.openxmlformats.org/drawingml/2006/main">
             <a:pPr>
+              <a:buNone/>
               <a:defRPr sz="1650">
                 <a:solidFill>
                   <a:srgbClr val="FFFFFF"/>
@@ -4082,6 +4992,7 @@
           <a:lstStyle xmlns:a="http://schemas.openxmlformats.org/drawingml/2006/main"/>
           <a:p xmlns:a="http://schemas.openxmlformats.org/drawingml/2006/main">
             <a:pPr>
+              <a:buNone/>
               <a:defRPr sz="1050" b="1">
                 <a:solidFill>
                   <a:srgbClr val="1EC5FF"/>
@@ -4165,6 +5076,7 @@
           <a:lstStyle xmlns:a="http://schemas.openxmlformats.org/drawingml/2006/main"/>
           <a:p xmlns:a="http://schemas.openxmlformats.org/drawingml/2006/main">
             <a:pPr>
+              <a:buNone/>
               <a:defRPr sz="825">
                 <a:solidFill>
                   <a:srgbClr val="FFFFFF">
@@ -4219,6 +5131,7 @@
           <a:lstStyle xmlns:a="http://schemas.openxmlformats.org/drawingml/2006/main"/>
           <a:p xmlns:a="http://schemas.openxmlformats.org/drawingml/2006/main">
             <a:pPr algn="r">
+              <a:buNone/>
               <a:defRPr sz="825" b="1">
                 <a:solidFill>
                   <a:srgbClr val="FFFFFF">
@@ -4310,6 +5223,7 @@
           <a:lstStyle xmlns:a="http://schemas.openxmlformats.org/drawingml/2006/main"/>
           <a:p xmlns:a="http://schemas.openxmlformats.org/drawingml/2006/main">
             <a:pPr>
+              <a:buNone/>
               <a:defRPr sz="2925" b="1">
                 <a:solidFill>
                   <a:srgbClr val="FFFFFF"/>
@@ -4395,6 +5309,7 @@
           <a:lstStyle xmlns:a="http://schemas.openxmlformats.org/drawingml/2006/main"/>
           <a:p xmlns:a="http://schemas.openxmlformats.org/drawingml/2006/main">
             <a:pPr>
+              <a:buNone/>
               <a:defRPr sz="1875" b="1">
                 <a:solidFill>
                   <a:srgbClr val="1EC5FF"/>
@@ -4445,6 +5360,7 @@
           <a:lstStyle xmlns:a="http://schemas.openxmlformats.org/drawingml/2006/main"/>
           <a:p xmlns:a="http://schemas.openxmlformats.org/drawingml/2006/main">
             <a:pPr>
+              <a:buNone/>
               <a:defRPr sz="1425">
                 <a:solidFill>
                   <a:srgbClr val="E2F2FF"/>
@@ -4495,6 +5411,7 @@
           <a:lstStyle xmlns:a="http://schemas.openxmlformats.org/drawingml/2006/main"/>
           <a:p xmlns:a="http://schemas.openxmlformats.org/drawingml/2006/main">
             <a:pPr>
+              <a:buNone/>
               <a:defRPr sz="1050" b="1">
                 <a:solidFill>
                   <a:srgbClr val="1EC5FF"/>
@@ -4578,6 +5495,7 @@
           <a:lstStyle xmlns:a="http://schemas.openxmlformats.org/drawingml/2006/main"/>
           <a:p xmlns:a="http://schemas.openxmlformats.org/drawingml/2006/main">
             <a:pPr>
+              <a:buNone/>
               <a:defRPr sz="825">
                 <a:solidFill>
                   <a:srgbClr val="FFFFFF">
@@ -4632,6 +5550,7 @@
           <a:lstStyle xmlns:a="http://schemas.openxmlformats.org/drawingml/2006/main"/>
           <a:p xmlns:a="http://schemas.openxmlformats.org/drawingml/2006/main">
             <a:pPr algn="r">
+              <a:buNone/>
               <a:defRPr sz="825" b="1">
                 <a:solidFill>
                   <a:srgbClr val="FFFFFF">
@@ -4715,6 +5634,7 @@
           <a:lstStyle xmlns:a="http://schemas.openxmlformats.org/drawingml/2006/main"/>
           <a:p xmlns:a="http://schemas.openxmlformats.org/drawingml/2006/main">
             <a:pPr>
+              <a:buNone/>
               <a:defRPr sz="2925" b="1">
                 <a:solidFill>
                   <a:srgbClr val="0B1F3A"/>
@@ -4765,6 +5685,7 @@
           <a:lstStyle xmlns:a="http://schemas.openxmlformats.org/drawingml/2006/main"/>
           <a:p xmlns:a="http://schemas.openxmlformats.org/drawingml/2006/main">
             <a:pPr>
+              <a:buNone/>
               <a:defRPr sz="3450" b="1">
                 <a:solidFill>
                   <a:srgbClr val="1565C0"/>
@@ -4815,6 +5736,7 @@
           <a:lstStyle xmlns:a="http://schemas.openxmlformats.org/drawingml/2006/main"/>
           <a:p xmlns:a="http://schemas.openxmlformats.org/drawingml/2006/main">
             <a:pPr>
+              <a:buNone/>
               <a:defRPr sz="1575" b="1">
                 <a:solidFill>
                   <a:srgbClr val="0B1F3A"/>
@@ -4896,6 +5818,7 @@
           <a:lstStyle xmlns:a="http://schemas.openxmlformats.org/drawingml/2006/main"/>
           <a:p xmlns:a="http://schemas.openxmlformats.org/drawingml/2006/main">
             <a:pPr>
+              <a:buNone/>
               <a:defRPr sz="3450" b="1">
                 <a:solidFill>
                   <a:srgbClr val="1565C0"/>
@@ -4946,6 +5869,7 @@
           <a:lstStyle xmlns:a="http://schemas.openxmlformats.org/drawingml/2006/main"/>
           <a:p xmlns:a="http://schemas.openxmlformats.org/drawingml/2006/main">
             <a:pPr>
+              <a:buNone/>
               <a:defRPr sz="1575" b="1">
                 <a:solidFill>
                   <a:srgbClr val="0B1F3A"/>
@@ -5027,6 +5951,7 @@
           <a:lstStyle xmlns:a="http://schemas.openxmlformats.org/drawingml/2006/main"/>
           <a:p xmlns:a="http://schemas.openxmlformats.org/drawingml/2006/main">
             <a:pPr>
+              <a:buNone/>
               <a:defRPr sz="3450" b="1">
                 <a:solidFill>
                   <a:srgbClr val="1565C0"/>
@@ -5077,6 +6002,7 @@
           <a:lstStyle xmlns:a="http://schemas.openxmlformats.org/drawingml/2006/main"/>
           <a:p xmlns:a="http://schemas.openxmlformats.org/drawingml/2006/main">
             <a:pPr>
+              <a:buNone/>
               <a:defRPr sz="1575" b="1">
                 <a:solidFill>
                   <a:srgbClr val="0B1F3A"/>
@@ -5127,6 +6053,7 @@
           <a:lstStyle xmlns:a="http://schemas.openxmlformats.org/drawingml/2006/main"/>
           <a:p xmlns:a="http://schemas.openxmlformats.org/drawingml/2006/main">
             <a:pPr>
+              <a:buNone/>
               <a:defRPr sz="1050" b="1">
                 <a:solidFill>
                   <a:srgbClr val="1565C0"/>
@@ -5210,6 +6137,7 @@
           <a:lstStyle xmlns:a="http://schemas.openxmlformats.org/drawingml/2006/main"/>
           <a:p xmlns:a="http://schemas.openxmlformats.org/drawingml/2006/main">
             <a:pPr>
+              <a:buNone/>
               <a:defRPr sz="825">
                 <a:solidFill>
                   <a:srgbClr val="0B1F3A">
@@ -5264,6 +6192,7 @@
           <a:lstStyle xmlns:a="http://schemas.openxmlformats.org/drawingml/2006/main"/>
           <a:p xmlns:a="http://schemas.openxmlformats.org/drawingml/2006/main">
             <a:pPr algn="r">
+              <a:buNone/>
               <a:defRPr sz="825" b="1">
                 <a:solidFill>
                   <a:srgbClr val="0B1F3A">
@@ -5355,6 +6284,7 @@
           <a:lstStyle xmlns:a="http://schemas.openxmlformats.org/drawingml/2006/main"/>
           <a:p xmlns:a="http://schemas.openxmlformats.org/drawingml/2006/main">
             <a:pPr>
+              <a:buNone/>
               <a:defRPr sz="1350" b="1">
                 <a:solidFill>
                   <a:srgbClr val="1EC5FF"/>
@@ -5405,6 +6335,7 @@
           <a:lstStyle xmlns:a="http://schemas.openxmlformats.org/drawingml/2006/main"/>
           <a:p xmlns:a="http://schemas.openxmlformats.org/drawingml/2006/main">
             <a:pPr>
+              <a:buNone/>
               <a:defRPr sz="3450" b="1">
                 <a:solidFill>
                   <a:srgbClr val="FFFFFF"/>
@@ -5455,6 +6386,7 @@
           <a:lstStyle xmlns:a="http://schemas.openxmlformats.org/drawingml/2006/main"/>
           <a:p xmlns:a="http://schemas.openxmlformats.org/drawingml/2006/main">
             <a:pPr>
+              <a:buNone/>
               <a:defRPr sz="1650">
                 <a:solidFill>
                   <a:srgbClr val="E2F2FF"/>
@@ -5579,6 +6511,7 @@
           <a:lstStyle xmlns:a="http://schemas.openxmlformats.org/drawingml/2006/main"/>
           <a:p xmlns:a="http://schemas.openxmlformats.org/drawingml/2006/main">
             <a:pPr>
+              <a:buNone/>
               <a:defRPr sz="1050" b="1">
                 <a:solidFill>
                   <a:srgbClr val="1EC5FF"/>
@@ -5662,6 +6595,7 @@
           <a:lstStyle xmlns:a="http://schemas.openxmlformats.org/drawingml/2006/main"/>
           <a:p xmlns:a="http://schemas.openxmlformats.org/drawingml/2006/main">
             <a:pPr>
+              <a:buNone/>
               <a:defRPr sz="825">
                 <a:solidFill>
                   <a:srgbClr val="FFFFFF">
@@ -5716,6 +6650,7 @@
           <a:lstStyle xmlns:a="http://schemas.openxmlformats.org/drawingml/2006/main"/>
           <a:p xmlns:a="http://schemas.openxmlformats.org/drawingml/2006/main">
             <a:pPr algn="r">
+              <a:buNone/>
               <a:defRPr sz="825" b="1">
                 <a:solidFill>
                   <a:srgbClr val="FFFFFF">
@@ -5799,6 +6734,7 @@
           <a:lstStyle xmlns:a="http://schemas.openxmlformats.org/drawingml/2006/main"/>
           <a:p xmlns:a="http://schemas.openxmlformats.org/drawingml/2006/main">
             <a:pPr>
+              <a:buNone/>
               <a:defRPr sz="2925" b="1">
                 <a:solidFill>
                   <a:srgbClr val="0B1F3A"/>
@@ -5849,6 +6785,7 @@
           <a:lstStyle xmlns:a="http://schemas.openxmlformats.org/drawingml/2006/main"/>
           <a:p xmlns:a="http://schemas.openxmlformats.org/drawingml/2006/main">
             <a:pPr>
+              <a:buNone/>
               <a:defRPr sz="3450" b="1">
                 <a:solidFill>
                   <a:srgbClr val="1565C0"/>
@@ -5899,6 +6836,7 @@
           <a:lstStyle xmlns:a="http://schemas.openxmlformats.org/drawingml/2006/main"/>
           <a:p xmlns:a="http://schemas.openxmlformats.org/drawingml/2006/main">
             <a:pPr>
+              <a:buNone/>
               <a:defRPr sz="1575" b="1">
                 <a:solidFill>
                   <a:srgbClr val="0B1F3A"/>
@@ -5980,6 +6918,7 @@
           <a:lstStyle xmlns:a="http://schemas.openxmlformats.org/drawingml/2006/main"/>
           <a:p xmlns:a="http://schemas.openxmlformats.org/drawingml/2006/main">
             <a:pPr>
+              <a:buNone/>
               <a:defRPr sz="3450" b="1">
                 <a:solidFill>
                   <a:srgbClr val="1565C0"/>
@@ -6030,6 +6969,7 @@
           <a:lstStyle xmlns:a="http://schemas.openxmlformats.org/drawingml/2006/main"/>
           <a:p xmlns:a="http://schemas.openxmlformats.org/drawingml/2006/main">
             <a:pPr>
+              <a:buNone/>
               <a:defRPr sz="1575" b="1">
                 <a:solidFill>
                   <a:srgbClr val="0B1F3A"/>
@@ -6111,6 +7051,7 @@
           <a:lstStyle xmlns:a="http://schemas.openxmlformats.org/drawingml/2006/main"/>
           <a:p xmlns:a="http://schemas.openxmlformats.org/drawingml/2006/main">
             <a:pPr>
+              <a:buNone/>
               <a:defRPr sz="3450" b="1">
                 <a:solidFill>
                   <a:srgbClr val="1565C0"/>
@@ -6161,6 +7102,7 @@
           <a:lstStyle xmlns:a="http://schemas.openxmlformats.org/drawingml/2006/main"/>
           <a:p xmlns:a="http://schemas.openxmlformats.org/drawingml/2006/main">
             <a:pPr>
+              <a:buNone/>
               <a:defRPr sz="1575" b="1">
                 <a:solidFill>
                   <a:srgbClr val="0B1F3A"/>
@@ -6211,6 +7153,7 @@
           <a:lstStyle xmlns:a="http://schemas.openxmlformats.org/drawingml/2006/main"/>
           <a:p xmlns:a="http://schemas.openxmlformats.org/drawingml/2006/main">
             <a:pPr>
+              <a:buNone/>
               <a:defRPr sz="1050" b="1">
                 <a:solidFill>
                   <a:srgbClr val="1565C0"/>
@@ -6294,6 +7237,7 @@
           <a:lstStyle xmlns:a="http://schemas.openxmlformats.org/drawingml/2006/main"/>
           <a:p xmlns:a="http://schemas.openxmlformats.org/drawingml/2006/main">
             <a:pPr>
+              <a:buNone/>
               <a:defRPr sz="825">
                 <a:solidFill>
                   <a:srgbClr val="0B1F3A">
@@ -6348,6 +7292,7 @@
           <a:lstStyle xmlns:a="http://schemas.openxmlformats.org/drawingml/2006/main"/>
           <a:p xmlns:a="http://schemas.openxmlformats.org/drawingml/2006/main">
             <a:pPr algn="r">
+              <a:buNone/>
               <a:defRPr sz="825" b="1">
                 <a:solidFill>
                   <a:srgbClr val="0B1F3A">
@@ -6439,6 +7384,7 @@
           <a:lstStyle xmlns:a="http://schemas.openxmlformats.org/drawingml/2006/main"/>
           <a:p xmlns:a="http://schemas.openxmlformats.org/drawingml/2006/main">
             <a:pPr>
+              <a:buNone/>
               <a:defRPr sz="5550" b="1">
                 <a:solidFill>
                   <a:srgbClr val="1EC5FF"/>
@@ -6489,6 +7435,7 @@
           <a:lstStyle xmlns:a="http://schemas.openxmlformats.org/drawingml/2006/main"/>
           <a:p xmlns:a="http://schemas.openxmlformats.org/drawingml/2006/main">
             <a:pPr>
+              <a:buNone/>
               <a:defRPr sz="2250" b="1">
                 <a:solidFill>
                   <a:srgbClr val="FFFFFF"/>
@@ -6572,6 +7519,7 @@
           <a:lstStyle xmlns:a="http://schemas.openxmlformats.org/drawingml/2006/main"/>
           <a:p xmlns:a="http://schemas.openxmlformats.org/drawingml/2006/main">
             <a:pPr>
+              <a:buNone/>
               <a:defRPr sz="1800">
                 <a:solidFill>
                   <a:srgbClr val="E2F2FF"/>
@@ -6622,6 +7570,7 @@
           <a:lstStyle xmlns:a="http://schemas.openxmlformats.org/drawingml/2006/main"/>
           <a:p xmlns:a="http://schemas.openxmlformats.org/drawingml/2006/main">
             <a:pPr>
+              <a:buNone/>
               <a:defRPr sz="1050" b="1">
                 <a:solidFill>
                   <a:srgbClr val="1EC5FF"/>
@@ -6705,6 +7654,7 @@
           <a:lstStyle xmlns:a="http://schemas.openxmlformats.org/drawingml/2006/main"/>
           <a:p xmlns:a="http://schemas.openxmlformats.org/drawingml/2006/main">
             <a:pPr>
+              <a:buNone/>
               <a:defRPr sz="825">
                 <a:solidFill>
                   <a:srgbClr val="FFFFFF">
@@ -6759,6 +7709,7 @@
           <a:lstStyle xmlns:a="http://schemas.openxmlformats.org/drawingml/2006/main"/>
           <a:p xmlns:a="http://schemas.openxmlformats.org/drawingml/2006/main">
             <a:pPr algn="r">
+              <a:buNone/>
               <a:defRPr sz="825" b="1">
                 <a:solidFill>
                   <a:srgbClr val="FFFFFF">
@@ -6842,6 +7793,7 @@
           <a:lstStyle xmlns:a="http://schemas.openxmlformats.org/drawingml/2006/main"/>
           <a:p xmlns:a="http://schemas.openxmlformats.org/drawingml/2006/main">
             <a:pPr>
+              <a:buNone/>
               <a:defRPr sz="2925" b="1">
                 <a:solidFill>
                   <a:srgbClr val="0B1F3A"/>
@@ -6892,6 +7844,7 @@
           <a:lstStyle xmlns:a="http://schemas.openxmlformats.org/drawingml/2006/main"/>
           <a:p xmlns:a="http://schemas.openxmlformats.org/drawingml/2006/main">
             <a:pPr>
+              <a:buNone/>
               <a:defRPr sz="1950">
                 <a:solidFill>
                   <a:srgbClr val="0B1F3A"/>
@@ -6909,6 +7862,7 @@
           </a:p>
           <a:p xmlns:a="http://schemas.openxmlformats.org/drawingml/2006/main">
             <a:pPr>
+              <a:buNone/>
               <a:defRPr sz="1950">
                 <a:solidFill>
                   <a:srgbClr val="0B1F3A"/>
@@ -6926,6 +7880,7 @@
           </a:p>
           <a:p xmlns:a="http://schemas.openxmlformats.org/drawingml/2006/main">
             <a:pPr>
+              <a:buNone/>
               <a:defRPr sz="1950">
                 <a:solidFill>
                   <a:srgbClr val="0B1F3A"/>
@@ -6976,6 +7931,7 @@
           <a:lstStyle xmlns:a="http://schemas.openxmlformats.org/drawingml/2006/main"/>
           <a:p xmlns:a="http://schemas.openxmlformats.org/drawingml/2006/main">
             <a:pPr>
+              <a:buNone/>
               <a:defRPr sz="1050" b="1">
                 <a:solidFill>
                   <a:srgbClr val="1565C0"/>
@@ -7059,6 +8015,7 @@
           <a:lstStyle xmlns:a="http://schemas.openxmlformats.org/drawingml/2006/main"/>
           <a:p xmlns:a="http://schemas.openxmlformats.org/drawingml/2006/main">
             <a:pPr>
+              <a:buNone/>
               <a:defRPr sz="825">
                 <a:solidFill>
                   <a:srgbClr val="0B1F3A">
@@ -7113,6 +8070,7 @@
           <a:lstStyle xmlns:a="http://schemas.openxmlformats.org/drawingml/2006/main"/>
           <a:p xmlns:a="http://schemas.openxmlformats.org/drawingml/2006/main">
             <a:pPr algn="r">
+              <a:buNone/>
               <a:defRPr sz="825" b="1">
                 <a:solidFill>
                   <a:srgbClr val="0B1F3A">
@@ -7204,6 +8162,7 @@
           <a:lstStyle xmlns:a="http://schemas.openxmlformats.org/drawingml/2006/main"/>
           <a:p xmlns:a="http://schemas.openxmlformats.org/drawingml/2006/main">
             <a:pPr>
+              <a:buNone/>
               <a:defRPr sz="1500" b="1">
                 <a:solidFill>
                   <a:srgbClr val="1EC5FF"/>
@@ -7254,6 +8213,7 @@
           <a:lstStyle xmlns:a="http://schemas.openxmlformats.org/drawingml/2006/main"/>
           <a:p xmlns:a="http://schemas.openxmlformats.org/drawingml/2006/main">
             <a:pPr>
+              <a:buNone/>
               <a:defRPr sz="2850" b="1">
                 <a:solidFill>
                   <a:srgbClr val="FFFFFF"/>
@@ -7304,6 +8264,7 @@
           <a:lstStyle xmlns:a="http://schemas.openxmlformats.org/drawingml/2006/main"/>
           <a:p xmlns:a="http://schemas.openxmlformats.org/drawingml/2006/main">
             <a:pPr>
+              <a:buNone/>
               <a:defRPr sz="1500">
                 <a:solidFill>
                   <a:srgbClr val="E2F2FF"/>
@@ -7428,6 +8389,7 @@
           <a:lstStyle xmlns:a="http://schemas.openxmlformats.org/drawingml/2006/main"/>
           <a:p xmlns:a="http://schemas.openxmlformats.org/drawingml/2006/main">
             <a:pPr>
+              <a:buNone/>
               <a:defRPr sz="1050" b="1">
                 <a:solidFill>
                   <a:srgbClr val="1EC5FF"/>
@@ -7511,6 +8473,7 @@
           <a:lstStyle xmlns:a="http://schemas.openxmlformats.org/drawingml/2006/main"/>
           <a:p xmlns:a="http://schemas.openxmlformats.org/drawingml/2006/main">
             <a:pPr>
+              <a:buNone/>
               <a:defRPr sz="825">
                 <a:solidFill>
                   <a:srgbClr val="FFFFFF">
@@ -7565,6 +8528,7 @@
           <a:lstStyle xmlns:a="http://schemas.openxmlformats.org/drawingml/2006/main"/>
           <a:p xmlns:a="http://schemas.openxmlformats.org/drawingml/2006/main">
             <a:pPr algn="r">
+              <a:buNone/>
               <a:defRPr sz="825" b="1">
                 <a:solidFill>
                   <a:srgbClr val="FFFFFF">
@@ -7648,6 +8612,7 @@
           <a:lstStyle xmlns:a="http://schemas.openxmlformats.org/drawingml/2006/main"/>
           <a:p xmlns:a="http://schemas.openxmlformats.org/drawingml/2006/main">
             <a:pPr>
+              <a:buNone/>
               <a:defRPr sz="1350" b="1">
                 <a:solidFill>
                   <a:srgbClr val="1565C0"/>
@@ -7698,6 +8663,7 @@
           <a:lstStyle xmlns:a="http://schemas.openxmlformats.org/drawingml/2006/main"/>
           <a:p xmlns:a="http://schemas.openxmlformats.org/drawingml/2006/main">
             <a:pPr>
+              <a:buNone/>
               <a:defRPr sz="3300" b="1">
                 <a:solidFill>
                   <a:srgbClr val="0B1F3A"/>
@@ -7748,6 +8714,7 @@
           <a:lstStyle xmlns:a="http://schemas.openxmlformats.org/drawingml/2006/main"/>
           <a:p xmlns:a="http://schemas.openxmlformats.org/drawingml/2006/main">
             <a:pPr>
+              <a:buNone/>
               <a:defRPr sz="1500">
                 <a:solidFill>
                   <a:srgbClr val="5C6F86"/>
@@ -7798,6 +8765,7 @@
           <a:lstStyle xmlns:a="http://schemas.openxmlformats.org/drawingml/2006/main"/>
           <a:p xmlns:a="http://schemas.openxmlformats.org/drawingml/2006/main">
             <a:pPr>
+              <a:buNone/>
               <a:defRPr sz="1050" b="1">
                 <a:solidFill>
                   <a:srgbClr val="1565C0"/>
@@ -7881,6 +8849,7 @@
           <a:lstStyle xmlns:a="http://schemas.openxmlformats.org/drawingml/2006/main"/>
           <a:p xmlns:a="http://schemas.openxmlformats.org/drawingml/2006/main">
             <a:pPr>
+              <a:buNone/>
               <a:defRPr sz="825">
                 <a:solidFill>
                   <a:srgbClr val="0B1F3A">
@@ -7935,6 +8904,7 @@
           <a:lstStyle xmlns:a="http://schemas.openxmlformats.org/drawingml/2006/main"/>
           <a:p xmlns:a="http://schemas.openxmlformats.org/drawingml/2006/main">
             <a:pPr algn="r">
+              <a:buNone/>
               <a:defRPr sz="825" b="1">
                 <a:solidFill>
                   <a:srgbClr val="0B1F3A">
@@ -8018,6 +8988,7 @@
           <a:lstStyle xmlns:a="http://schemas.openxmlformats.org/drawingml/2006/main"/>
           <a:p xmlns:a="http://schemas.openxmlformats.org/drawingml/2006/main">
             <a:pPr>
+              <a:buNone/>
               <a:defRPr sz="2850" b="1">
                 <a:solidFill>
                   <a:srgbClr val="0B1F3A"/>
@@ -8099,6 +9070,7 @@
           <a:lstStyle xmlns:a="http://schemas.openxmlformats.org/drawingml/2006/main"/>
           <a:p xmlns:a="http://schemas.openxmlformats.org/drawingml/2006/main">
             <a:pPr>
+              <a:buNone/>
               <a:defRPr sz="1425" b="1">
                 <a:solidFill>
                   <a:srgbClr val="1565C0"/>
@@ -8153,14 +9125,14 @@
       </p:sp>
       <p:pic>
         <p:nvPicPr>
-          <p:cNvPr id="14" name="" descr="Diagrama didático autoral que apresenta: Produto de dados não é uma pasta Gold com nome novo. — A pergunta que guia a aula."/>
+          <p:cNvPr id="16" name="" descr="Diagrama didático autoral que apresenta: Produto de dados não é uma pasta Gold com nome novo. — A pergunta que guia a aula."/>
           <p:cNvPicPr>
             <a:picLocks xmlns:a="http://schemas.openxmlformats.org/drawingml/2006/main" noChangeAspect="1"/>
           </p:cNvPicPr>
           <p:nvPr/>
         </p:nvPicPr>
         <p:blipFill>
-          <a:blip xmlns:r="http://schemas.openxmlformats.org/officeDocument/2006/relationships" xmlns:a="http://schemas.openxmlformats.org/drawingml/2006/main" r:embed="Rdcbb2fef4f86428d"/>
+          <a:blip xmlns:r="http://schemas.openxmlformats.org/officeDocument/2006/relationships" xmlns:a="http://schemas.openxmlformats.org/drawingml/2006/main" r:embed="Rfc7d91fdbb284da1"/>
           <a:stretch xmlns:a="http://schemas.openxmlformats.org/drawingml/2006/main"/>
         </p:blipFill>
         <p:spPr>
@@ -8206,6 +9178,7 @@
           <a:lstStyle xmlns:a="http://schemas.openxmlformats.org/drawingml/2006/main"/>
           <a:p xmlns:a="http://schemas.openxmlformats.org/drawingml/2006/main">
             <a:pPr>
+              <a:buNone/>
               <a:defRPr sz="1050" b="1">
                 <a:solidFill>
                   <a:srgbClr val="1565C0"/>
@@ -8289,6 +9262,7 @@
           <a:lstStyle xmlns:a="http://schemas.openxmlformats.org/drawingml/2006/main"/>
           <a:p xmlns:a="http://schemas.openxmlformats.org/drawingml/2006/main">
             <a:pPr>
+              <a:buNone/>
               <a:defRPr sz="825">
                 <a:solidFill>
                   <a:srgbClr val="0B1F3A">
@@ -8343,6 +9317,7 @@
           <a:lstStyle xmlns:a="http://schemas.openxmlformats.org/drawingml/2006/main"/>
           <a:p xmlns:a="http://schemas.openxmlformats.org/drawingml/2006/main">
             <a:pPr algn="r">
+              <a:buNone/>
               <a:defRPr sz="825" b="1">
                 <a:solidFill>
                   <a:srgbClr val="0B1F3A">
@@ -8434,6 +9409,7 @@
           <a:lstStyle xmlns:a="http://schemas.openxmlformats.org/drawingml/2006/main"/>
           <a:p xmlns:a="http://schemas.openxmlformats.org/drawingml/2006/main">
             <a:pPr>
+              <a:buNone/>
               <a:defRPr sz="2925" b="1">
                 <a:solidFill>
                   <a:srgbClr val="FFFFFF"/>
@@ -8484,6 +9460,7 @@
           <a:lstStyle xmlns:a="http://schemas.openxmlformats.org/drawingml/2006/main"/>
           <a:p xmlns:a="http://schemas.openxmlformats.org/drawingml/2006/main">
             <a:pPr>
+              <a:buNone/>
               <a:defRPr sz="3450" b="1">
                 <a:solidFill>
                   <a:srgbClr val="1EC5FF"/>
@@ -8534,6 +9511,7 @@
           <a:lstStyle xmlns:a="http://schemas.openxmlformats.org/drawingml/2006/main"/>
           <a:p xmlns:a="http://schemas.openxmlformats.org/drawingml/2006/main">
             <a:pPr>
+              <a:buNone/>
               <a:defRPr sz="1575" b="1">
                 <a:solidFill>
                   <a:srgbClr val="FFFFFF"/>
@@ -8615,6 +9593,7 @@
           <a:lstStyle xmlns:a="http://schemas.openxmlformats.org/drawingml/2006/main"/>
           <a:p xmlns:a="http://schemas.openxmlformats.org/drawingml/2006/main">
             <a:pPr>
+              <a:buNone/>
               <a:defRPr sz="3450" b="1">
                 <a:solidFill>
                   <a:srgbClr val="1EC5FF"/>
@@ -8665,6 +9644,7 @@
           <a:lstStyle xmlns:a="http://schemas.openxmlformats.org/drawingml/2006/main"/>
           <a:p xmlns:a="http://schemas.openxmlformats.org/drawingml/2006/main">
             <a:pPr>
+              <a:buNone/>
               <a:defRPr sz="1575" b="1">
                 <a:solidFill>
                   <a:srgbClr val="FFFFFF"/>
@@ -8746,6 +9726,7 @@
           <a:lstStyle xmlns:a="http://schemas.openxmlformats.org/drawingml/2006/main"/>
           <a:p xmlns:a="http://schemas.openxmlformats.org/drawingml/2006/main">
             <a:pPr>
+              <a:buNone/>
               <a:defRPr sz="3450" b="1">
                 <a:solidFill>
                   <a:srgbClr val="1EC5FF"/>
@@ -8796,6 +9777,7 @@
           <a:lstStyle xmlns:a="http://schemas.openxmlformats.org/drawingml/2006/main"/>
           <a:p xmlns:a="http://schemas.openxmlformats.org/drawingml/2006/main">
             <a:pPr>
+              <a:buNone/>
               <a:defRPr sz="1575" b="1">
                 <a:solidFill>
                   <a:srgbClr val="FFFFFF"/>
@@ -8846,6 +9828,7 @@
           <a:lstStyle xmlns:a="http://schemas.openxmlformats.org/drawingml/2006/main"/>
           <a:p xmlns:a="http://schemas.openxmlformats.org/drawingml/2006/main">
             <a:pPr>
+              <a:buNone/>
               <a:defRPr sz="1050" b="1">
                 <a:solidFill>
                   <a:srgbClr val="1EC5FF"/>
@@ -8929,6 +9912,7 @@
           <a:lstStyle xmlns:a="http://schemas.openxmlformats.org/drawingml/2006/main"/>
           <a:p xmlns:a="http://schemas.openxmlformats.org/drawingml/2006/main">
             <a:pPr>
+              <a:buNone/>
               <a:defRPr sz="825">
                 <a:solidFill>
                   <a:srgbClr val="FFFFFF">
@@ -8983,6 +9967,7 @@
           <a:lstStyle xmlns:a="http://schemas.openxmlformats.org/drawingml/2006/main"/>
           <a:p xmlns:a="http://schemas.openxmlformats.org/drawingml/2006/main">
             <a:pPr algn="r">
+              <a:buNone/>
               <a:defRPr sz="825" b="1">
                 <a:solidFill>
                   <a:srgbClr val="FFFFFF">
@@ -9074,6 +10059,7 @@
           <a:lstStyle xmlns:a="http://schemas.openxmlformats.org/drawingml/2006/main"/>
           <a:p xmlns:a="http://schemas.openxmlformats.org/drawingml/2006/main">
             <a:pPr>
+              <a:buNone/>
               <a:defRPr sz="2925" b="1">
                 <a:solidFill>
                   <a:srgbClr val="FFFFFF"/>
@@ -9124,6 +10110,7 @@
           <a:lstStyle xmlns:a="http://schemas.openxmlformats.org/drawingml/2006/main"/>
           <a:p xmlns:a="http://schemas.openxmlformats.org/drawingml/2006/main">
             <a:pPr>
+              <a:buNone/>
               <a:defRPr sz="1650">
                 <a:solidFill>
                   <a:srgbClr val="E2F2FF"/>
@@ -9174,6 +10161,7 @@
           <a:lstStyle xmlns:a="http://schemas.openxmlformats.org/drawingml/2006/main"/>
           <a:p xmlns:a="http://schemas.openxmlformats.org/drawingml/2006/main">
             <a:pPr>
+              <a:buNone/>
               <a:defRPr sz="1800">
                 <a:solidFill>
                   <a:srgbClr val="FFFFFF"/>
@@ -9191,6 +10179,7 @@
           </a:p>
           <a:p xmlns:a="http://schemas.openxmlformats.org/drawingml/2006/main">
             <a:pPr>
+              <a:buNone/>
               <a:defRPr sz="1800">
                 <a:solidFill>
                   <a:srgbClr val="FFFFFF"/>
@@ -9208,6 +10197,7 @@
           </a:p>
           <a:p xmlns:a="http://schemas.openxmlformats.org/drawingml/2006/main">
             <a:pPr>
+              <a:buNone/>
               <a:defRPr sz="1800">
                 <a:solidFill>
                   <a:srgbClr val="FFFFFF"/>
@@ -9332,6 +10322,7 @@
           <a:lstStyle xmlns:a="http://schemas.openxmlformats.org/drawingml/2006/main"/>
           <a:p xmlns:a="http://schemas.openxmlformats.org/drawingml/2006/main">
             <a:pPr algn="ctr">
+              <a:buNone/>
               <a:defRPr sz="4650" b="1">
                 <a:solidFill>
                   <a:srgbClr val="1EC5FF"/>
@@ -9382,6 +10373,7 @@
           <a:lstStyle xmlns:a="http://schemas.openxmlformats.org/drawingml/2006/main"/>
           <a:p xmlns:a="http://schemas.openxmlformats.org/drawingml/2006/main">
             <a:pPr>
+              <a:buNone/>
               <a:defRPr sz="1050" b="1">
                 <a:solidFill>
                   <a:srgbClr val="1EC5FF"/>
@@ -9465,6 +10457,7 @@
           <a:lstStyle xmlns:a="http://schemas.openxmlformats.org/drawingml/2006/main"/>
           <a:p xmlns:a="http://schemas.openxmlformats.org/drawingml/2006/main">
             <a:pPr>
+              <a:buNone/>
               <a:defRPr sz="825">
                 <a:solidFill>
                   <a:srgbClr val="FFFFFF">
@@ -9519,6 +10512,7 @@
           <a:lstStyle xmlns:a="http://schemas.openxmlformats.org/drawingml/2006/main"/>
           <a:p xmlns:a="http://schemas.openxmlformats.org/drawingml/2006/main">
             <a:pPr algn="r">
+              <a:buNone/>
               <a:defRPr sz="825" b="1">
                 <a:solidFill>
                   <a:srgbClr val="FFFFFF">
@@ -9602,6 +10596,7 @@
           <a:lstStyle xmlns:a="http://schemas.openxmlformats.org/drawingml/2006/main"/>
           <a:p xmlns:a="http://schemas.openxmlformats.org/drawingml/2006/main">
             <a:pPr>
+              <a:buNone/>
               <a:defRPr sz="2925" b="1">
                 <a:solidFill>
                   <a:srgbClr val="0B1F3A"/>
@@ -9652,6 +10647,7 @@
           <a:lstStyle xmlns:a="http://schemas.openxmlformats.org/drawingml/2006/main"/>
           <a:p xmlns:a="http://schemas.openxmlformats.org/drawingml/2006/main">
             <a:pPr>
+              <a:buNone/>
               <a:defRPr sz="1650">
                 <a:solidFill>
                   <a:srgbClr val="5C6F86"/>
@@ -9702,6 +10698,7 @@
           <a:lstStyle xmlns:a="http://schemas.openxmlformats.org/drawingml/2006/main"/>
           <a:p xmlns:a="http://schemas.openxmlformats.org/drawingml/2006/main">
             <a:pPr>
+              <a:buNone/>
               <a:defRPr sz="1800">
                 <a:solidFill>
                   <a:srgbClr val="0B1F3A"/>
@@ -9719,6 +10716,7 @@
           </a:p>
           <a:p xmlns:a="http://schemas.openxmlformats.org/drawingml/2006/main">
             <a:pPr>
+              <a:buNone/>
               <a:defRPr sz="1800">
                 <a:solidFill>
                   <a:srgbClr val="0B1F3A"/>
@@ -9736,6 +10734,7 @@
           </a:p>
           <a:p xmlns:a="http://schemas.openxmlformats.org/drawingml/2006/main">
             <a:pPr>
+              <a:buNone/>
               <a:defRPr sz="1800">
                 <a:solidFill>
                   <a:srgbClr val="0B1F3A"/>
@@ -9860,6 +10859,7 @@
           <a:lstStyle xmlns:a="http://schemas.openxmlformats.org/drawingml/2006/main"/>
           <a:p xmlns:a="http://schemas.openxmlformats.org/drawingml/2006/main">
             <a:pPr algn="ctr">
+              <a:buNone/>
               <a:defRPr sz="4650" b="1">
                 <a:solidFill>
                   <a:srgbClr val="1565C0"/>
@@ -9910,6 +10910,7 @@
           <a:lstStyle xmlns:a="http://schemas.openxmlformats.org/drawingml/2006/main"/>
           <a:p xmlns:a="http://schemas.openxmlformats.org/drawingml/2006/main">
             <a:pPr>
+              <a:buNone/>
               <a:defRPr sz="1050" b="1">
                 <a:solidFill>
                   <a:srgbClr val="1565C0"/>
@@ -9993,6 +10994,7 @@
           <a:lstStyle xmlns:a="http://schemas.openxmlformats.org/drawingml/2006/main"/>
           <a:p xmlns:a="http://schemas.openxmlformats.org/drawingml/2006/main">
             <a:pPr>
+              <a:buNone/>
               <a:defRPr sz="825">
                 <a:solidFill>
                   <a:srgbClr val="0B1F3A">
@@ -10047,6 +11049,7 @@
           <a:lstStyle xmlns:a="http://schemas.openxmlformats.org/drawingml/2006/main"/>
           <a:p xmlns:a="http://schemas.openxmlformats.org/drawingml/2006/main">
             <a:pPr algn="r">
+              <a:buNone/>
               <a:defRPr sz="825" b="1">
                 <a:solidFill>
                   <a:srgbClr val="0B1F3A">
@@ -10138,6 +11141,7 @@
           <a:lstStyle xmlns:a="http://schemas.openxmlformats.org/drawingml/2006/main"/>
           <a:p xmlns:a="http://schemas.openxmlformats.org/drawingml/2006/main">
             <a:pPr>
+              <a:buNone/>
               <a:defRPr sz="2925" b="1">
                 <a:solidFill>
                   <a:srgbClr val="FFFFFF"/>
@@ -10188,6 +11192,7 @@
           <a:lstStyle xmlns:a="http://schemas.openxmlformats.org/drawingml/2006/main"/>
           <a:p xmlns:a="http://schemas.openxmlformats.org/drawingml/2006/main">
             <a:pPr>
+              <a:buNone/>
               <a:defRPr sz="1950" b="1">
                 <a:solidFill>
                   <a:srgbClr val="FFFFFF"/>
@@ -10244,14 +11249,14 @@
       </p:sp>
       <p:pic>
         <p:nvPicPr>
-          <p:cNvPr id="13" name="" descr="Figura oficial da documentação dbt usada para explicar: Separações horizontal e vertical resolvem problemas diferentes — A topologia deve seguir ownership e ciclo de mudança.."/>
+          <p:cNvPr id="15" name="" descr="Figura oficial da documentação dbt usada para explicar: Separações horizontal e vertical resolvem problemas diferentes — A topologia deve seguir ownership e ciclo de mudança.."/>
           <p:cNvPicPr>
             <a:picLocks xmlns:a="http://schemas.openxmlformats.org/drawingml/2006/main" noChangeAspect="1"/>
           </p:cNvPicPr>
           <p:nvPr/>
         </p:nvPicPr>
         <p:blipFill>
-          <a:blip xmlns:r="http://schemas.openxmlformats.org/officeDocument/2006/relationships" xmlns:a="http://schemas.openxmlformats.org/drawingml/2006/main" r:embed="R5032b6cdb1104759"/>
+          <a:blip xmlns:r="http://schemas.openxmlformats.org/officeDocument/2006/relationships" xmlns:a="http://schemas.openxmlformats.org/drawingml/2006/main" r:embed="R333f33d65de14da2"/>
           <a:stretch xmlns:a="http://schemas.openxmlformats.org/drawingml/2006/main"/>
         </p:blipFill>
         <p:spPr>
@@ -10297,6 +11302,7 @@
           <a:lstStyle xmlns:a="http://schemas.openxmlformats.org/drawingml/2006/main"/>
           <a:p xmlns:a="http://schemas.openxmlformats.org/drawingml/2006/main">
             <a:pPr>
+              <a:buNone/>
               <a:defRPr sz="900" i="1">
                 <a:solidFill>
                   <a:srgbClr val="5C6F86"/>
@@ -10347,6 +11353,7 @@
           <a:lstStyle xmlns:a="http://schemas.openxmlformats.org/drawingml/2006/main"/>
           <a:p xmlns:a="http://schemas.openxmlformats.org/drawingml/2006/main">
             <a:pPr>
+              <a:buNone/>
               <a:defRPr sz="1050" b="1">
                 <a:solidFill>
                   <a:srgbClr val="1EC5FF"/>
@@ -10430,6 +11437,7 @@
           <a:lstStyle xmlns:a="http://schemas.openxmlformats.org/drawingml/2006/main"/>
           <a:p xmlns:a="http://schemas.openxmlformats.org/drawingml/2006/main">
             <a:pPr>
+              <a:buNone/>
               <a:defRPr sz="825">
                 <a:solidFill>
                   <a:srgbClr val="FFFFFF">
@@ -10484,6 +11492,7 @@
           <a:lstStyle xmlns:a="http://schemas.openxmlformats.org/drawingml/2006/main"/>
           <a:p xmlns:a="http://schemas.openxmlformats.org/drawingml/2006/main">
             <a:pPr algn="r">
+              <a:buNone/>
               <a:defRPr sz="825" b="1">
                 <a:solidFill>
                   <a:srgbClr val="FFFFFF">
@@ -10575,6 +11584,7 @@
           <a:lstStyle xmlns:a="http://schemas.openxmlformats.org/drawingml/2006/main"/>
           <a:p xmlns:a="http://schemas.openxmlformats.org/drawingml/2006/main">
             <a:pPr>
+              <a:buNone/>
               <a:defRPr sz="2925" b="1">
                 <a:solidFill>
                   <a:srgbClr val="FFFFFF"/>
@@ -10625,6 +11635,7 @@
           <a:lstStyle xmlns:a="http://schemas.openxmlformats.org/drawingml/2006/main"/>
           <a:p xmlns:a="http://schemas.openxmlformats.org/drawingml/2006/main">
             <a:pPr>
+              <a:buNone/>
               <a:defRPr sz="1650">
                 <a:solidFill>
                   <a:srgbClr val="E2F2FF"/>
@@ -10675,6 +11686,7 @@
           <a:lstStyle xmlns:a="http://schemas.openxmlformats.org/drawingml/2006/main"/>
           <a:p xmlns:a="http://schemas.openxmlformats.org/drawingml/2006/main">
             <a:pPr>
+              <a:buNone/>
               <a:defRPr sz="1800">
                 <a:solidFill>
                   <a:srgbClr val="FFFFFF"/>
@@ -10692,6 +11704,7 @@
           </a:p>
           <a:p xmlns:a="http://schemas.openxmlformats.org/drawingml/2006/main">
             <a:pPr>
+              <a:buNone/>
               <a:defRPr sz="1800">
                 <a:solidFill>
                   <a:srgbClr val="FFFFFF"/>
@@ -10709,6 +11722,7 @@
           </a:p>
           <a:p xmlns:a="http://schemas.openxmlformats.org/drawingml/2006/main">
             <a:pPr>
+              <a:buNone/>
               <a:defRPr sz="1800">
                 <a:solidFill>
                   <a:srgbClr val="FFFFFF"/>
@@ -10833,6 +11847,7 @@
           <a:lstStyle xmlns:a="http://schemas.openxmlformats.org/drawingml/2006/main"/>
           <a:p xmlns:a="http://schemas.openxmlformats.org/drawingml/2006/main">
             <a:pPr algn="ctr">
+              <a:buNone/>
               <a:defRPr sz="4650" b="1">
                 <a:solidFill>
                   <a:srgbClr val="1EC5FF"/>
@@ -10883,6 +11898,7 @@
           <a:lstStyle xmlns:a="http://schemas.openxmlformats.org/drawingml/2006/main"/>
           <a:p xmlns:a="http://schemas.openxmlformats.org/drawingml/2006/main">
             <a:pPr>
+              <a:buNone/>
               <a:defRPr sz="1050" b="1">
                 <a:solidFill>
                   <a:srgbClr val="1EC5FF"/>
@@ -10966,6 +11982,7 @@
           <a:lstStyle xmlns:a="http://schemas.openxmlformats.org/drawingml/2006/main"/>
           <a:p xmlns:a="http://schemas.openxmlformats.org/drawingml/2006/main">
             <a:pPr>
+              <a:buNone/>
               <a:defRPr sz="825">
                 <a:solidFill>
                   <a:srgbClr val="FFFFFF">
@@ -11020,6 +12037,7 @@
           <a:lstStyle xmlns:a="http://schemas.openxmlformats.org/drawingml/2006/main"/>
           <a:p xmlns:a="http://schemas.openxmlformats.org/drawingml/2006/main">
             <a:pPr algn="r">
+              <a:buNone/>
               <a:defRPr sz="825" b="1">
                 <a:solidFill>
                   <a:srgbClr val="FFFFFF">
@@ -11103,6 +12121,7 @@
           <a:lstStyle xmlns:a="http://schemas.openxmlformats.org/drawingml/2006/main"/>
           <a:p xmlns:a="http://schemas.openxmlformats.org/drawingml/2006/main">
             <a:pPr>
+              <a:buNone/>
               <a:defRPr sz="2925" b="1">
                 <a:solidFill>
                   <a:srgbClr val="0B1F3A"/>
@@ -11159,6 +12178,7 @@
           <a:lstStyle xmlns:a="http://schemas.openxmlformats.org/drawingml/2006/main"/>
           <a:p xmlns:a="http://schemas.openxmlformats.org/drawingml/2006/main">
             <a:pPr algn="ctr">
+              <a:buNone/>
               <a:defRPr sz="1500" b="1">
                 <a:solidFill>
                   <a:srgbClr val="0B1F3A"/>
@@ -11215,6 +12235,7 @@
           <a:lstStyle xmlns:a="http://schemas.openxmlformats.org/drawingml/2006/main"/>
           <a:p xmlns:a="http://schemas.openxmlformats.org/drawingml/2006/main">
             <a:pPr algn="ctr">
+              <a:buNone/>
               <a:defRPr sz="1500" b="1">
                 <a:solidFill>
                   <a:srgbClr val="0B1F3A"/>
@@ -11271,6 +12292,7 @@
           <a:lstStyle xmlns:a="http://schemas.openxmlformats.org/drawingml/2006/main"/>
           <a:p xmlns:a="http://schemas.openxmlformats.org/drawingml/2006/main">
             <a:pPr algn="ctr">
+              <a:buNone/>
               <a:defRPr sz="1500" b="1">
                 <a:solidFill>
                   <a:srgbClr val="0B1F3A"/>
@@ -11321,6 +12343,7 @@
           <a:lstStyle xmlns:a="http://schemas.openxmlformats.org/drawingml/2006/main"/>
           <a:p xmlns:a="http://schemas.openxmlformats.org/drawingml/2006/main">
             <a:pPr>
+              <a:buNone/>
               <a:defRPr sz="1050" b="1">
                 <a:solidFill>
                   <a:srgbClr val="1565C0"/>
@@ -11404,6 +12427,7 @@
           <a:lstStyle xmlns:a="http://schemas.openxmlformats.org/drawingml/2006/main"/>
           <a:p xmlns:a="http://schemas.openxmlformats.org/drawingml/2006/main">
             <a:pPr>
+              <a:buNone/>
               <a:defRPr sz="825">
                 <a:solidFill>
                   <a:srgbClr val="0B1F3A">
@@ -11458,6 +12482,7 @@
           <a:lstStyle xmlns:a="http://schemas.openxmlformats.org/drawingml/2006/main"/>
           <a:p xmlns:a="http://schemas.openxmlformats.org/drawingml/2006/main">
             <a:pPr algn="r">
+              <a:buNone/>
               <a:defRPr sz="825" b="1">
                 <a:solidFill>
                   <a:srgbClr val="0B1F3A">
@@ -11541,6 +12566,7 @@
           <a:lstStyle xmlns:a="http://schemas.openxmlformats.org/drawingml/2006/main"/>
           <a:p xmlns:a="http://schemas.openxmlformats.org/drawingml/2006/main">
             <a:pPr>
+              <a:buNone/>
               <a:defRPr sz="2925" b="1">
                 <a:solidFill>
                   <a:srgbClr val="0B1F3A"/>
@@ -11591,6 +12617,7 @@
           <a:lstStyle xmlns:a="http://schemas.openxmlformats.org/drawingml/2006/main"/>
           <a:p xmlns:a="http://schemas.openxmlformats.org/drawingml/2006/main">
             <a:pPr>
+              <a:buNone/>
               <a:defRPr sz="1650">
                 <a:solidFill>
                   <a:srgbClr val="5C6F86"/>
@@ -11641,6 +12668,7 @@
           <a:lstStyle xmlns:a="http://schemas.openxmlformats.org/drawingml/2006/main"/>
           <a:p xmlns:a="http://schemas.openxmlformats.org/drawingml/2006/main">
             <a:pPr>
+              <a:buNone/>
               <a:defRPr sz="1800">
                 <a:solidFill>
                   <a:srgbClr val="0B1F3A"/>
@@ -11658,6 +12686,7 @@
           </a:p>
           <a:p xmlns:a="http://schemas.openxmlformats.org/drawingml/2006/main">
             <a:pPr>
+              <a:buNone/>
               <a:defRPr sz="1800">
                 <a:solidFill>
                   <a:srgbClr val="0B1F3A"/>
@@ -11675,6 +12704,7 @@
           </a:p>
           <a:p xmlns:a="http://schemas.openxmlformats.org/drawingml/2006/main">
             <a:pPr>
+              <a:buNone/>
               <a:defRPr sz="1800">
                 <a:solidFill>
                   <a:srgbClr val="0B1F3A"/>
@@ -11799,6 +12829,7 @@
           <a:lstStyle xmlns:a="http://schemas.openxmlformats.org/drawingml/2006/main"/>
           <a:p xmlns:a="http://schemas.openxmlformats.org/drawingml/2006/main">
             <a:pPr algn="ctr">
+              <a:buNone/>
               <a:defRPr sz="4650" b="1">
                 <a:solidFill>
                   <a:srgbClr val="1565C0"/>
@@ -11849,6 +12880,7 @@
           <a:lstStyle xmlns:a="http://schemas.openxmlformats.org/drawingml/2006/main"/>
           <a:p xmlns:a="http://schemas.openxmlformats.org/drawingml/2006/main">
             <a:pPr>
+              <a:buNone/>
               <a:defRPr sz="1050" b="1">
                 <a:solidFill>
                   <a:srgbClr val="1565C0"/>
@@ -11932,6 +12964,7 @@
           <a:lstStyle xmlns:a="http://schemas.openxmlformats.org/drawingml/2006/main"/>
           <a:p xmlns:a="http://schemas.openxmlformats.org/drawingml/2006/main">
             <a:pPr>
+              <a:buNone/>
               <a:defRPr sz="825">
                 <a:solidFill>
                   <a:srgbClr val="0B1F3A">
@@ -11986,6 +13019,7 @@
           <a:lstStyle xmlns:a="http://schemas.openxmlformats.org/drawingml/2006/main"/>
           <a:p xmlns:a="http://schemas.openxmlformats.org/drawingml/2006/main">
             <a:pPr algn="r">
+              <a:buNone/>
               <a:defRPr sz="825" b="1">
                 <a:solidFill>
                   <a:srgbClr val="0B1F3A">

--- a/assets/decks/episodio-08-data-products-open.pptx
+++ b/assets/decks/episodio-08-data-products-open.pptx
@@ -2,31 +2,31 @@
 <file path=ppt/presentation.xml><?xml version="1.0" encoding="utf-8"?>
 <p:presentation xmlns:p="http://schemas.openxmlformats.org/presentationml/2006/main">
   <p:sldMasterIdLst>
-    <p:sldMasterId xmlns:r="http://schemas.openxmlformats.org/officeDocument/2006/relationships" id="2147483648" r:id="R180011a90ed34949"/>
-    <p:sldMasterId xmlns:r="http://schemas.openxmlformats.org/officeDocument/2006/relationships" id="2147483650" r:id="R4298089256684cd6"/>
+    <p:sldMasterId xmlns:r="http://schemas.openxmlformats.org/officeDocument/2006/relationships" id="2147483648" r:id="R158d4cb3f0444ff8"/>
+    <p:sldMasterId xmlns:r="http://schemas.openxmlformats.org/officeDocument/2006/relationships" id="2147483650" r:id="R0d151bf07cf44a8c"/>
   </p:sldMasterIdLst>
   <p:notesMasterIdLst>
-    <p:notesMasterId xmlns:r="http://schemas.openxmlformats.org/officeDocument/2006/relationships" r:id="Rf97c5a7c2ea649c4"/>
+    <p:notesMasterId xmlns:r="http://schemas.openxmlformats.org/officeDocument/2006/relationships" r:id="Rf9b55658d8824e46"/>
   </p:notesMasterIdLst>
   <p:sldIdLst>
-    <p:sldId xmlns:r="http://schemas.openxmlformats.org/officeDocument/2006/relationships" id="256" r:id="R9b6ac114680a4e56"/>
-    <p:sldId xmlns:r="http://schemas.openxmlformats.org/officeDocument/2006/relationships" id="257" r:id="Re2718390516a4472"/>
-    <p:sldId xmlns:r="http://schemas.openxmlformats.org/officeDocument/2006/relationships" id="258" r:id="R3102f4299b534381"/>
-    <p:sldId xmlns:r="http://schemas.openxmlformats.org/officeDocument/2006/relationships" id="259" r:id="R3229dd328ef245fc"/>
-    <p:sldId xmlns:r="http://schemas.openxmlformats.org/officeDocument/2006/relationships" id="260" r:id="Rfb936508f7d14a74"/>
-    <p:sldId xmlns:r="http://schemas.openxmlformats.org/officeDocument/2006/relationships" id="261" r:id="R49c56148285240fa"/>
-    <p:sldId xmlns:r="http://schemas.openxmlformats.org/officeDocument/2006/relationships" id="262" r:id="R4163c37efc904865"/>
-    <p:sldId xmlns:r="http://schemas.openxmlformats.org/officeDocument/2006/relationships" id="263" r:id="Rbec8404affe64a9a"/>
-    <p:sldId xmlns:r="http://schemas.openxmlformats.org/officeDocument/2006/relationships" id="264" r:id="R5f21dfd907ef428b"/>
-    <p:sldId xmlns:r="http://schemas.openxmlformats.org/officeDocument/2006/relationships" id="265" r:id="R559e861b90954e2d"/>
-    <p:sldId xmlns:r="http://schemas.openxmlformats.org/officeDocument/2006/relationships" id="266" r:id="Rfa3d7c7627c34e33"/>
-    <p:sldId xmlns:r="http://schemas.openxmlformats.org/officeDocument/2006/relationships" id="267" r:id="R074a2c6f9f344d65"/>
-    <p:sldId xmlns:r="http://schemas.openxmlformats.org/officeDocument/2006/relationships" id="268" r:id="R8d12515dabc7446d"/>
-    <p:sldId xmlns:r="http://schemas.openxmlformats.org/officeDocument/2006/relationships" id="269" r:id="R456ebe854b424b44"/>
-    <p:sldId xmlns:r="http://schemas.openxmlformats.org/officeDocument/2006/relationships" id="270" r:id="R8ac4a2820a0d4fcc"/>
-    <p:sldId xmlns:r="http://schemas.openxmlformats.org/officeDocument/2006/relationships" id="271" r:id="Rb94382d561684f5f"/>
-    <p:sldId xmlns:r="http://schemas.openxmlformats.org/officeDocument/2006/relationships" id="272" r:id="R774db91614c34130"/>
-    <p:sldId xmlns:r="http://schemas.openxmlformats.org/officeDocument/2006/relationships" id="273" r:id="Rb72390dcc4ab44c9"/>
+    <p:sldId xmlns:r="http://schemas.openxmlformats.org/officeDocument/2006/relationships" id="256" r:id="R4900d6a96ab64e09"/>
+    <p:sldId xmlns:r="http://schemas.openxmlformats.org/officeDocument/2006/relationships" id="257" r:id="R604b1523c6064d6a"/>
+    <p:sldId xmlns:r="http://schemas.openxmlformats.org/officeDocument/2006/relationships" id="258" r:id="Rdd1141518e924be6"/>
+    <p:sldId xmlns:r="http://schemas.openxmlformats.org/officeDocument/2006/relationships" id="259" r:id="Racc395991064489f"/>
+    <p:sldId xmlns:r="http://schemas.openxmlformats.org/officeDocument/2006/relationships" id="260" r:id="R697c9415aeb047d0"/>
+    <p:sldId xmlns:r="http://schemas.openxmlformats.org/officeDocument/2006/relationships" id="261" r:id="R5594e7829f07419b"/>
+    <p:sldId xmlns:r="http://schemas.openxmlformats.org/officeDocument/2006/relationships" id="262" r:id="R3ea6a70e0940444b"/>
+    <p:sldId xmlns:r="http://schemas.openxmlformats.org/officeDocument/2006/relationships" id="263" r:id="Rdd1fb73e8870440c"/>
+    <p:sldId xmlns:r="http://schemas.openxmlformats.org/officeDocument/2006/relationships" id="264" r:id="R8d94d0ecf1fb40cc"/>
+    <p:sldId xmlns:r="http://schemas.openxmlformats.org/officeDocument/2006/relationships" id="265" r:id="R8b957c7ae9c348e1"/>
+    <p:sldId xmlns:r="http://schemas.openxmlformats.org/officeDocument/2006/relationships" id="266" r:id="R7ed727fbf0564af6"/>
+    <p:sldId xmlns:r="http://schemas.openxmlformats.org/officeDocument/2006/relationships" id="267" r:id="R47fabb84fa0e4ea2"/>
+    <p:sldId xmlns:r="http://schemas.openxmlformats.org/officeDocument/2006/relationships" id="268" r:id="Rdba1bb5cfeb14ef2"/>
+    <p:sldId xmlns:r="http://schemas.openxmlformats.org/officeDocument/2006/relationships" id="269" r:id="R61e3cc0dc7454298"/>
+    <p:sldId xmlns:r="http://schemas.openxmlformats.org/officeDocument/2006/relationships" id="270" r:id="R70b3ad05a3f746b8"/>
+    <p:sldId xmlns:r="http://schemas.openxmlformats.org/officeDocument/2006/relationships" id="271" r:id="Rf87f44d6736540a9"/>
+    <p:sldId xmlns:r="http://schemas.openxmlformats.org/officeDocument/2006/relationships" id="272" r:id="R1125d023d3664b22"/>
+    <p:sldId xmlns:r="http://schemas.openxmlformats.org/officeDocument/2006/relationships" id="273" r:id="Rc2df091942ab4ade"/>
   </p:sldIdLst>
   <p:sldSz cx="12192000" cy="6858000"/>
   <p:notesSz cx="6858000" cy="9144000"/>
@@ -540,6 +540,11 @@
           </a:p>
           <a:p xmlns:a="http://schemas.openxmlformats.org/drawingml/2006/main">
             <a:r>
+              <a:t>- https://rescuepoint.com.br/assets/img/logo.png</a:t>
+            </a:r>
+          </a:p>
+          <a:p xmlns:a="http://schemas.openxmlformats.org/drawingml/2006/main">
+            <a:r>
               <a:t>- https://github.com/AnselmoBorges/dbt-moderno-na-pratica/blob/main/roteiros/08-data-products-open.md</a:t>
             </a:r>
           </a:p>
@@ -705,6 +710,11 @@
           </a:p>
           <a:p xmlns:a="http://schemas.openxmlformats.org/drawingml/2006/main">
             <a:r>
+              <a:t>- https://rescuepoint.com.br/assets/img/logo.png</a:t>
+            </a:r>
+          </a:p>
+          <a:p xmlns:a="http://schemas.openxmlformats.org/drawingml/2006/main">
+            <a:r>
               <a:t>- https://github.com/AnselmoBorges/dbt-moderno-na-pratica/blob/main/roteiros/08-data-products-open.md</a:t>
             </a:r>
           </a:p>
@@ -870,6 +880,11 @@
           </a:p>
           <a:p xmlns:a="http://schemas.openxmlformats.org/drawingml/2006/main">
             <a:r>
+              <a:t>- https://rescuepoint.com.br/assets/img/logo.png</a:t>
+            </a:r>
+          </a:p>
+          <a:p xmlns:a="http://schemas.openxmlformats.org/drawingml/2006/main">
+            <a:r>
               <a:t>- https://github.com/AnselmoBorges/dbt-moderno-na-pratica/blob/main/roteiros/08-data-products-open.md</a:t>
             </a:r>
           </a:p>
@@ -1035,6 +1050,11 @@
           </a:p>
           <a:p xmlns:a="http://schemas.openxmlformats.org/drawingml/2006/main">
             <a:r>
+              <a:t>- https://rescuepoint.com.br/assets/img/logo.png</a:t>
+            </a:r>
+          </a:p>
+          <a:p xmlns:a="http://schemas.openxmlformats.org/drawingml/2006/main">
+            <a:r>
               <a:t>- https://github.com/AnselmoBorges/dbt-moderno-na-pratica/blob/main/roteiros/08-data-products-open.md</a:t>
             </a:r>
           </a:p>
@@ -1200,6 +1220,11 @@
           </a:p>
           <a:p xmlns:a="http://schemas.openxmlformats.org/drawingml/2006/main">
             <a:r>
+              <a:t>- https://rescuepoint.com.br/assets/img/logo.png</a:t>
+            </a:r>
+          </a:p>
+          <a:p xmlns:a="http://schemas.openxmlformats.org/drawingml/2006/main">
+            <a:r>
               <a:t>- https://github.com/AnselmoBorges/dbt-moderno-na-pratica/blob/main/roteiros/08-data-products-open.md</a:t>
             </a:r>
           </a:p>
@@ -1365,6 +1390,11 @@
           </a:p>
           <a:p xmlns:a="http://schemas.openxmlformats.org/drawingml/2006/main">
             <a:r>
+              <a:t>- https://rescuepoint.com.br/assets/img/logo.png</a:t>
+            </a:r>
+          </a:p>
+          <a:p xmlns:a="http://schemas.openxmlformats.org/drawingml/2006/main">
+            <a:r>
               <a:t>- https://github.com/AnselmoBorges/dbt-moderno-na-pratica/blob/main/roteiros/08-data-products-open.md</a:t>
             </a:r>
           </a:p>
@@ -1530,6 +1560,11 @@
           </a:p>
           <a:p xmlns:a="http://schemas.openxmlformats.org/drawingml/2006/main">
             <a:r>
+              <a:t>- https://rescuepoint.com.br/assets/img/logo.png</a:t>
+            </a:r>
+          </a:p>
+          <a:p xmlns:a="http://schemas.openxmlformats.org/drawingml/2006/main">
+            <a:r>
               <a:t>- https://github.com/AnselmoBorges/dbt-moderno-na-pratica/blob/main/roteiros/08-data-products-open.md</a:t>
             </a:r>
           </a:p>
@@ -1695,6 +1730,11 @@
           </a:p>
           <a:p xmlns:a="http://schemas.openxmlformats.org/drawingml/2006/main">
             <a:r>
+              <a:t>- https://rescuepoint.com.br/assets/img/logo.png</a:t>
+            </a:r>
+          </a:p>
+          <a:p xmlns:a="http://schemas.openxmlformats.org/drawingml/2006/main">
+            <a:r>
               <a:t>- https://github.com/AnselmoBorges/dbt-moderno-na-pratica/blob/main/roteiros/08-data-products-open.md</a:t>
             </a:r>
           </a:p>
@@ -1860,6 +1900,11 @@
           </a:p>
           <a:p xmlns:a="http://schemas.openxmlformats.org/drawingml/2006/main">
             <a:r>
+              <a:t>- https://rescuepoint.com.br/assets/img/logo.png</a:t>
+            </a:r>
+          </a:p>
+          <a:p xmlns:a="http://schemas.openxmlformats.org/drawingml/2006/main">
+            <a:r>
               <a:t>- https://github.com/AnselmoBorges/dbt-moderno-na-pratica/blob/main/roteiros/08-data-products-open.md</a:t>
             </a:r>
           </a:p>
@@ -2025,6 +2070,11 @@
           </a:p>
           <a:p xmlns:a="http://schemas.openxmlformats.org/drawingml/2006/main">
             <a:r>
+              <a:t>- https://rescuepoint.com.br/assets/img/logo.png</a:t>
+            </a:r>
+          </a:p>
+          <a:p xmlns:a="http://schemas.openxmlformats.org/drawingml/2006/main">
+            <a:r>
               <a:t>- https://github.com/AnselmoBorges/dbt-moderno-na-pratica/blob/main/roteiros/08-data-products-open.md</a:t>
             </a:r>
           </a:p>
@@ -2190,6 +2240,11 @@
           </a:p>
           <a:p xmlns:a="http://schemas.openxmlformats.org/drawingml/2006/main">
             <a:r>
+              <a:t>- https://rescuepoint.com.br/assets/img/logo.png</a:t>
+            </a:r>
+          </a:p>
+          <a:p xmlns:a="http://schemas.openxmlformats.org/drawingml/2006/main">
+            <a:r>
               <a:t>- https://github.com/AnselmoBorges/dbt-moderno-na-pratica/blob/main/roteiros/08-data-products-open.md</a:t>
             </a:r>
           </a:p>
@@ -2355,6 +2410,11 @@
           </a:p>
           <a:p xmlns:a="http://schemas.openxmlformats.org/drawingml/2006/main">
             <a:r>
+              <a:t>- https://rescuepoint.com.br/assets/img/logo.png</a:t>
+            </a:r>
+          </a:p>
+          <a:p xmlns:a="http://schemas.openxmlformats.org/drawingml/2006/main">
+            <a:r>
               <a:t>- https://github.com/AnselmoBorges/dbt-moderno-na-pratica/blob/main/roteiros/08-data-products-open.md</a:t>
             </a:r>
           </a:p>
@@ -2520,6 +2580,11 @@
           </a:p>
           <a:p xmlns:a="http://schemas.openxmlformats.org/drawingml/2006/main">
             <a:r>
+              <a:t>- https://rescuepoint.com.br/assets/img/logo.png</a:t>
+            </a:r>
+          </a:p>
+          <a:p xmlns:a="http://schemas.openxmlformats.org/drawingml/2006/main">
+            <a:r>
               <a:t>- https://github.com/AnselmoBorges/dbt-moderno-na-pratica/blob/main/roteiros/08-data-products-open.md</a:t>
             </a:r>
           </a:p>
@@ -2685,6 +2750,11 @@
           </a:p>
           <a:p xmlns:a="http://schemas.openxmlformats.org/drawingml/2006/main">
             <a:r>
+              <a:t>- https://rescuepoint.com.br/assets/img/logo.png</a:t>
+            </a:r>
+          </a:p>
+          <a:p xmlns:a="http://schemas.openxmlformats.org/drawingml/2006/main">
+            <a:r>
               <a:t>- https://github.com/AnselmoBorges/dbt-moderno-na-pratica/blob/main/roteiros/08-data-products-open.md</a:t>
             </a:r>
           </a:p>
@@ -2850,6 +2920,11 @@
           </a:p>
           <a:p xmlns:a="http://schemas.openxmlformats.org/drawingml/2006/main">
             <a:r>
+              <a:t>- https://rescuepoint.com.br/assets/img/logo.png</a:t>
+            </a:r>
+          </a:p>
+          <a:p xmlns:a="http://schemas.openxmlformats.org/drawingml/2006/main">
+            <a:r>
               <a:t>- https://github.com/AnselmoBorges/dbt-moderno-na-pratica/blob/main/roteiros/08-data-products-open.md</a:t>
             </a:r>
           </a:p>
@@ -3020,6 +3095,11 @@
           </a:p>
           <a:p xmlns:a="http://schemas.openxmlformats.org/drawingml/2006/main">
             <a:r>
+              <a:t>- https://rescuepoint.com.br/assets/img/logo.png</a:t>
+            </a:r>
+          </a:p>
+          <a:p xmlns:a="http://schemas.openxmlformats.org/drawingml/2006/main">
+            <a:r>
               <a:t>- https://github.com/AnselmoBorges/dbt-moderno-na-pratica/blob/main/roteiros/08-data-products-open.md</a:t>
             </a:r>
           </a:p>
@@ -3185,6 +3265,11 @@
           </a:p>
           <a:p xmlns:a="http://schemas.openxmlformats.org/drawingml/2006/main">
             <a:r>
+              <a:t>- https://rescuepoint.com.br/assets/img/logo.png</a:t>
+            </a:r>
+          </a:p>
+          <a:p xmlns:a="http://schemas.openxmlformats.org/drawingml/2006/main">
+            <a:r>
               <a:t>- https://github.com/AnselmoBorges/dbt-moderno-na-pratica/blob/main/roteiros/08-data-products-open.md</a:t>
             </a:r>
           </a:p>
@@ -3346,6 +3431,11 @@
           <a:p xmlns:a="http://schemas.openxmlformats.org/drawingml/2006/main">
             <a:r>
               <a:t>- https://docs.getdbt.com/docs/mesh/govern/model-access</a:t>
+            </a:r>
+          </a:p>
+          <a:p xmlns:a="http://schemas.openxmlformats.org/drawingml/2006/main">
+            <a:r>
+              <a:t>- https://rescuepoint.com.br/assets/img/logo.png</a:t>
             </a:r>
           </a:p>
           <a:p xmlns:a="http://schemas.openxmlformats.org/drawingml/2006/main">
@@ -3467,7 +3557,7 @@
   </p:cSld>
   <p:clrMap bg1="lt1" tx1="dk1" bg2="lt2" tx2="dk2" accent1="accent1" accent2="accent2" accent3="accent3" accent4="accent4" accent5="accent5" accent6="accent6" hlink="hlink" folHlink="folHlink"/>
   <p:sldLayoutIdLst>
-    <p:sldLayoutId xmlns:r="http://schemas.openxmlformats.org/officeDocument/2006/relationships" id="2147483649" r:id="R5affb24eed474574"/>
+    <p:sldLayoutId xmlns:r="http://schemas.openxmlformats.org/officeDocument/2006/relationships" id="2147483649" r:id="R28a5b1fe509d4998"/>
   </p:sldLayoutIdLst>
   <p:txStyles>
     <p:titleStyle>
@@ -3765,8 +3855,8 @@
   </p:cSld>
   <p:clrMap bg1="lt1" tx1="dk1" bg2="lt2" tx2="dk2" accent1="accent1" accent2="accent2" accent3="accent3" accent4="accent4" accent5="accent5" accent6="accent6" hlink="hlink" folHlink="folHlink"/>
   <p:sldLayoutIdLst>
-    <p:sldLayoutId xmlns:r="http://schemas.openxmlformats.org/officeDocument/2006/relationships" id="2147483651" r:id="R2c2206e7639f4666"/>
-    <p:sldLayoutId xmlns:r="http://schemas.openxmlformats.org/officeDocument/2006/relationships" id="2147483652" r:id="R73ffd2c34c3f47ee"/>
+    <p:sldLayoutId xmlns:r="http://schemas.openxmlformats.org/officeDocument/2006/relationships" id="2147483651" r:id="R1d7cdfc54ad84f66"/>
+    <p:sldLayoutId xmlns:r="http://schemas.openxmlformats.org/officeDocument/2006/relationships" id="2147483652" r:id="R4f3a2b2503d045bd"/>
   </p:sldLayoutIdLst>
 </p:sldMaster>
 </file>
@@ -4290,14 +4380,14 @@
       </p:grpSpPr>
       <p:pic>
         <p:nvPicPr>
-          <p:cNvPr id="10" name="" descr="Ilustração conceitual autoral da capa: EPISÓDIO 8 — Data products sem depender de Mesh."/>
+          <p:cNvPr id="13" name="" descr="Ilustração conceitual autoral da capa: EPISÓDIO 8 — Data products sem depender de Mesh."/>
           <p:cNvPicPr>
             <a:picLocks xmlns:a="http://schemas.openxmlformats.org/drawingml/2006/main" noChangeAspect="1"/>
           </p:cNvPicPr>
           <p:nvPr/>
         </p:nvPicPr>
         <p:blipFill>
-          <a:blip xmlns:r="http://schemas.openxmlformats.org/officeDocument/2006/relationships" xmlns:a="http://schemas.openxmlformats.org/drawingml/2006/main" r:embed="R5b9963656a864eaf"/>
+          <a:blip xmlns:r="http://schemas.openxmlformats.org/officeDocument/2006/relationships" xmlns:a="http://schemas.openxmlformats.org/drawingml/2006/main" r:embed="R38c5ad1e34904a80"/>
           <a:srcRect xmlns:a="http://schemas.openxmlformats.org/drawingml/2006/main" l="19785" t="0" r="19785" b="0"/>
           <a:stretch xmlns:a="http://schemas.openxmlformats.org/drawingml/2006/main">
             <a:fillRect l="0" t="0" r="0" b="0"/>
@@ -4318,7 +4408,7 @@
           <p:cNvPr id="2" name="cover-text-surface">
             <a:extLst xmlns:a="http://schemas.openxmlformats.org/drawingml/2006/main">
               <a:ext uri="{FF2B5EF4-FFF2-40B4-BE49-F238E27FC236}">
-                <a16:creationId xmlns:a16="http://schemas.microsoft.com/office/drawing/2014/main" id="{D5401FB7-C49C-4F57-ACEF-3D418AACF8E6}"/>
+                <a16:creationId xmlns:a16="http://schemas.microsoft.com/office/drawing/2014/main" id="{FE34B47F-BAAF-418E-84F5-F49E38F91FF0}"/>
               </a:ext>
             </a:extLst>
           </p:cNvPr>
@@ -4351,7 +4441,7 @@
           <p:cNvPr id="3" name="cover-divider">
             <a:extLst xmlns:a="http://schemas.openxmlformats.org/drawingml/2006/main">
               <a:ext uri="{FF2B5EF4-FFF2-40B4-BE49-F238E27FC236}">
-                <a16:creationId xmlns:a16="http://schemas.microsoft.com/office/drawing/2014/main" id="{A9297002-04F6-4655-B99D-D5D4FA49D175}"/>
+                <a16:creationId xmlns:a16="http://schemas.microsoft.com/office/drawing/2014/main" id="{D713EDD6-FD20-4BE8-B3A2-4AA7443D4720}"/>
               </a:ext>
             </a:extLst>
           </p:cNvPr>
@@ -4382,7 +4472,7 @@
           <p:cNvPr id="4" name="cover-episode">
             <a:extLst xmlns:a="http://schemas.openxmlformats.org/drawingml/2006/main">
               <a:ext uri="{FF2B5EF4-FFF2-40B4-BE49-F238E27FC236}">
-                <a16:creationId xmlns:a16="http://schemas.microsoft.com/office/drawing/2014/main" id="{430AB4A9-2D25-4A6B-A627-90FAF686C737}"/>
+                <a16:creationId xmlns:a16="http://schemas.microsoft.com/office/drawing/2014/main" id="{E73FCB9A-70A3-44B0-B607-04CDCCD8C029}"/>
               </a:ext>
             </a:extLst>
           </p:cNvPr>
@@ -4430,10 +4520,69 @@
       </p:sp>
       <p:sp>
         <p:nvSpPr>
-          <p:cNvPr id="5" name="cover-title">
-            <a:extLst xmlns:a="http://schemas.openxmlformats.org/drawingml/2006/main">
-              <a:ext uri="{FF2B5EF4-FFF2-40B4-BE49-F238E27FC236}">
-                <a16:creationId xmlns:a16="http://schemas.microsoft.com/office/drawing/2014/main" id="{9DE6BB60-9AE4-4ACE-A1B2-89385455DBCB}"/>
+          <p:cNvPr id="5" name="rescue-point-logo-background">
+            <a:extLst xmlns:a="http://schemas.openxmlformats.org/drawingml/2006/main">
+              <a:ext uri="{FF2B5EF4-FFF2-40B4-BE49-F238E27FC236}">
+                <a16:creationId xmlns:a16="http://schemas.microsoft.com/office/drawing/2014/main" id="{42E6A8F6-8DE9-4AD0-8661-4A04D8400EC0}"/>
+              </a:ext>
+            </a:extLst>
+          </p:cNvPr>
+          <p:cNvSpPr>
+            <a:spLocks xmlns:a="http://schemas.openxmlformats.org/drawingml/2006/main" noGrp="1"/>
+          </p:cNvSpPr>
+          <p:nvPr/>
+        </p:nvSpPr>
+        <p:spPr>
+          <a:xfrm xmlns:a="http://schemas.openxmlformats.org/drawingml/2006/main">
+            <a:off x="9772650" y="133350"/>
+            <a:ext cx="1733550" cy="457200"/>
+          </a:xfrm>
+          <a:prstGeom xmlns:a="http://schemas.openxmlformats.org/drawingml/2006/main" prst="roundRect">
+            <a:avLst>
+              <a:gd name="adj" fmla="val 16667"/>
+            </a:avLst>
+          </a:prstGeom>
+          <a:solidFill xmlns:a="http://schemas.openxmlformats.org/drawingml/2006/main">
+            <a:srgbClr val="06142E"/>
+          </a:solidFill>
+          <a:ln xmlns:a="http://schemas.openxmlformats.org/drawingml/2006/main" w="9525">
+            <a:solidFill>
+              <a:srgbClr val="1EC5FF">
+                <a:alpha val="33333"/>
+              </a:srgbClr>
+            </a:solidFill>
+            <a:prstDash val="solid"/>
+          </a:ln>
+        </p:spPr>
+      </p:sp>
+      <p:pic>
+        <p:nvPicPr>
+          <p:cNvPr id="18" name="" descr="Ilustração conceitual autoral da capa: EPISÓDIO 8 — Data products sem depender de Mesh."/>
+          <p:cNvPicPr>
+            <a:picLocks xmlns:a="http://schemas.openxmlformats.org/drawingml/2006/main" noChangeAspect="1"/>
+          </p:cNvPicPr>
+          <p:nvPr/>
+        </p:nvPicPr>
+        <p:blipFill>
+          <a:blip xmlns:r="http://schemas.openxmlformats.org/officeDocument/2006/relationships" xmlns:a="http://schemas.openxmlformats.org/drawingml/2006/main" r:embed="Rdc6a2c0a835141e9"/>
+          <a:stretch xmlns:a="http://schemas.openxmlformats.org/drawingml/2006/main"/>
+        </p:blipFill>
+        <p:spPr>
+          <a:xfrm xmlns:a="http://schemas.openxmlformats.org/drawingml/2006/main">
+            <a:off x="9893718" y="209550"/>
+            <a:ext cx="1491414" cy="323850"/>
+          </a:xfrm>
+          <a:prstGeom xmlns:a="http://schemas.openxmlformats.org/drawingml/2006/main" prst="rect">
+            <a:avLst/>
+          </a:prstGeom>
+        </p:spPr>
+      </p:pic>
+      <p:sp>
+        <p:nvSpPr>
+          <p:cNvPr id="7" name="cover-title">
+            <a:extLst xmlns:a="http://schemas.openxmlformats.org/drawingml/2006/main">
+              <a:ext uri="{FF2B5EF4-FFF2-40B4-BE49-F238E27FC236}">
+                <a16:creationId xmlns:a16="http://schemas.microsoft.com/office/drawing/2014/main" id="{CD231919-C201-4893-BD91-96AEE74BF4F9}"/>
               </a:ext>
             </a:extLst>
           </p:cNvPr>
@@ -4481,10 +4630,10 @@
       </p:sp>
       <p:sp>
         <p:nvSpPr>
-          <p:cNvPr id="6" name="cover-subtitle">
-            <a:extLst xmlns:a="http://schemas.openxmlformats.org/drawingml/2006/main">
-              <a:ext uri="{FF2B5EF4-FFF2-40B4-BE49-F238E27FC236}">
-                <a16:creationId xmlns:a16="http://schemas.microsoft.com/office/drawing/2014/main" id="{36C51677-B2FA-4755-B406-48D6C2273F0C}"/>
+          <p:cNvPr id="8" name="cover-subtitle">
+            <a:extLst xmlns:a="http://schemas.openxmlformats.org/drawingml/2006/main">
+              <a:ext uri="{FF2B5EF4-FFF2-40B4-BE49-F238E27FC236}">
+                <a16:creationId xmlns:a16="http://schemas.microsoft.com/office/drawing/2014/main" id="{0CE6A364-8856-46F5-BD65-FBCE10AC2D5C}"/>
               </a:ext>
             </a:extLst>
           </p:cNvPr>
@@ -4532,10 +4681,10 @@
       </p:sp>
       <p:sp>
         <p:nvSpPr>
-          <p:cNvPr id="7" name="cover-accent">
-            <a:extLst xmlns:a="http://schemas.openxmlformats.org/drawingml/2006/main">
-              <a:ext uri="{FF2B5EF4-FFF2-40B4-BE49-F238E27FC236}">
-                <a16:creationId xmlns:a16="http://schemas.microsoft.com/office/drawing/2014/main" id="{6FE0E667-2B3F-42A3-9E2C-F85294B5D03A}"/>
+          <p:cNvPr id="9" name="cover-accent">
+            <a:extLst xmlns:a="http://schemas.openxmlformats.org/drawingml/2006/main">
+              <a:ext uri="{FF2B5EF4-FFF2-40B4-BE49-F238E27FC236}">
+                <a16:creationId xmlns:a16="http://schemas.microsoft.com/office/drawing/2014/main" id="{48230FC1-2270-4DED-B315-154B92B98F54}"/>
               </a:ext>
             </a:extLst>
           </p:cNvPr>
@@ -4563,10 +4712,10 @@
       </p:sp>
       <p:sp>
         <p:nvSpPr>
-          <p:cNvPr id="8" name="cover-meta">
-            <a:extLst xmlns:a="http://schemas.openxmlformats.org/drawingml/2006/main">
-              <a:ext uri="{FF2B5EF4-FFF2-40B4-BE49-F238E27FC236}">
-                <a16:creationId xmlns:a16="http://schemas.microsoft.com/office/drawing/2014/main" id="{776E0499-A751-40B8-A14D-5F3F02A4C857}"/>
+          <p:cNvPr id="10" name="cover-meta">
+            <a:extLst xmlns:a="http://schemas.openxmlformats.org/drawingml/2006/main">
+              <a:ext uri="{FF2B5EF4-FFF2-40B4-BE49-F238E27FC236}">
+                <a16:creationId xmlns:a16="http://schemas.microsoft.com/office/drawing/2014/main" id="{1762A59E-894A-44E4-B11C-0E7E9D261D86}"/>
               </a:ext>
             </a:extLst>
           </p:cNvPr>
@@ -4619,7 +4768,7 @@
     </p:spTree>
     <p:extLst>
       <p:ext uri="{BB962C8B-B14F-4D97-AF65-F5344CB8AC3E}">
-        <p14:creationId xmlns:p14="http://schemas.microsoft.com/office/powerpoint/2010/main" val="1914042742"/>
+        <p14:creationId xmlns:p14="http://schemas.microsoft.com/office/powerpoint/2010/main" val="1536499692"/>
       </p:ext>
     </p:extLst>
   </p:cSld>
@@ -4655,10 +4804,10 @@
       </p:grpSpPr>
       <p:sp>
         <p:nvSpPr>
-          <p:cNvPr id="11" name="slide-title">
-            <a:extLst xmlns:a="http://schemas.openxmlformats.org/drawingml/2006/main">
-              <a:ext uri="{FF2B5EF4-FFF2-40B4-BE49-F238E27FC236}">
-                <a16:creationId xmlns:a16="http://schemas.microsoft.com/office/drawing/2014/main" id="{D16B7438-3174-4599-A0F6-17A8A635BD6A}"/>
+          <p:cNvPr id="13" name="slide-title">
+            <a:extLst xmlns:a="http://schemas.openxmlformats.org/drawingml/2006/main">
+              <a:ext uri="{FF2B5EF4-FFF2-40B4-BE49-F238E27FC236}">
+                <a16:creationId xmlns:a16="http://schemas.microsoft.com/office/drawing/2014/main" id="{420215AC-E362-45E3-8245-91B81997B7E5}"/>
               </a:ext>
             </a:extLst>
           </p:cNvPr>
@@ -4709,7 +4858,7 @@
           <p:cNvPr id="2" name="compare-left-title">
             <a:extLst xmlns:a="http://schemas.openxmlformats.org/drawingml/2006/main">
               <a:ext uri="{FF2B5EF4-FFF2-40B4-BE49-F238E27FC236}">
-                <a16:creationId xmlns:a16="http://schemas.microsoft.com/office/drawing/2014/main" id="{A2F2A2F8-F527-450C-A50D-D80B8FC7D029}"/>
+                <a16:creationId xmlns:a16="http://schemas.microsoft.com/office/drawing/2014/main" id="{A1B551E3-89C3-4FAB-BFD3-EA551E4E3857}"/>
               </a:ext>
             </a:extLst>
           </p:cNvPr>
@@ -4760,7 +4909,7 @@
           <p:cNvPr id="3" name="compare-right-title">
             <a:extLst xmlns:a="http://schemas.openxmlformats.org/drawingml/2006/main">
               <a:ext uri="{FF2B5EF4-FFF2-40B4-BE49-F238E27FC236}">
-                <a16:creationId xmlns:a16="http://schemas.microsoft.com/office/drawing/2014/main" id="{CBA68764-8A53-47AC-8E61-891065A0DA9A}"/>
+                <a16:creationId xmlns:a16="http://schemas.microsoft.com/office/drawing/2014/main" id="{ABE979F4-EA68-48A5-8987-C47C9E84E799}"/>
               </a:ext>
             </a:extLst>
           </p:cNvPr>
@@ -4811,7 +4960,7 @@
           <p:cNvPr id="4" name="compare-divider">
             <a:extLst xmlns:a="http://schemas.openxmlformats.org/drawingml/2006/main">
               <a:ext uri="{FF2B5EF4-FFF2-40B4-BE49-F238E27FC236}">
-                <a16:creationId xmlns:a16="http://schemas.microsoft.com/office/drawing/2014/main" id="{C79833D1-E7BC-4745-88BD-E8023BEF1A39}"/>
+                <a16:creationId xmlns:a16="http://schemas.microsoft.com/office/drawing/2014/main" id="{4966B161-0C00-40B8-BA3D-536FB9A48DB8}"/>
               </a:ext>
             </a:extLst>
           </p:cNvPr>
@@ -4844,7 +4993,7 @@
           <p:cNvPr id="5" name="bullets">
             <a:extLst xmlns:a="http://schemas.openxmlformats.org/drawingml/2006/main">
               <a:ext uri="{FF2B5EF4-FFF2-40B4-BE49-F238E27FC236}">
-                <a16:creationId xmlns:a16="http://schemas.microsoft.com/office/drawing/2014/main" id="{367ECD7E-F7C5-43F8-9F3D-5411D1CD8555}"/>
+                <a16:creationId xmlns:a16="http://schemas.microsoft.com/office/drawing/2014/main" id="{F2C48D53-E6D1-4844-80C0-45F94339DC09}"/>
               </a:ext>
             </a:extLst>
           </p:cNvPr>
@@ -4913,7 +5062,7 @@
           <p:cNvPr id="6" name="bullets">
             <a:extLst xmlns:a="http://schemas.openxmlformats.org/drawingml/2006/main">
               <a:ext uri="{FF2B5EF4-FFF2-40B4-BE49-F238E27FC236}">
-                <a16:creationId xmlns:a16="http://schemas.microsoft.com/office/drawing/2014/main" id="{E443E697-D959-487F-BB19-A6C9CC4F512D}"/>
+                <a16:creationId xmlns:a16="http://schemas.microsoft.com/office/drawing/2014/main" id="{1C4A9973-8B89-4D5F-877A-2D69DE748055}"/>
               </a:ext>
             </a:extLst>
           </p:cNvPr>
@@ -4964,7 +5113,7 @@
           <p:cNvPr id="7" name="eyebrow">
             <a:extLst xmlns:a="http://schemas.openxmlformats.org/drawingml/2006/main">
               <a:ext uri="{FF2B5EF4-FFF2-40B4-BE49-F238E27FC236}">
-                <a16:creationId xmlns:a16="http://schemas.microsoft.com/office/drawing/2014/main" id="{E011D1D8-9984-42AC-BB2B-3A302C610A5A}"/>
+                <a16:creationId xmlns:a16="http://schemas.microsoft.com/office/drawing/2014/main" id="{02BD51F4-8632-494E-81BC-CFDA0DA729A8}"/>
               </a:ext>
             </a:extLst>
           </p:cNvPr>
@@ -5012,10 +5161,69 @@
       </p:sp>
       <p:sp>
         <p:nvSpPr>
-          <p:cNvPr id="8" name="footer-rule">
-            <a:extLst xmlns:a="http://schemas.openxmlformats.org/drawingml/2006/main">
-              <a:ext uri="{FF2B5EF4-FFF2-40B4-BE49-F238E27FC236}">
-                <a16:creationId xmlns:a16="http://schemas.microsoft.com/office/drawing/2014/main" id="{FD4B305B-9CCF-4149-9907-D89A69A397D6}"/>
+          <p:cNvPr id="8" name="rescue-point-logo-background">
+            <a:extLst xmlns:a="http://schemas.openxmlformats.org/drawingml/2006/main">
+              <a:ext uri="{FF2B5EF4-FFF2-40B4-BE49-F238E27FC236}">
+                <a16:creationId xmlns:a16="http://schemas.microsoft.com/office/drawing/2014/main" id="{BDA2A7B9-591B-4607-85E1-FB9402FBF490}"/>
+              </a:ext>
+            </a:extLst>
+          </p:cNvPr>
+          <p:cNvSpPr>
+            <a:spLocks xmlns:a="http://schemas.openxmlformats.org/drawingml/2006/main" noGrp="1"/>
+          </p:cNvSpPr>
+          <p:nvPr/>
+        </p:nvSpPr>
+        <p:spPr>
+          <a:xfrm xmlns:a="http://schemas.openxmlformats.org/drawingml/2006/main">
+            <a:off x="9772650" y="133350"/>
+            <a:ext cx="1733550" cy="457200"/>
+          </a:xfrm>
+          <a:prstGeom xmlns:a="http://schemas.openxmlformats.org/drawingml/2006/main" prst="roundRect">
+            <a:avLst>
+              <a:gd name="adj" fmla="val 16667"/>
+            </a:avLst>
+          </a:prstGeom>
+          <a:solidFill xmlns:a="http://schemas.openxmlformats.org/drawingml/2006/main">
+            <a:srgbClr val="06142E"/>
+          </a:solidFill>
+          <a:ln xmlns:a="http://schemas.openxmlformats.org/drawingml/2006/main" w="9525">
+            <a:solidFill>
+              <a:srgbClr val="1EC5FF">
+                <a:alpha val="33333"/>
+              </a:srgbClr>
+            </a:solidFill>
+            <a:prstDash val="solid"/>
+          </a:ln>
+        </p:spPr>
+      </p:sp>
+      <p:pic>
+        <p:nvPicPr>
+          <p:cNvPr id="23" name="" descr="Figura oficial da documentação dbt usada para explicar: Separe fisicamente quando o custo se paga — Monorepo."/>
+          <p:cNvPicPr>
+            <a:picLocks xmlns:a="http://schemas.openxmlformats.org/drawingml/2006/main" noChangeAspect="1"/>
+          </p:cNvPicPr>
+          <p:nvPr/>
+        </p:nvPicPr>
+        <p:blipFill>
+          <a:blip xmlns:r="http://schemas.openxmlformats.org/officeDocument/2006/relationships" xmlns:a="http://schemas.openxmlformats.org/drawingml/2006/main" r:embed="Rc7da6e869fde4fdc"/>
+          <a:stretch xmlns:a="http://schemas.openxmlformats.org/drawingml/2006/main"/>
+        </p:blipFill>
+        <p:spPr>
+          <a:xfrm xmlns:a="http://schemas.openxmlformats.org/drawingml/2006/main">
+            <a:off x="9893718" y="209550"/>
+            <a:ext cx="1491414" cy="323850"/>
+          </a:xfrm>
+          <a:prstGeom xmlns:a="http://schemas.openxmlformats.org/drawingml/2006/main" prst="rect">
+            <a:avLst/>
+          </a:prstGeom>
+        </p:spPr>
+      </p:pic>
+      <p:sp>
+        <p:nvSpPr>
+          <p:cNvPr id="10" name="footer-rule">
+            <a:extLst xmlns:a="http://schemas.openxmlformats.org/drawingml/2006/main">
+              <a:ext uri="{FF2B5EF4-FFF2-40B4-BE49-F238E27FC236}">
+                <a16:creationId xmlns:a16="http://schemas.microsoft.com/office/drawing/2014/main" id="{ECB5DA24-13F6-4313-BC36-4AB79DC69AA1}"/>
               </a:ext>
             </a:extLst>
           </p:cNvPr>
@@ -5045,10 +5253,10 @@
       </p:sp>
       <p:sp>
         <p:nvSpPr>
-          <p:cNvPr id="9" name="footer">
-            <a:extLst xmlns:a="http://schemas.openxmlformats.org/drawingml/2006/main">
-              <a:ext uri="{FF2B5EF4-FFF2-40B4-BE49-F238E27FC236}">
-                <a16:creationId xmlns:a16="http://schemas.microsoft.com/office/drawing/2014/main" id="{13977B51-0B1D-4DC5-928D-DD524F4A2022}"/>
+          <p:cNvPr id="11" name="footer">
+            <a:extLst xmlns:a="http://schemas.openxmlformats.org/drawingml/2006/main">
+              <a:ext uri="{FF2B5EF4-FFF2-40B4-BE49-F238E27FC236}">
+                <a16:creationId xmlns:a16="http://schemas.microsoft.com/office/drawing/2014/main" id="{45EE0EA3-3DB8-445C-968B-0DD384380564}"/>
               </a:ext>
             </a:extLst>
           </p:cNvPr>
@@ -5100,10 +5308,10 @@
       </p:sp>
       <p:sp>
         <p:nvSpPr>
-          <p:cNvPr id="10" name="page-number">
-            <a:extLst xmlns:a="http://schemas.openxmlformats.org/drawingml/2006/main">
-              <a:ext uri="{FF2B5EF4-FFF2-40B4-BE49-F238E27FC236}">
-                <a16:creationId xmlns:a16="http://schemas.microsoft.com/office/drawing/2014/main" id="{2E8531E1-081C-4F97-850D-347D2CA06C52}"/>
+          <p:cNvPr id="12" name="page-number">
+            <a:extLst xmlns:a="http://schemas.openxmlformats.org/drawingml/2006/main">
+              <a:ext uri="{FF2B5EF4-FFF2-40B4-BE49-F238E27FC236}">
+                <a16:creationId xmlns:a16="http://schemas.microsoft.com/office/drawing/2014/main" id="{EC726376-DCD4-4ADD-A491-7DF5FA19A638}"/>
               </a:ext>
             </a:extLst>
           </p:cNvPr>
@@ -5156,7 +5364,7 @@
     </p:spTree>
     <p:extLst>
       <p:ext uri="{BB962C8B-B14F-4D97-AF65-F5344CB8AC3E}">
-        <p14:creationId xmlns:p14="http://schemas.microsoft.com/office/powerpoint/2010/main" val="1552070363"/>
+        <p14:creationId xmlns:p14="http://schemas.microsoft.com/office/powerpoint/2010/main" val="1031493648"/>
       </p:ext>
     </p:extLst>
   </p:cSld>
@@ -5192,10 +5400,10 @@
       </p:grpSpPr>
       <p:sp>
         <p:nvSpPr>
-          <p:cNvPr id="9" name="slide-title">
-            <a:extLst xmlns:a="http://schemas.openxmlformats.org/drawingml/2006/main">
-              <a:ext uri="{FF2B5EF4-FFF2-40B4-BE49-F238E27FC236}">
-                <a16:creationId xmlns:a16="http://schemas.microsoft.com/office/drawing/2014/main" id="{CCEB15E7-A2E6-43EC-B19E-4DD752F92C8E}"/>
+          <p:cNvPr id="11" name="slide-title">
+            <a:extLst xmlns:a="http://schemas.openxmlformats.org/drawingml/2006/main">
+              <a:ext uri="{FF2B5EF4-FFF2-40B4-BE49-F238E27FC236}">
+                <a16:creationId xmlns:a16="http://schemas.microsoft.com/office/drawing/2014/main" id="{DA0647F9-E2FA-449C-8BED-93E4178F78EE}"/>
               </a:ext>
             </a:extLst>
           </p:cNvPr>
@@ -5246,7 +5454,7 @@
           <p:cNvPr id="2" name="code-surface">
             <a:extLst xmlns:a="http://schemas.openxmlformats.org/drawingml/2006/main">
               <a:ext uri="{FF2B5EF4-FFF2-40B4-BE49-F238E27FC236}">
-                <a16:creationId xmlns:a16="http://schemas.microsoft.com/office/drawing/2014/main" id="{BD9D37C9-1463-4DCE-B257-CA99D2587E66}"/>
+                <a16:creationId xmlns:a16="http://schemas.microsoft.com/office/drawing/2014/main" id="{6FE10302-D81B-4329-8361-8198B9268432}"/>
               </a:ext>
             </a:extLst>
           </p:cNvPr>
@@ -5281,7 +5489,7 @@
           <p:cNvPr id="3" name="command">
             <a:extLst xmlns:a="http://schemas.openxmlformats.org/drawingml/2006/main">
               <a:ext uri="{FF2B5EF4-FFF2-40B4-BE49-F238E27FC236}">
-                <a16:creationId xmlns:a16="http://schemas.microsoft.com/office/drawing/2014/main" id="{1D1DF1D2-CE89-4609-B7B4-F6EE3FE6CBDC}"/>
+                <a16:creationId xmlns:a16="http://schemas.microsoft.com/office/drawing/2014/main" id="{EDBBE28C-58EB-441B-8E6E-3090A0CC9443}"/>
               </a:ext>
             </a:extLst>
           </p:cNvPr>
@@ -5332,7 +5540,7 @@
           <p:cNvPr id="4" name="command-help">
             <a:extLst xmlns:a="http://schemas.openxmlformats.org/drawingml/2006/main">
               <a:ext uri="{FF2B5EF4-FFF2-40B4-BE49-F238E27FC236}">
-                <a16:creationId xmlns:a16="http://schemas.microsoft.com/office/drawing/2014/main" id="{951AF9A9-9A1E-4B91-9965-077E3114FA8E}"/>
+                <a16:creationId xmlns:a16="http://schemas.microsoft.com/office/drawing/2014/main" id="{78F04E91-4EC9-4C3D-8D1B-587DF611CBE4}"/>
               </a:ext>
             </a:extLst>
           </p:cNvPr>
@@ -5383,7 +5591,7 @@
           <p:cNvPr id="5" name="eyebrow">
             <a:extLst xmlns:a="http://schemas.openxmlformats.org/drawingml/2006/main">
               <a:ext uri="{FF2B5EF4-FFF2-40B4-BE49-F238E27FC236}">
-                <a16:creationId xmlns:a16="http://schemas.microsoft.com/office/drawing/2014/main" id="{723AFD19-6B88-40CD-AB57-47FAF4236168}"/>
+                <a16:creationId xmlns:a16="http://schemas.microsoft.com/office/drawing/2014/main" id="{C61A7B2B-6C17-4A4A-AE34-D47BB212FA06}"/>
               </a:ext>
             </a:extLst>
           </p:cNvPr>
@@ -5431,10 +5639,69 @@
       </p:sp>
       <p:sp>
         <p:nvSpPr>
-          <p:cNvPr id="6" name="footer-rule">
-            <a:extLst xmlns:a="http://schemas.openxmlformats.org/drawingml/2006/main">
-              <a:ext uri="{FF2B5EF4-FFF2-40B4-BE49-F238E27FC236}">
-                <a16:creationId xmlns:a16="http://schemas.microsoft.com/office/drawing/2014/main" id="{79641CEB-0C68-4E51-AEEE-9E27D4B35AAB}"/>
+          <p:cNvPr id="6" name="rescue-point-logo-background">
+            <a:extLst xmlns:a="http://schemas.openxmlformats.org/drawingml/2006/main">
+              <a:ext uri="{FF2B5EF4-FFF2-40B4-BE49-F238E27FC236}">
+                <a16:creationId xmlns:a16="http://schemas.microsoft.com/office/drawing/2014/main" id="{E38B762C-6B1D-4889-AD79-E8C48D766BC5}"/>
+              </a:ext>
+            </a:extLst>
+          </p:cNvPr>
+          <p:cNvSpPr>
+            <a:spLocks xmlns:a="http://schemas.openxmlformats.org/drawingml/2006/main" noGrp="1"/>
+          </p:cNvSpPr>
+          <p:nvPr/>
+        </p:nvSpPr>
+        <p:spPr>
+          <a:xfrm xmlns:a="http://schemas.openxmlformats.org/drawingml/2006/main">
+            <a:off x="9772650" y="133350"/>
+            <a:ext cx="1733550" cy="457200"/>
+          </a:xfrm>
+          <a:prstGeom xmlns:a="http://schemas.openxmlformats.org/drawingml/2006/main" prst="roundRect">
+            <a:avLst>
+              <a:gd name="adj" fmla="val 16667"/>
+            </a:avLst>
+          </a:prstGeom>
+          <a:solidFill xmlns:a="http://schemas.openxmlformats.org/drawingml/2006/main">
+            <a:srgbClr val="06142E"/>
+          </a:solidFill>
+          <a:ln xmlns:a="http://schemas.openxmlformats.org/drawingml/2006/main" w="9525">
+            <a:solidFill>
+              <a:srgbClr val="1EC5FF">
+                <a:alpha val="33333"/>
+              </a:srgbClr>
+            </a:solidFill>
+            <a:prstDash val="solid"/>
+          </a:ln>
+        </p:spPr>
+      </p:sp>
+      <p:pic>
+        <p:nvPicPr>
+          <p:cNvPr id="19" name="" descr="Figura oficial da documentação dbt usada para explicar: Demonstração — execute — python course.py checkpoint 08."/>
+          <p:cNvPicPr>
+            <a:picLocks xmlns:a="http://schemas.openxmlformats.org/drawingml/2006/main" noChangeAspect="1"/>
+          </p:cNvPicPr>
+          <p:nvPr/>
+        </p:nvPicPr>
+        <p:blipFill>
+          <a:blip xmlns:r="http://schemas.openxmlformats.org/officeDocument/2006/relationships" xmlns:a="http://schemas.openxmlformats.org/drawingml/2006/main" r:embed="R85007b8d3927464c"/>
+          <a:stretch xmlns:a="http://schemas.openxmlformats.org/drawingml/2006/main"/>
+        </p:blipFill>
+        <p:spPr>
+          <a:xfrm xmlns:a="http://schemas.openxmlformats.org/drawingml/2006/main">
+            <a:off x="9893718" y="209550"/>
+            <a:ext cx="1491414" cy="323850"/>
+          </a:xfrm>
+          <a:prstGeom xmlns:a="http://schemas.openxmlformats.org/drawingml/2006/main" prst="rect">
+            <a:avLst/>
+          </a:prstGeom>
+        </p:spPr>
+      </p:pic>
+      <p:sp>
+        <p:nvSpPr>
+          <p:cNvPr id="8" name="footer-rule">
+            <a:extLst xmlns:a="http://schemas.openxmlformats.org/drawingml/2006/main">
+              <a:ext uri="{FF2B5EF4-FFF2-40B4-BE49-F238E27FC236}">
+                <a16:creationId xmlns:a16="http://schemas.microsoft.com/office/drawing/2014/main" id="{4A1DC386-0A9D-430B-94EB-D7F03D8C74CC}"/>
               </a:ext>
             </a:extLst>
           </p:cNvPr>
@@ -5464,10 +5731,10 @@
       </p:sp>
       <p:sp>
         <p:nvSpPr>
-          <p:cNvPr id="7" name="footer">
-            <a:extLst xmlns:a="http://schemas.openxmlformats.org/drawingml/2006/main">
-              <a:ext uri="{FF2B5EF4-FFF2-40B4-BE49-F238E27FC236}">
-                <a16:creationId xmlns:a16="http://schemas.microsoft.com/office/drawing/2014/main" id="{65DAF174-3F29-4F33-BDEC-E579DC916B8F}"/>
+          <p:cNvPr id="9" name="footer">
+            <a:extLst xmlns:a="http://schemas.openxmlformats.org/drawingml/2006/main">
+              <a:ext uri="{FF2B5EF4-FFF2-40B4-BE49-F238E27FC236}">
+                <a16:creationId xmlns:a16="http://schemas.microsoft.com/office/drawing/2014/main" id="{C4A3AFA0-0569-4CD9-A471-53E37ECA134C}"/>
               </a:ext>
             </a:extLst>
           </p:cNvPr>
@@ -5519,10 +5786,10 @@
       </p:sp>
       <p:sp>
         <p:nvSpPr>
-          <p:cNvPr id="8" name="page-number">
-            <a:extLst xmlns:a="http://schemas.openxmlformats.org/drawingml/2006/main">
-              <a:ext uri="{FF2B5EF4-FFF2-40B4-BE49-F238E27FC236}">
-                <a16:creationId xmlns:a16="http://schemas.microsoft.com/office/drawing/2014/main" id="{BC2D5988-2411-454D-84CD-B81141BFD29D}"/>
+          <p:cNvPr id="10" name="page-number">
+            <a:extLst xmlns:a="http://schemas.openxmlformats.org/drawingml/2006/main">
+              <a:ext uri="{FF2B5EF4-FFF2-40B4-BE49-F238E27FC236}">
+                <a16:creationId xmlns:a16="http://schemas.microsoft.com/office/drawing/2014/main" id="{F18517FC-57FA-4FC5-9AEE-B623452326D7}"/>
               </a:ext>
             </a:extLst>
           </p:cNvPr>
@@ -5575,7 +5842,7 @@
     </p:spTree>
     <p:extLst>
       <p:ext uri="{BB962C8B-B14F-4D97-AF65-F5344CB8AC3E}">
-        <p14:creationId xmlns:p14="http://schemas.microsoft.com/office/powerpoint/2010/main" val="852208112"/>
+        <p14:creationId xmlns:p14="http://schemas.microsoft.com/office/powerpoint/2010/main" val="1913982608"/>
       </p:ext>
     </p:extLst>
   </p:cSld>
@@ -5603,10 +5870,10 @@
       </p:grpSpPr>
       <p:sp>
         <p:nvSpPr>
-          <p:cNvPr id="14" name="slide-title">
-            <a:extLst xmlns:a="http://schemas.openxmlformats.org/drawingml/2006/main">
-              <a:ext uri="{FF2B5EF4-FFF2-40B4-BE49-F238E27FC236}">
-                <a16:creationId xmlns:a16="http://schemas.microsoft.com/office/drawing/2014/main" id="{0309A3A0-9102-4D23-9654-B0B078BF8C3C}"/>
+          <p:cNvPr id="16" name="slide-title">
+            <a:extLst xmlns:a="http://schemas.openxmlformats.org/drawingml/2006/main">
+              <a:ext uri="{FF2B5EF4-FFF2-40B4-BE49-F238E27FC236}">
+                <a16:creationId xmlns:a16="http://schemas.microsoft.com/office/drawing/2014/main" id="{9B264BB3-F0B4-43A7-97A1-9AC526C5022C}"/>
               </a:ext>
             </a:extLst>
           </p:cNvPr>
@@ -5657,7 +5924,7 @@
           <p:cNvPr id="2" name="step-num-1">
             <a:extLst xmlns:a="http://schemas.openxmlformats.org/drawingml/2006/main">
               <a:ext uri="{FF2B5EF4-FFF2-40B4-BE49-F238E27FC236}">
-                <a16:creationId xmlns:a16="http://schemas.microsoft.com/office/drawing/2014/main" id="{AB420587-48ED-477F-92C9-67F02DD25F58}"/>
+                <a16:creationId xmlns:a16="http://schemas.microsoft.com/office/drawing/2014/main" id="{ADDA8557-3569-492F-BC28-CED8CC50A30F}"/>
               </a:ext>
             </a:extLst>
           </p:cNvPr>
@@ -5708,7 +5975,7 @@
           <p:cNvPr id="3" name="step-label-1">
             <a:extLst xmlns:a="http://schemas.openxmlformats.org/drawingml/2006/main">
               <a:ext uri="{FF2B5EF4-FFF2-40B4-BE49-F238E27FC236}">
-                <a16:creationId xmlns:a16="http://schemas.microsoft.com/office/drawing/2014/main" id="{55DAF8B2-5977-422C-92FB-EF40D5D18776}"/>
+                <a16:creationId xmlns:a16="http://schemas.microsoft.com/office/drawing/2014/main" id="{6CEBD1D3-B1A9-4E38-ADFA-D295964CF56D}"/>
               </a:ext>
             </a:extLst>
           </p:cNvPr>
@@ -5759,7 +6026,7 @@
           <p:cNvPr id="4" name="step-line-1">
             <a:extLst xmlns:a="http://schemas.openxmlformats.org/drawingml/2006/main">
               <a:ext uri="{FF2B5EF4-FFF2-40B4-BE49-F238E27FC236}">
-                <a16:creationId xmlns:a16="http://schemas.microsoft.com/office/drawing/2014/main" id="{03DB0E7D-4F9E-4451-A82A-10209F19585F}"/>
+                <a16:creationId xmlns:a16="http://schemas.microsoft.com/office/drawing/2014/main" id="{A3AEF847-91EA-4E4C-B7B4-874BA9CB128B}"/>
               </a:ext>
             </a:extLst>
           </p:cNvPr>
@@ -5790,7 +6057,7 @@
           <p:cNvPr id="5" name="step-num-2">
             <a:extLst xmlns:a="http://schemas.openxmlformats.org/drawingml/2006/main">
               <a:ext uri="{FF2B5EF4-FFF2-40B4-BE49-F238E27FC236}">
-                <a16:creationId xmlns:a16="http://schemas.microsoft.com/office/drawing/2014/main" id="{A7AC16DE-98A6-4BF6-959D-8A3330800D2D}"/>
+                <a16:creationId xmlns:a16="http://schemas.microsoft.com/office/drawing/2014/main" id="{3F86398D-52F4-42DF-AB74-A91F42BFAB83}"/>
               </a:ext>
             </a:extLst>
           </p:cNvPr>
@@ -5841,7 +6108,7 @@
           <p:cNvPr id="6" name="step-label-2">
             <a:extLst xmlns:a="http://schemas.openxmlformats.org/drawingml/2006/main">
               <a:ext uri="{FF2B5EF4-FFF2-40B4-BE49-F238E27FC236}">
-                <a16:creationId xmlns:a16="http://schemas.microsoft.com/office/drawing/2014/main" id="{92C81A0F-D7E4-44B7-B201-60CED562A4C4}"/>
+                <a16:creationId xmlns:a16="http://schemas.microsoft.com/office/drawing/2014/main" id="{A50E2666-37B4-4F19-A7D2-630051C341DE}"/>
               </a:ext>
             </a:extLst>
           </p:cNvPr>
@@ -5892,7 +6159,7 @@
           <p:cNvPr id="7" name="step-line-2">
             <a:extLst xmlns:a="http://schemas.openxmlformats.org/drawingml/2006/main">
               <a:ext uri="{FF2B5EF4-FFF2-40B4-BE49-F238E27FC236}">
-                <a16:creationId xmlns:a16="http://schemas.microsoft.com/office/drawing/2014/main" id="{2FA3FFB8-1CC7-4E9C-9872-C39FDD18DCBF}"/>
+                <a16:creationId xmlns:a16="http://schemas.microsoft.com/office/drawing/2014/main" id="{19F98306-E3B1-4519-AEA8-12FE3B1AEC08}"/>
               </a:ext>
             </a:extLst>
           </p:cNvPr>
@@ -5923,7 +6190,7 @@
           <p:cNvPr id="8" name="step-num-3">
             <a:extLst xmlns:a="http://schemas.openxmlformats.org/drawingml/2006/main">
               <a:ext uri="{FF2B5EF4-FFF2-40B4-BE49-F238E27FC236}">
-                <a16:creationId xmlns:a16="http://schemas.microsoft.com/office/drawing/2014/main" id="{E7FE5945-657F-4EF6-9EC4-FCAA0F3DB895}"/>
+                <a16:creationId xmlns:a16="http://schemas.microsoft.com/office/drawing/2014/main" id="{88026498-481A-42D9-A1A3-AB20C2773128}"/>
               </a:ext>
             </a:extLst>
           </p:cNvPr>
@@ -5974,7 +6241,7 @@
           <p:cNvPr id="9" name="step-label-3">
             <a:extLst xmlns:a="http://schemas.openxmlformats.org/drawingml/2006/main">
               <a:ext uri="{FF2B5EF4-FFF2-40B4-BE49-F238E27FC236}">
-                <a16:creationId xmlns:a16="http://schemas.microsoft.com/office/drawing/2014/main" id="{4E245591-6AC1-4A4A-94B5-C3D2ABD3223B}"/>
+                <a16:creationId xmlns:a16="http://schemas.microsoft.com/office/drawing/2014/main" id="{22D4C4BE-7123-44FC-A8B1-65B014333D7B}"/>
               </a:ext>
             </a:extLst>
           </p:cNvPr>
@@ -6025,7 +6292,7 @@
           <p:cNvPr id="10" name="eyebrow">
             <a:extLst xmlns:a="http://schemas.openxmlformats.org/drawingml/2006/main">
               <a:ext uri="{FF2B5EF4-FFF2-40B4-BE49-F238E27FC236}">
-                <a16:creationId xmlns:a16="http://schemas.microsoft.com/office/drawing/2014/main" id="{93A7735C-90AC-426B-8641-AE5F1801A3A0}"/>
+                <a16:creationId xmlns:a16="http://schemas.microsoft.com/office/drawing/2014/main" id="{A64F2ECF-D55F-4936-8BE4-B17F0D7F0273}"/>
               </a:ext>
             </a:extLst>
           </p:cNvPr>
@@ -6073,10 +6340,69 @@
       </p:sp>
       <p:sp>
         <p:nvSpPr>
-          <p:cNvPr id="11" name="footer-rule">
-            <a:extLst xmlns:a="http://schemas.openxmlformats.org/drawingml/2006/main">
-              <a:ext uri="{FF2B5EF4-FFF2-40B4-BE49-F238E27FC236}">
-                <a16:creationId xmlns:a16="http://schemas.microsoft.com/office/drawing/2014/main" id="{C11FF41F-554A-45E8-B347-1E6BC4CDBC4A}"/>
+          <p:cNvPr id="11" name="rescue-point-logo-background">
+            <a:extLst xmlns:a="http://schemas.openxmlformats.org/drawingml/2006/main">
+              <a:ext uri="{FF2B5EF4-FFF2-40B4-BE49-F238E27FC236}">
+                <a16:creationId xmlns:a16="http://schemas.microsoft.com/office/drawing/2014/main" id="{4EEA9E22-7BD8-4906-B350-7D047D0C9AF7}"/>
+              </a:ext>
+            </a:extLst>
+          </p:cNvPr>
+          <p:cNvSpPr>
+            <a:spLocks xmlns:a="http://schemas.openxmlformats.org/drawingml/2006/main" noGrp="1"/>
+          </p:cNvSpPr>
+          <p:nvPr/>
+        </p:nvSpPr>
+        <p:spPr>
+          <a:xfrm xmlns:a="http://schemas.openxmlformats.org/drawingml/2006/main">
+            <a:off x="9772650" y="133350"/>
+            <a:ext cx="1733550" cy="457200"/>
+          </a:xfrm>
+          <a:prstGeom xmlns:a="http://schemas.openxmlformats.org/drawingml/2006/main" prst="roundRect">
+            <a:avLst>
+              <a:gd name="adj" fmla="val 16667"/>
+            </a:avLst>
+          </a:prstGeom>
+          <a:solidFill xmlns:a="http://schemas.openxmlformats.org/drawingml/2006/main">
+            <a:srgbClr val="06142E"/>
+          </a:solidFill>
+          <a:ln xmlns:a="http://schemas.openxmlformats.org/drawingml/2006/main" w="9525">
+            <a:solidFill>
+              <a:srgbClr val="1EC5FF">
+                <a:alpha val="33333"/>
+              </a:srgbClr>
+            </a:solidFill>
+            <a:prstDash val="solid"/>
+          </a:ln>
+        </p:spPr>
+      </p:sp>
+      <p:pic>
+        <p:nvPicPr>
+          <p:cNvPr id="29" name="" descr="Figura oficial da documentação dbt usada para explicar: Demonstração — observe — 01."/>
+          <p:cNvPicPr>
+            <a:picLocks xmlns:a="http://schemas.openxmlformats.org/drawingml/2006/main" noChangeAspect="1"/>
+          </p:cNvPicPr>
+          <p:nvPr/>
+        </p:nvPicPr>
+        <p:blipFill>
+          <a:blip xmlns:r="http://schemas.openxmlformats.org/officeDocument/2006/relationships" xmlns:a="http://schemas.openxmlformats.org/drawingml/2006/main" r:embed="Raf5f40d2f3d942d9"/>
+          <a:stretch xmlns:a="http://schemas.openxmlformats.org/drawingml/2006/main"/>
+        </p:blipFill>
+        <p:spPr>
+          <a:xfrm xmlns:a="http://schemas.openxmlformats.org/drawingml/2006/main">
+            <a:off x="9893718" y="209550"/>
+            <a:ext cx="1491414" cy="323850"/>
+          </a:xfrm>
+          <a:prstGeom xmlns:a="http://schemas.openxmlformats.org/drawingml/2006/main" prst="rect">
+            <a:avLst/>
+          </a:prstGeom>
+        </p:spPr>
+      </p:pic>
+      <p:sp>
+        <p:nvSpPr>
+          <p:cNvPr id="13" name="footer-rule">
+            <a:extLst xmlns:a="http://schemas.openxmlformats.org/drawingml/2006/main">
+              <a:ext uri="{FF2B5EF4-FFF2-40B4-BE49-F238E27FC236}">
+                <a16:creationId xmlns:a16="http://schemas.microsoft.com/office/drawing/2014/main" id="{EACCB7B9-8E9F-4031-A11C-F6802BBD0FCC}"/>
               </a:ext>
             </a:extLst>
           </p:cNvPr>
@@ -6106,10 +6432,10 @@
       </p:sp>
       <p:sp>
         <p:nvSpPr>
-          <p:cNvPr id="12" name="footer">
-            <a:extLst xmlns:a="http://schemas.openxmlformats.org/drawingml/2006/main">
-              <a:ext uri="{FF2B5EF4-FFF2-40B4-BE49-F238E27FC236}">
-                <a16:creationId xmlns:a16="http://schemas.microsoft.com/office/drawing/2014/main" id="{DCBAB6D8-68DF-40A3-BE13-EABBAB4C7374}"/>
+          <p:cNvPr id="14" name="footer">
+            <a:extLst xmlns:a="http://schemas.openxmlformats.org/drawingml/2006/main">
+              <a:ext uri="{FF2B5EF4-FFF2-40B4-BE49-F238E27FC236}">
+                <a16:creationId xmlns:a16="http://schemas.microsoft.com/office/drawing/2014/main" id="{CAF7980B-2EF1-44A0-811D-F73848237094}"/>
               </a:ext>
             </a:extLst>
           </p:cNvPr>
@@ -6161,10 +6487,10 @@
       </p:sp>
       <p:sp>
         <p:nvSpPr>
-          <p:cNvPr id="13" name="page-number">
-            <a:extLst xmlns:a="http://schemas.openxmlformats.org/drawingml/2006/main">
-              <a:ext uri="{FF2B5EF4-FFF2-40B4-BE49-F238E27FC236}">
-                <a16:creationId xmlns:a16="http://schemas.microsoft.com/office/drawing/2014/main" id="{8CE2D4B8-0ED8-4937-A5C3-0C243D7C8657}"/>
+          <p:cNvPr id="15" name="page-number">
+            <a:extLst xmlns:a="http://schemas.openxmlformats.org/drawingml/2006/main">
+              <a:ext uri="{FF2B5EF4-FFF2-40B4-BE49-F238E27FC236}">
+                <a16:creationId xmlns:a16="http://schemas.microsoft.com/office/drawing/2014/main" id="{7A940205-2339-4F9E-8324-346B9AC7048B}"/>
               </a:ext>
             </a:extLst>
           </p:cNvPr>
@@ -6217,7 +6543,7 @@
     </p:spTree>
     <p:extLst>
       <p:ext uri="{BB962C8B-B14F-4D97-AF65-F5344CB8AC3E}">
-        <p14:creationId xmlns:p14="http://schemas.microsoft.com/office/powerpoint/2010/main" val="1762364429"/>
+        <p14:creationId xmlns:p14="http://schemas.microsoft.com/office/powerpoint/2010/main" val="580407771"/>
       </p:ext>
     </p:extLst>
   </p:cSld>
@@ -6253,10 +6579,10 @@
       </p:grpSpPr>
       <p:sp>
         <p:nvSpPr>
-          <p:cNvPr id="10" name="result-label">
-            <a:extLst xmlns:a="http://schemas.openxmlformats.org/drawingml/2006/main">
-              <a:ext uri="{FF2B5EF4-FFF2-40B4-BE49-F238E27FC236}">
-                <a16:creationId xmlns:a16="http://schemas.microsoft.com/office/drawing/2014/main" id="{0FBD9162-CA33-423A-9C2C-13BFD07D7FDF}"/>
+          <p:cNvPr id="12" name="result-label">
+            <a:extLst xmlns:a="http://schemas.openxmlformats.org/drawingml/2006/main">
+              <a:ext uri="{FF2B5EF4-FFF2-40B4-BE49-F238E27FC236}">
+                <a16:creationId xmlns:a16="http://schemas.microsoft.com/office/drawing/2014/main" id="{1B81BB8E-0E5B-4A90-BCE2-2AF491F487C7}"/>
               </a:ext>
             </a:extLst>
           </p:cNvPr>
@@ -6307,7 +6633,7 @@
           <p:cNvPr id="2" name="result">
             <a:extLst xmlns:a="http://schemas.openxmlformats.org/drawingml/2006/main">
               <a:ext uri="{FF2B5EF4-FFF2-40B4-BE49-F238E27FC236}">
-                <a16:creationId xmlns:a16="http://schemas.microsoft.com/office/drawing/2014/main" id="{807B046D-9C19-4C0F-AF95-A42ED8EA7B56}"/>
+                <a16:creationId xmlns:a16="http://schemas.microsoft.com/office/drawing/2014/main" id="{FA991D6C-E691-4F63-9D17-55EDF079C43D}"/>
               </a:ext>
             </a:extLst>
           </p:cNvPr>
@@ -6358,7 +6684,7 @@
           <p:cNvPr id="3" name="result-meta">
             <a:extLst xmlns:a="http://schemas.openxmlformats.org/drawingml/2006/main">
               <a:ext uri="{FF2B5EF4-FFF2-40B4-BE49-F238E27FC236}">
-                <a16:creationId xmlns:a16="http://schemas.microsoft.com/office/drawing/2014/main" id="{BDF7AAB5-198B-4E67-B27B-5C41671955E2}"/>
+                <a16:creationId xmlns:a16="http://schemas.microsoft.com/office/drawing/2014/main" id="{6172C426-6C63-41A1-8F68-B6042DF5DD64}"/>
               </a:ext>
             </a:extLst>
           </p:cNvPr>
@@ -6409,7 +6735,7 @@
           <p:cNvPr id="4" name="ambient-glow">
             <a:extLst xmlns:a="http://schemas.openxmlformats.org/drawingml/2006/main">
               <a:ext uri="{FF2B5EF4-FFF2-40B4-BE49-F238E27FC236}">
-                <a16:creationId xmlns:a16="http://schemas.microsoft.com/office/drawing/2014/main" id="{AA76E2ED-DDC4-48F4-ABED-8D07A6D91B96}"/>
+                <a16:creationId xmlns:a16="http://schemas.microsoft.com/office/drawing/2014/main" id="{813B3527-1BF7-441C-869D-0192FD72B170}"/>
               </a:ext>
             </a:extLst>
           </p:cNvPr>
@@ -6446,7 +6772,7 @@
           <p:cNvPr id="5" name="ambient-core">
             <a:extLst xmlns:a="http://schemas.openxmlformats.org/drawingml/2006/main">
               <a:ext uri="{FF2B5EF4-FFF2-40B4-BE49-F238E27FC236}">
-                <a16:creationId xmlns:a16="http://schemas.microsoft.com/office/drawing/2014/main" id="{D70EE482-FC0A-49ED-ADC9-1DAC250CBC46}"/>
+                <a16:creationId xmlns:a16="http://schemas.microsoft.com/office/drawing/2014/main" id="{CFD6901E-29EE-41E6-B204-EDE1EB7383FE}"/>
               </a:ext>
             </a:extLst>
           </p:cNvPr>
@@ -6483,7 +6809,7 @@
           <p:cNvPr id="6" name="eyebrow">
             <a:extLst xmlns:a="http://schemas.openxmlformats.org/drawingml/2006/main">
               <a:ext uri="{FF2B5EF4-FFF2-40B4-BE49-F238E27FC236}">
-                <a16:creationId xmlns:a16="http://schemas.microsoft.com/office/drawing/2014/main" id="{014BDBDD-957F-4D26-A700-DDAD242C5C63}"/>
+                <a16:creationId xmlns:a16="http://schemas.microsoft.com/office/drawing/2014/main" id="{11505FF4-2168-4C1E-8BA6-ADDC11A39625}"/>
               </a:ext>
             </a:extLst>
           </p:cNvPr>
@@ -6531,10 +6857,69 @@
       </p:sp>
       <p:sp>
         <p:nvSpPr>
-          <p:cNvPr id="7" name="footer-rule">
-            <a:extLst xmlns:a="http://schemas.openxmlformats.org/drawingml/2006/main">
-              <a:ext uri="{FF2B5EF4-FFF2-40B4-BE49-F238E27FC236}">
-                <a16:creationId xmlns:a16="http://schemas.microsoft.com/office/drawing/2014/main" id="{5A14C2AA-361A-47AD-BAD9-4F9FCF6C8598}"/>
+          <p:cNvPr id="7" name="rescue-point-logo-background">
+            <a:extLst xmlns:a="http://schemas.openxmlformats.org/drawingml/2006/main">
+              <a:ext uri="{FF2B5EF4-FFF2-40B4-BE49-F238E27FC236}">
+                <a16:creationId xmlns:a16="http://schemas.microsoft.com/office/drawing/2014/main" id="{F6F07D87-FB4F-4F0C-8F9A-9D4DE3912A6E}"/>
+              </a:ext>
+            </a:extLst>
+          </p:cNvPr>
+          <p:cNvSpPr>
+            <a:spLocks xmlns:a="http://schemas.openxmlformats.org/drawingml/2006/main" noGrp="1"/>
+          </p:cNvSpPr>
+          <p:nvPr/>
+        </p:nvSpPr>
+        <p:spPr>
+          <a:xfrm xmlns:a="http://schemas.openxmlformats.org/drawingml/2006/main">
+            <a:off x="9772650" y="133350"/>
+            <a:ext cx="1733550" cy="457200"/>
+          </a:xfrm>
+          <a:prstGeom xmlns:a="http://schemas.openxmlformats.org/drawingml/2006/main" prst="roundRect">
+            <a:avLst>
+              <a:gd name="adj" fmla="val 16667"/>
+            </a:avLst>
+          </a:prstGeom>
+          <a:solidFill xmlns:a="http://schemas.openxmlformats.org/drawingml/2006/main">
+            <a:srgbClr val="06142E"/>
+          </a:solidFill>
+          <a:ln xmlns:a="http://schemas.openxmlformats.org/drawingml/2006/main" w="9525">
+            <a:solidFill>
+              <a:srgbClr val="1EC5FF">
+                <a:alpha val="33333"/>
+              </a:srgbClr>
+            </a:solidFill>
+            <a:prstDash val="solid"/>
+          </a:ln>
+        </p:spPr>
+      </p:sp>
+      <p:pic>
+        <p:nvPicPr>
+          <p:cNvPr id="21" name="" descr="Figura oficial da documentação dbt usada para explicar: RESULTADO ESPERADO — Data products sem cross-project pago."/>
+          <p:cNvPicPr>
+            <a:picLocks xmlns:a="http://schemas.openxmlformats.org/drawingml/2006/main" noChangeAspect="1"/>
+          </p:cNvPicPr>
+          <p:nvPr/>
+        </p:nvPicPr>
+        <p:blipFill>
+          <a:blip xmlns:r="http://schemas.openxmlformats.org/officeDocument/2006/relationships" xmlns:a="http://schemas.openxmlformats.org/drawingml/2006/main" r:embed="R7e72273054494697"/>
+          <a:stretch xmlns:a="http://schemas.openxmlformats.org/drawingml/2006/main"/>
+        </p:blipFill>
+        <p:spPr>
+          <a:xfrm xmlns:a="http://schemas.openxmlformats.org/drawingml/2006/main">
+            <a:off x="9893718" y="209550"/>
+            <a:ext cx="1491414" cy="323850"/>
+          </a:xfrm>
+          <a:prstGeom xmlns:a="http://schemas.openxmlformats.org/drawingml/2006/main" prst="rect">
+            <a:avLst/>
+          </a:prstGeom>
+        </p:spPr>
+      </p:pic>
+      <p:sp>
+        <p:nvSpPr>
+          <p:cNvPr id="9" name="footer-rule">
+            <a:extLst xmlns:a="http://schemas.openxmlformats.org/drawingml/2006/main">
+              <a:ext uri="{FF2B5EF4-FFF2-40B4-BE49-F238E27FC236}">
+                <a16:creationId xmlns:a16="http://schemas.microsoft.com/office/drawing/2014/main" id="{B6C04915-AB95-4ED7-AE21-B915F40D7A62}"/>
               </a:ext>
             </a:extLst>
           </p:cNvPr>
@@ -6564,10 +6949,10 @@
       </p:sp>
       <p:sp>
         <p:nvSpPr>
-          <p:cNvPr id="8" name="footer">
-            <a:extLst xmlns:a="http://schemas.openxmlformats.org/drawingml/2006/main">
-              <a:ext uri="{FF2B5EF4-FFF2-40B4-BE49-F238E27FC236}">
-                <a16:creationId xmlns:a16="http://schemas.microsoft.com/office/drawing/2014/main" id="{26463A8A-5A92-4976-978B-D955078D205F}"/>
+          <p:cNvPr id="10" name="footer">
+            <a:extLst xmlns:a="http://schemas.openxmlformats.org/drawingml/2006/main">
+              <a:ext uri="{FF2B5EF4-FFF2-40B4-BE49-F238E27FC236}">
+                <a16:creationId xmlns:a16="http://schemas.microsoft.com/office/drawing/2014/main" id="{6624A641-F183-4E1B-AD9B-58ED43F8E809}"/>
               </a:ext>
             </a:extLst>
           </p:cNvPr>
@@ -6619,10 +7004,10 @@
       </p:sp>
       <p:sp>
         <p:nvSpPr>
-          <p:cNvPr id="9" name="page-number">
-            <a:extLst xmlns:a="http://schemas.openxmlformats.org/drawingml/2006/main">
-              <a:ext uri="{FF2B5EF4-FFF2-40B4-BE49-F238E27FC236}">
-                <a16:creationId xmlns:a16="http://schemas.microsoft.com/office/drawing/2014/main" id="{7B2DECC5-69B4-496E-923E-29967A808A91}"/>
+          <p:cNvPr id="11" name="page-number">
+            <a:extLst xmlns:a="http://schemas.openxmlformats.org/drawingml/2006/main">
+              <a:ext uri="{FF2B5EF4-FFF2-40B4-BE49-F238E27FC236}">
+                <a16:creationId xmlns:a16="http://schemas.microsoft.com/office/drawing/2014/main" id="{1DAD75B4-9239-446D-9C07-48E0CBCB276D}"/>
               </a:ext>
             </a:extLst>
           </p:cNvPr>
@@ -6675,7 +7060,7 @@
     </p:spTree>
     <p:extLst>
       <p:ext uri="{BB962C8B-B14F-4D97-AF65-F5344CB8AC3E}">
-        <p14:creationId xmlns:p14="http://schemas.microsoft.com/office/powerpoint/2010/main" val="1520581122"/>
+        <p14:creationId xmlns:p14="http://schemas.microsoft.com/office/powerpoint/2010/main" val="679551983"/>
       </p:ext>
     </p:extLst>
   </p:cSld>
@@ -6703,10 +7088,10 @@
       </p:grpSpPr>
       <p:sp>
         <p:nvSpPr>
-          <p:cNvPr id="14" name="slide-title">
-            <a:extLst xmlns:a="http://schemas.openxmlformats.org/drawingml/2006/main">
-              <a:ext uri="{FF2B5EF4-FFF2-40B4-BE49-F238E27FC236}">
-                <a16:creationId xmlns:a16="http://schemas.microsoft.com/office/drawing/2014/main" id="{4B260C9E-A919-4ACE-9CF4-CE14BE0A8C6E}"/>
+          <p:cNvPr id="16" name="slide-title">
+            <a:extLst xmlns:a="http://schemas.openxmlformats.org/drawingml/2006/main">
+              <a:ext uri="{FF2B5EF4-FFF2-40B4-BE49-F238E27FC236}">
+                <a16:creationId xmlns:a16="http://schemas.microsoft.com/office/drawing/2014/main" id="{36A42B23-FA65-4C80-ACF2-D96E8B8A5C8E}"/>
               </a:ext>
             </a:extLst>
           </p:cNvPr>
@@ -6757,7 +7142,7 @@
           <p:cNvPr id="2" name="step-num-1">
             <a:extLst xmlns:a="http://schemas.openxmlformats.org/drawingml/2006/main">
               <a:ext uri="{FF2B5EF4-FFF2-40B4-BE49-F238E27FC236}">
-                <a16:creationId xmlns:a16="http://schemas.microsoft.com/office/drawing/2014/main" id="{7012AF7B-9B21-495A-A340-AE62F9416619}"/>
+                <a16:creationId xmlns:a16="http://schemas.microsoft.com/office/drawing/2014/main" id="{60EA51D1-9723-4D27-96BB-8E8F974774C5}"/>
               </a:ext>
             </a:extLst>
           </p:cNvPr>
@@ -6808,7 +7193,7 @@
           <p:cNvPr id="3" name="step-label-1">
             <a:extLst xmlns:a="http://schemas.openxmlformats.org/drawingml/2006/main">
               <a:ext uri="{FF2B5EF4-FFF2-40B4-BE49-F238E27FC236}">
-                <a16:creationId xmlns:a16="http://schemas.microsoft.com/office/drawing/2014/main" id="{FDACB40D-5EE2-47A7-BB55-C6060FA92C29}"/>
+                <a16:creationId xmlns:a16="http://schemas.microsoft.com/office/drawing/2014/main" id="{FC8C9732-19B6-4C86-A716-E5E000ACF16A}"/>
               </a:ext>
             </a:extLst>
           </p:cNvPr>
@@ -6859,7 +7244,7 @@
           <p:cNvPr id="4" name="step-line-1">
             <a:extLst xmlns:a="http://schemas.openxmlformats.org/drawingml/2006/main">
               <a:ext uri="{FF2B5EF4-FFF2-40B4-BE49-F238E27FC236}">
-                <a16:creationId xmlns:a16="http://schemas.microsoft.com/office/drawing/2014/main" id="{36F408A4-4CC9-465C-A3CA-1AC2BDE1A914}"/>
+                <a16:creationId xmlns:a16="http://schemas.microsoft.com/office/drawing/2014/main" id="{E6620DFC-F850-446E-847E-0775D408160A}"/>
               </a:ext>
             </a:extLst>
           </p:cNvPr>
@@ -6890,7 +7275,7 @@
           <p:cNvPr id="5" name="step-num-2">
             <a:extLst xmlns:a="http://schemas.openxmlformats.org/drawingml/2006/main">
               <a:ext uri="{FF2B5EF4-FFF2-40B4-BE49-F238E27FC236}">
-                <a16:creationId xmlns:a16="http://schemas.microsoft.com/office/drawing/2014/main" id="{77F679D2-9D98-4A44-ABCE-0A8491EB6E94}"/>
+                <a16:creationId xmlns:a16="http://schemas.microsoft.com/office/drawing/2014/main" id="{0C6C22DF-A310-47BD-878A-BCF399BEEFC8}"/>
               </a:ext>
             </a:extLst>
           </p:cNvPr>
@@ -6941,7 +7326,7 @@
           <p:cNvPr id="6" name="step-label-2">
             <a:extLst xmlns:a="http://schemas.openxmlformats.org/drawingml/2006/main">
               <a:ext uri="{FF2B5EF4-FFF2-40B4-BE49-F238E27FC236}">
-                <a16:creationId xmlns:a16="http://schemas.microsoft.com/office/drawing/2014/main" id="{814DCD8E-106D-44F7-841E-D3B6F55CB4CE}"/>
+                <a16:creationId xmlns:a16="http://schemas.microsoft.com/office/drawing/2014/main" id="{9B19BE59-9FC4-4A69-8943-C6D27934E069}"/>
               </a:ext>
             </a:extLst>
           </p:cNvPr>
@@ -6992,7 +7377,7 @@
           <p:cNvPr id="7" name="step-line-2">
             <a:extLst xmlns:a="http://schemas.openxmlformats.org/drawingml/2006/main">
               <a:ext uri="{FF2B5EF4-FFF2-40B4-BE49-F238E27FC236}">
-                <a16:creationId xmlns:a16="http://schemas.microsoft.com/office/drawing/2014/main" id="{E2B8319D-77D6-48C0-93E5-5B62C8BA36D5}"/>
+                <a16:creationId xmlns:a16="http://schemas.microsoft.com/office/drawing/2014/main" id="{F2E32D6E-7D84-4091-9532-A4844F8E11C9}"/>
               </a:ext>
             </a:extLst>
           </p:cNvPr>
@@ -7023,7 +7408,7 @@
           <p:cNvPr id="8" name="step-num-3">
             <a:extLst xmlns:a="http://schemas.openxmlformats.org/drawingml/2006/main">
               <a:ext uri="{FF2B5EF4-FFF2-40B4-BE49-F238E27FC236}">
-                <a16:creationId xmlns:a16="http://schemas.microsoft.com/office/drawing/2014/main" id="{40DCEE0E-1A71-4E46-A4DD-A4D3725606DD}"/>
+                <a16:creationId xmlns:a16="http://schemas.microsoft.com/office/drawing/2014/main" id="{2D0C46CF-4F07-4422-A3B4-6BCC4941A061}"/>
               </a:ext>
             </a:extLst>
           </p:cNvPr>
@@ -7074,7 +7459,7 @@
           <p:cNvPr id="9" name="step-label-3">
             <a:extLst xmlns:a="http://schemas.openxmlformats.org/drawingml/2006/main">
               <a:ext uri="{FF2B5EF4-FFF2-40B4-BE49-F238E27FC236}">
-                <a16:creationId xmlns:a16="http://schemas.microsoft.com/office/drawing/2014/main" id="{3F8E3101-3470-4FD0-8ED6-E6605DA3CBC7}"/>
+                <a16:creationId xmlns:a16="http://schemas.microsoft.com/office/drawing/2014/main" id="{67B86234-100D-4193-8DD9-1DC7213EAE62}"/>
               </a:ext>
             </a:extLst>
           </p:cNvPr>
@@ -7125,7 +7510,7 @@
           <p:cNvPr id="10" name="eyebrow">
             <a:extLst xmlns:a="http://schemas.openxmlformats.org/drawingml/2006/main">
               <a:ext uri="{FF2B5EF4-FFF2-40B4-BE49-F238E27FC236}">
-                <a16:creationId xmlns:a16="http://schemas.microsoft.com/office/drawing/2014/main" id="{E54881D5-0C08-4AD3-8A5B-8D2C3939BD65}"/>
+                <a16:creationId xmlns:a16="http://schemas.microsoft.com/office/drawing/2014/main" id="{A377518E-D75C-44D9-8A2B-BCFC82F914BB}"/>
               </a:ext>
             </a:extLst>
           </p:cNvPr>
@@ -7173,10 +7558,69 @@
       </p:sp>
       <p:sp>
         <p:nvSpPr>
-          <p:cNvPr id="11" name="footer-rule">
-            <a:extLst xmlns:a="http://schemas.openxmlformats.org/drawingml/2006/main">
-              <a:ext uri="{FF2B5EF4-FFF2-40B4-BE49-F238E27FC236}">
-                <a16:creationId xmlns:a16="http://schemas.microsoft.com/office/drawing/2014/main" id="{23891371-7E23-4AA6-A6C7-BA292B9A2BD6}"/>
+          <p:cNvPr id="11" name="rescue-point-logo-background">
+            <a:extLst xmlns:a="http://schemas.openxmlformats.org/drawingml/2006/main">
+              <a:ext uri="{FF2B5EF4-FFF2-40B4-BE49-F238E27FC236}">
+                <a16:creationId xmlns:a16="http://schemas.microsoft.com/office/drawing/2014/main" id="{2D63E5C0-6208-4A48-8840-39554E9B7EE1}"/>
+              </a:ext>
+            </a:extLst>
+          </p:cNvPr>
+          <p:cNvSpPr>
+            <a:spLocks xmlns:a="http://schemas.openxmlformats.org/drawingml/2006/main" noGrp="1"/>
+          </p:cNvSpPr>
+          <p:nvPr/>
+        </p:nvSpPr>
+        <p:spPr>
+          <a:xfrm xmlns:a="http://schemas.openxmlformats.org/drawingml/2006/main">
+            <a:off x="9772650" y="133350"/>
+            <a:ext cx="1733550" cy="457200"/>
+          </a:xfrm>
+          <a:prstGeom xmlns:a="http://schemas.openxmlformats.org/drawingml/2006/main" prst="roundRect">
+            <a:avLst>
+              <a:gd name="adj" fmla="val 16667"/>
+            </a:avLst>
+          </a:prstGeom>
+          <a:solidFill xmlns:a="http://schemas.openxmlformats.org/drawingml/2006/main">
+            <a:srgbClr val="06142E"/>
+          </a:solidFill>
+          <a:ln xmlns:a="http://schemas.openxmlformats.org/drawingml/2006/main" w="9525">
+            <a:solidFill>
+              <a:srgbClr val="1EC5FF">
+                <a:alpha val="33333"/>
+              </a:srgbClr>
+            </a:solidFill>
+            <a:prstDash val="solid"/>
+          </a:ln>
+        </p:spPr>
+      </p:sp>
+      <p:pic>
+        <p:nvPicPr>
+          <p:cNvPr id="29" name="" descr="Figura oficial da documentação dbt usada para explicar: O mesmo recurso afeta três decisões — 01."/>
+          <p:cNvPicPr>
+            <a:picLocks xmlns:a="http://schemas.openxmlformats.org/drawingml/2006/main" noChangeAspect="1"/>
+          </p:cNvPicPr>
+          <p:nvPr/>
+        </p:nvPicPr>
+        <p:blipFill>
+          <a:blip xmlns:r="http://schemas.openxmlformats.org/officeDocument/2006/relationships" xmlns:a="http://schemas.openxmlformats.org/drawingml/2006/main" r:embed="R408f55d9def94c40"/>
+          <a:stretch xmlns:a="http://schemas.openxmlformats.org/drawingml/2006/main"/>
+        </p:blipFill>
+        <p:spPr>
+          <a:xfrm xmlns:a="http://schemas.openxmlformats.org/drawingml/2006/main">
+            <a:off x="9893718" y="209550"/>
+            <a:ext cx="1491414" cy="323850"/>
+          </a:xfrm>
+          <a:prstGeom xmlns:a="http://schemas.openxmlformats.org/drawingml/2006/main" prst="rect">
+            <a:avLst/>
+          </a:prstGeom>
+        </p:spPr>
+      </p:pic>
+      <p:sp>
+        <p:nvSpPr>
+          <p:cNvPr id="13" name="footer-rule">
+            <a:extLst xmlns:a="http://schemas.openxmlformats.org/drawingml/2006/main">
+              <a:ext uri="{FF2B5EF4-FFF2-40B4-BE49-F238E27FC236}">
+                <a16:creationId xmlns:a16="http://schemas.microsoft.com/office/drawing/2014/main" id="{0ADB7650-7C9B-4FD7-8FE9-5D48B0749D20}"/>
               </a:ext>
             </a:extLst>
           </p:cNvPr>
@@ -7206,10 +7650,10 @@
       </p:sp>
       <p:sp>
         <p:nvSpPr>
-          <p:cNvPr id="12" name="footer">
-            <a:extLst xmlns:a="http://schemas.openxmlformats.org/drawingml/2006/main">
-              <a:ext uri="{FF2B5EF4-FFF2-40B4-BE49-F238E27FC236}">
-                <a16:creationId xmlns:a16="http://schemas.microsoft.com/office/drawing/2014/main" id="{8C4C5AA3-FA4F-43D8-902F-C1F89C5CBA42}"/>
+          <p:cNvPr id="14" name="footer">
+            <a:extLst xmlns:a="http://schemas.openxmlformats.org/drawingml/2006/main">
+              <a:ext uri="{FF2B5EF4-FFF2-40B4-BE49-F238E27FC236}">
+                <a16:creationId xmlns:a16="http://schemas.microsoft.com/office/drawing/2014/main" id="{5A3D3844-EEBE-4F0E-9CD9-C8F47AA5F9E5}"/>
               </a:ext>
             </a:extLst>
           </p:cNvPr>
@@ -7261,10 +7705,10 @@
       </p:sp>
       <p:sp>
         <p:nvSpPr>
-          <p:cNvPr id="13" name="page-number">
-            <a:extLst xmlns:a="http://schemas.openxmlformats.org/drawingml/2006/main">
-              <a:ext uri="{FF2B5EF4-FFF2-40B4-BE49-F238E27FC236}">
-                <a16:creationId xmlns:a16="http://schemas.microsoft.com/office/drawing/2014/main" id="{7295C621-80AA-4EFA-B880-6DCBF471A752}"/>
+          <p:cNvPr id="15" name="page-number">
+            <a:extLst xmlns:a="http://schemas.openxmlformats.org/drawingml/2006/main">
+              <a:ext uri="{FF2B5EF4-FFF2-40B4-BE49-F238E27FC236}">
+                <a16:creationId xmlns:a16="http://schemas.microsoft.com/office/drawing/2014/main" id="{2F696D5C-90B1-4F21-A118-2F3B6C58BD44}"/>
               </a:ext>
             </a:extLst>
           </p:cNvPr>
@@ -7317,7 +7761,7 @@
     </p:spTree>
     <p:extLst>
       <p:ext uri="{BB962C8B-B14F-4D97-AF65-F5344CB8AC3E}">
-        <p14:creationId xmlns:p14="http://schemas.microsoft.com/office/powerpoint/2010/main" val="891202829"/>
+        <p14:creationId xmlns:p14="http://schemas.microsoft.com/office/powerpoint/2010/main" val="213978125"/>
       </p:ext>
     </p:extLst>
   </p:cSld>
@@ -7353,10 +7797,10 @@
       </p:grpSpPr>
       <p:sp>
         <p:nvSpPr>
-          <p:cNvPr id="9" name="case-number">
-            <a:extLst xmlns:a="http://schemas.openxmlformats.org/drawingml/2006/main">
-              <a:ext uri="{FF2B5EF4-FFF2-40B4-BE49-F238E27FC236}">
-                <a16:creationId xmlns:a16="http://schemas.microsoft.com/office/drawing/2014/main" id="{D15E121E-BD04-473D-9020-10FBBF265C46}"/>
+          <p:cNvPr id="11" name="case-number">
+            <a:extLst xmlns:a="http://schemas.openxmlformats.org/drawingml/2006/main">
+              <a:ext uri="{FF2B5EF4-FFF2-40B4-BE49-F238E27FC236}">
+                <a16:creationId xmlns:a16="http://schemas.microsoft.com/office/drawing/2014/main" id="{DBA69183-DBC2-4D25-B099-DC1FC5E9E050}"/>
               </a:ext>
             </a:extLst>
           </p:cNvPr>
@@ -7407,7 +7851,7 @@
           <p:cNvPr id="2" name="case-label">
             <a:extLst xmlns:a="http://schemas.openxmlformats.org/drawingml/2006/main">
               <a:ext uri="{FF2B5EF4-FFF2-40B4-BE49-F238E27FC236}">
-                <a16:creationId xmlns:a16="http://schemas.microsoft.com/office/drawing/2014/main" id="{F2994A3A-EA81-4BF2-A165-1EDD5771D861}"/>
+                <a16:creationId xmlns:a16="http://schemas.microsoft.com/office/drawing/2014/main" id="{11A30089-ACBA-4452-A645-59E3F1852104}"/>
               </a:ext>
             </a:extLst>
           </p:cNvPr>
@@ -7458,7 +7902,7 @@
           <p:cNvPr id="3" name="case-divider">
             <a:extLst xmlns:a="http://schemas.openxmlformats.org/drawingml/2006/main">
               <a:ext uri="{FF2B5EF4-FFF2-40B4-BE49-F238E27FC236}">
-                <a16:creationId xmlns:a16="http://schemas.microsoft.com/office/drawing/2014/main" id="{D3B5B3AC-2D1D-4054-8BC0-1F6B0BF05929}"/>
+                <a16:creationId xmlns:a16="http://schemas.microsoft.com/office/drawing/2014/main" id="{F2E4B37E-E199-49A2-80AA-3D6749E3A8D5}"/>
               </a:ext>
             </a:extLst>
           </p:cNvPr>
@@ -7491,7 +7935,7 @@
           <p:cNvPr id="4" name="case-caveat">
             <a:extLst xmlns:a="http://schemas.openxmlformats.org/drawingml/2006/main">
               <a:ext uri="{FF2B5EF4-FFF2-40B4-BE49-F238E27FC236}">
-                <a16:creationId xmlns:a16="http://schemas.microsoft.com/office/drawing/2014/main" id="{C6618745-CE7C-4112-9C29-66591FABFD5D}"/>
+                <a16:creationId xmlns:a16="http://schemas.microsoft.com/office/drawing/2014/main" id="{9672654E-5EC4-42E9-BA02-4D9DD3AE2F73}"/>
               </a:ext>
             </a:extLst>
           </p:cNvPr>
@@ -7542,7 +7986,7 @@
           <p:cNvPr id="5" name="eyebrow">
             <a:extLst xmlns:a="http://schemas.openxmlformats.org/drawingml/2006/main">
               <a:ext uri="{FF2B5EF4-FFF2-40B4-BE49-F238E27FC236}">
-                <a16:creationId xmlns:a16="http://schemas.microsoft.com/office/drawing/2014/main" id="{B6C9B22D-0A61-4B9F-BDF5-32A99E78074D}"/>
+                <a16:creationId xmlns:a16="http://schemas.microsoft.com/office/drawing/2014/main" id="{C47F44EC-7BD4-4927-8CB6-AD918C395803}"/>
               </a:ext>
             </a:extLst>
           </p:cNvPr>
@@ -7590,10 +8034,69 @@
       </p:sp>
       <p:sp>
         <p:nvSpPr>
-          <p:cNvPr id="6" name="footer-rule">
-            <a:extLst xmlns:a="http://schemas.openxmlformats.org/drawingml/2006/main">
-              <a:ext uri="{FF2B5EF4-FFF2-40B4-BE49-F238E27FC236}">
-                <a16:creationId xmlns:a16="http://schemas.microsoft.com/office/drawing/2014/main" id="{1945D55C-5D50-46C8-AAE0-E8D45809070C}"/>
+          <p:cNvPr id="6" name="rescue-point-logo-background">
+            <a:extLst xmlns:a="http://schemas.openxmlformats.org/drawingml/2006/main">
+              <a:ext uri="{FF2B5EF4-FFF2-40B4-BE49-F238E27FC236}">
+                <a16:creationId xmlns:a16="http://schemas.microsoft.com/office/drawing/2014/main" id="{A6F8A087-E9F1-40E2-92BB-BE923CB201AB}"/>
+              </a:ext>
+            </a:extLst>
+          </p:cNvPr>
+          <p:cNvSpPr>
+            <a:spLocks xmlns:a="http://schemas.openxmlformats.org/drawingml/2006/main" noGrp="1"/>
+          </p:cNvSpPr>
+          <p:nvPr/>
+        </p:nvSpPr>
+        <p:spPr>
+          <a:xfrm xmlns:a="http://schemas.openxmlformats.org/drawingml/2006/main">
+            <a:off x="9772650" y="133350"/>
+            <a:ext cx="1733550" cy="457200"/>
+          </a:xfrm>
+          <a:prstGeom xmlns:a="http://schemas.openxmlformats.org/drawingml/2006/main" prst="roundRect">
+            <a:avLst>
+              <a:gd name="adj" fmla="val 16667"/>
+            </a:avLst>
+          </a:prstGeom>
+          <a:solidFill xmlns:a="http://schemas.openxmlformats.org/drawingml/2006/main">
+            <a:srgbClr val="06142E"/>
+          </a:solidFill>
+          <a:ln xmlns:a="http://schemas.openxmlformats.org/drawingml/2006/main" w="9525">
+            <a:solidFill>
+              <a:srgbClr val="1EC5FF">
+                <a:alpha val="33333"/>
+              </a:srgbClr>
+            </a:solidFill>
+            <a:prstDash val="solid"/>
+          </a:ln>
+        </p:spPr>
+      </p:sp>
+      <p:pic>
+        <p:nvPicPr>
+          <p:cNvPr id="19" name="" descr="Figura oficial da documentação dbt usada para explicar: 10 domínios — padrão anonimizado do projeto privado."/>
+          <p:cNvPicPr>
+            <a:picLocks xmlns:a="http://schemas.openxmlformats.org/drawingml/2006/main" noChangeAspect="1"/>
+          </p:cNvPicPr>
+          <p:nvPr/>
+        </p:nvPicPr>
+        <p:blipFill>
+          <a:blip xmlns:r="http://schemas.openxmlformats.org/officeDocument/2006/relationships" xmlns:a="http://schemas.openxmlformats.org/drawingml/2006/main" r:embed="Rd9d293fefd5e4b71"/>
+          <a:stretch xmlns:a="http://schemas.openxmlformats.org/drawingml/2006/main"/>
+        </p:blipFill>
+        <p:spPr>
+          <a:xfrm xmlns:a="http://schemas.openxmlformats.org/drawingml/2006/main">
+            <a:off x="9893718" y="209550"/>
+            <a:ext cx="1491414" cy="323850"/>
+          </a:xfrm>
+          <a:prstGeom xmlns:a="http://schemas.openxmlformats.org/drawingml/2006/main" prst="rect">
+            <a:avLst/>
+          </a:prstGeom>
+        </p:spPr>
+      </p:pic>
+      <p:sp>
+        <p:nvSpPr>
+          <p:cNvPr id="8" name="footer-rule">
+            <a:extLst xmlns:a="http://schemas.openxmlformats.org/drawingml/2006/main">
+              <a:ext uri="{FF2B5EF4-FFF2-40B4-BE49-F238E27FC236}">
+                <a16:creationId xmlns:a16="http://schemas.microsoft.com/office/drawing/2014/main" id="{98034C8C-62BA-40D2-AA95-720E31E09987}"/>
               </a:ext>
             </a:extLst>
           </p:cNvPr>
@@ -7623,10 +8126,10 @@
       </p:sp>
       <p:sp>
         <p:nvSpPr>
-          <p:cNvPr id="7" name="footer">
-            <a:extLst xmlns:a="http://schemas.openxmlformats.org/drawingml/2006/main">
-              <a:ext uri="{FF2B5EF4-FFF2-40B4-BE49-F238E27FC236}">
-                <a16:creationId xmlns:a16="http://schemas.microsoft.com/office/drawing/2014/main" id="{16D44ABC-594D-4B28-9691-0E1B4A6D4681}"/>
+          <p:cNvPr id="9" name="footer">
+            <a:extLst xmlns:a="http://schemas.openxmlformats.org/drawingml/2006/main">
+              <a:ext uri="{FF2B5EF4-FFF2-40B4-BE49-F238E27FC236}">
+                <a16:creationId xmlns:a16="http://schemas.microsoft.com/office/drawing/2014/main" id="{BDDF580F-DF32-40FA-B3A7-57B1C1B9E989}"/>
               </a:ext>
             </a:extLst>
           </p:cNvPr>
@@ -7678,10 +8181,10 @@
       </p:sp>
       <p:sp>
         <p:nvSpPr>
-          <p:cNvPr id="8" name="page-number">
-            <a:extLst xmlns:a="http://schemas.openxmlformats.org/drawingml/2006/main">
-              <a:ext uri="{FF2B5EF4-FFF2-40B4-BE49-F238E27FC236}">
-                <a16:creationId xmlns:a16="http://schemas.microsoft.com/office/drawing/2014/main" id="{05ACA0A5-BC9B-4C77-BA6F-77E9D99AC9D6}"/>
+          <p:cNvPr id="10" name="page-number">
+            <a:extLst xmlns:a="http://schemas.openxmlformats.org/drawingml/2006/main">
+              <a:ext uri="{FF2B5EF4-FFF2-40B4-BE49-F238E27FC236}">
+                <a16:creationId xmlns:a16="http://schemas.microsoft.com/office/drawing/2014/main" id="{1996B8A9-FF55-47C8-B829-854079CB11BE}"/>
               </a:ext>
             </a:extLst>
           </p:cNvPr>
@@ -7734,7 +8237,7 @@
     </p:spTree>
     <p:extLst>
       <p:ext uri="{BB962C8B-B14F-4D97-AF65-F5344CB8AC3E}">
-        <p14:creationId xmlns:p14="http://schemas.microsoft.com/office/powerpoint/2010/main" val="611422871"/>
+        <p14:creationId xmlns:p14="http://schemas.microsoft.com/office/powerpoint/2010/main" val="825361450"/>
       </p:ext>
     </p:extLst>
   </p:cSld>
@@ -7762,10 +8265,10 @@
       </p:grpSpPr>
       <p:sp>
         <p:nvSpPr>
-          <p:cNvPr id="7" name="slide-title">
-            <a:extLst xmlns:a="http://schemas.openxmlformats.org/drawingml/2006/main">
-              <a:ext uri="{FF2B5EF4-FFF2-40B4-BE49-F238E27FC236}">
-                <a16:creationId xmlns:a16="http://schemas.microsoft.com/office/drawing/2014/main" id="{4C8D2DC2-7FE4-4585-A027-B5B9C04F7CAE}"/>
+          <p:cNvPr id="9" name="slide-title">
+            <a:extLst xmlns:a="http://schemas.openxmlformats.org/drawingml/2006/main">
+              <a:ext uri="{FF2B5EF4-FFF2-40B4-BE49-F238E27FC236}">
+                <a16:creationId xmlns:a16="http://schemas.microsoft.com/office/drawing/2014/main" id="{17AEA53E-3EA4-4FE7-A3A4-6AAB645C2FBC}"/>
               </a:ext>
             </a:extLst>
           </p:cNvPr>
@@ -7816,7 +8319,7 @@
           <p:cNvPr id="2" name="bullets">
             <a:extLst xmlns:a="http://schemas.openxmlformats.org/drawingml/2006/main">
               <a:ext uri="{FF2B5EF4-FFF2-40B4-BE49-F238E27FC236}">
-                <a16:creationId xmlns:a16="http://schemas.microsoft.com/office/drawing/2014/main" id="{761E274D-47E3-48CE-8AAB-DE91E977A225}"/>
+                <a16:creationId xmlns:a16="http://schemas.microsoft.com/office/drawing/2014/main" id="{DD717D73-959E-43B8-A7C4-78DBA420B98A}"/>
               </a:ext>
             </a:extLst>
           </p:cNvPr>
@@ -7903,7 +8406,7 @@
           <p:cNvPr id="3" name="eyebrow">
             <a:extLst xmlns:a="http://schemas.openxmlformats.org/drawingml/2006/main">
               <a:ext uri="{FF2B5EF4-FFF2-40B4-BE49-F238E27FC236}">
-                <a16:creationId xmlns:a16="http://schemas.microsoft.com/office/drawing/2014/main" id="{D10CAFC4-50EF-4C1B-9CF2-1180D537BD63}"/>
+                <a16:creationId xmlns:a16="http://schemas.microsoft.com/office/drawing/2014/main" id="{B5F15331-C05F-4CF9-9F95-5515C7527249}"/>
               </a:ext>
             </a:extLst>
           </p:cNvPr>
@@ -7951,10 +8454,69 @@
       </p:sp>
       <p:sp>
         <p:nvSpPr>
-          <p:cNvPr id="4" name="footer-rule">
-            <a:extLst xmlns:a="http://schemas.openxmlformats.org/drawingml/2006/main">
-              <a:ext uri="{FF2B5EF4-FFF2-40B4-BE49-F238E27FC236}">
-                <a16:creationId xmlns:a16="http://schemas.microsoft.com/office/drawing/2014/main" id="{15925FB6-6126-4A55-9A3D-857A61F42D9C}"/>
+          <p:cNvPr id="4" name="rescue-point-logo-background">
+            <a:extLst xmlns:a="http://schemas.openxmlformats.org/drawingml/2006/main">
+              <a:ext uri="{FF2B5EF4-FFF2-40B4-BE49-F238E27FC236}">
+                <a16:creationId xmlns:a16="http://schemas.microsoft.com/office/drawing/2014/main" id="{12F3769E-4D98-4F32-BE66-25AF8AE4DCCC}"/>
+              </a:ext>
+            </a:extLst>
+          </p:cNvPr>
+          <p:cNvSpPr>
+            <a:spLocks xmlns:a="http://schemas.openxmlformats.org/drawingml/2006/main" noGrp="1"/>
+          </p:cNvSpPr>
+          <p:nvPr/>
+        </p:nvSpPr>
+        <p:spPr>
+          <a:xfrm xmlns:a="http://schemas.openxmlformats.org/drawingml/2006/main">
+            <a:off x="9772650" y="133350"/>
+            <a:ext cx="1733550" cy="457200"/>
+          </a:xfrm>
+          <a:prstGeom xmlns:a="http://schemas.openxmlformats.org/drawingml/2006/main" prst="roundRect">
+            <a:avLst>
+              <a:gd name="adj" fmla="val 16667"/>
+            </a:avLst>
+          </a:prstGeom>
+          <a:solidFill xmlns:a="http://schemas.openxmlformats.org/drawingml/2006/main">
+            <a:srgbClr val="06142E"/>
+          </a:solidFill>
+          <a:ln xmlns:a="http://schemas.openxmlformats.org/drawingml/2006/main" w="9525">
+            <a:solidFill>
+              <a:srgbClr val="1EC5FF">
+                <a:alpha val="33333"/>
+              </a:srgbClr>
+            </a:solidFill>
+            <a:prstDash val="solid"/>
+          </a:ln>
+        </p:spPr>
+      </p:sp>
+      <p:pic>
+        <p:nvPicPr>
+          <p:cNvPr id="15" name="" descr="Figura oficial da documentação dbt usada para explicar: Limitações que precisam permanecer visíveis — • Multi-project aumenta coordenação."/>
+          <p:cNvPicPr>
+            <a:picLocks xmlns:a="http://schemas.openxmlformats.org/drawingml/2006/main" noChangeAspect="1"/>
+          </p:cNvPicPr>
+          <p:nvPr/>
+        </p:nvPicPr>
+        <p:blipFill>
+          <a:blip xmlns:r="http://schemas.openxmlformats.org/officeDocument/2006/relationships" xmlns:a="http://schemas.openxmlformats.org/drawingml/2006/main" r:embed="R73bea53c6bc040f3"/>
+          <a:stretch xmlns:a="http://schemas.openxmlformats.org/drawingml/2006/main"/>
+        </p:blipFill>
+        <p:spPr>
+          <a:xfrm xmlns:a="http://schemas.openxmlformats.org/drawingml/2006/main">
+            <a:off x="9893718" y="209550"/>
+            <a:ext cx="1491414" cy="323850"/>
+          </a:xfrm>
+          <a:prstGeom xmlns:a="http://schemas.openxmlformats.org/drawingml/2006/main" prst="rect">
+            <a:avLst/>
+          </a:prstGeom>
+        </p:spPr>
+      </p:pic>
+      <p:sp>
+        <p:nvSpPr>
+          <p:cNvPr id="6" name="footer-rule">
+            <a:extLst xmlns:a="http://schemas.openxmlformats.org/drawingml/2006/main">
+              <a:ext uri="{FF2B5EF4-FFF2-40B4-BE49-F238E27FC236}">
+                <a16:creationId xmlns:a16="http://schemas.microsoft.com/office/drawing/2014/main" id="{06F9EC86-5439-431C-B77D-0BC00F818465}"/>
               </a:ext>
             </a:extLst>
           </p:cNvPr>
@@ -7984,10 +8546,10 @@
       </p:sp>
       <p:sp>
         <p:nvSpPr>
-          <p:cNvPr id="5" name="footer">
-            <a:extLst xmlns:a="http://schemas.openxmlformats.org/drawingml/2006/main">
-              <a:ext uri="{FF2B5EF4-FFF2-40B4-BE49-F238E27FC236}">
-                <a16:creationId xmlns:a16="http://schemas.microsoft.com/office/drawing/2014/main" id="{3D906FE1-8915-4F3D-B637-59D96864ACC7}"/>
+          <p:cNvPr id="7" name="footer">
+            <a:extLst xmlns:a="http://schemas.openxmlformats.org/drawingml/2006/main">
+              <a:ext uri="{FF2B5EF4-FFF2-40B4-BE49-F238E27FC236}">
+                <a16:creationId xmlns:a16="http://schemas.microsoft.com/office/drawing/2014/main" id="{4126F268-54C8-47F0-B402-D74DFB084A2D}"/>
               </a:ext>
             </a:extLst>
           </p:cNvPr>
@@ -8039,10 +8601,10 @@
       </p:sp>
       <p:sp>
         <p:nvSpPr>
-          <p:cNvPr id="6" name="page-number">
-            <a:extLst xmlns:a="http://schemas.openxmlformats.org/drawingml/2006/main">
-              <a:ext uri="{FF2B5EF4-FFF2-40B4-BE49-F238E27FC236}">
-                <a16:creationId xmlns:a16="http://schemas.microsoft.com/office/drawing/2014/main" id="{841FCF13-D0FF-4D58-BFB8-6E1E5E2CF01A}"/>
+          <p:cNvPr id="8" name="page-number">
+            <a:extLst xmlns:a="http://schemas.openxmlformats.org/drawingml/2006/main">
+              <a:ext uri="{FF2B5EF4-FFF2-40B4-BE49-F238E27FC236}">
+                <a16:creationId xmlns:a16="http://schemas.microsoft.com/office/drawing/2014/main" id="{6A9132EA-C889-49DB-8B15-529CBB4E2DFF}"/>
               </a:ext>
             </a:extLst>
           </p:cNvPr>
@@ -8095,7 +8657,7 @@
     </p:spTree>
     <p:extLst>
       <p:ext uri="{BB962C8B-B14F-4D97-AF65-F5344CB8AC3E}">
-        <p14:creationId xmlns:p14="http://schemas.microsoft.com/office/powerpoint/2010/main" val="1617329377"/>
+        <p14:creationId xmlns:p14="http://schemas.microsoft.com/office/powerpoint/2010/main" val="774365223"/>
       </p:ext>
     </p:extLst>
   </p:cSld>
@@ -8131,10 +8693,10 @@
       </p:grpSpPr>
       <p:sp>
         <p:nvSpPr>
-          <p:cNvPr id="10" name="radar-label">
-            <a:extLst xmlns:a="http://schemas.openxmlformats.org/drawingml/2006/main">
-              <a:ext uri="{FF2B5EF4-FFF2-40B4-BE49-F238E27FC236}">
-                <a16:creationId xmlns:a16="http://schemas.microsoft.com/office/drawing/2014/main" id="{5AE30912-6846-4AC9-9C28-C8EE6282EA1E}"/>
+          <p:cNvPr id="12" name="radar-label">
+            <a:extLst xmlns:a="http://schemas.openxmlformats.org/drawingml/2006/main">
+              <a:ext uri="{FF2B5EF4-FFF2-40B4-BE49-F238E27FC236}">
+                <a16:creationId xmlns:a16="http://schemas.microsoft.com/office/drawing/2014/main" id="{0B711335-94C2-4C41-BE0E-0218302567EF}"/>
               </a:ext>
             </a:extLst>
           </p:cNvPr>
@@ -8185,7 +8747,7 @@
           <p:cNvPr id="2" name="radar-text">
             <a:extLst xmlns:a="http://schemas.openxmlformats.org/drawingml/2006/main">
               <a:ext uri="{FF2B5EF4-FFF2-40B4-BE49-F238E27FC236}">
-                <a16:creationId xmlns:a16="http://schemas.microsoft.com/office/drawing/2014/main" id="{B02A62CD-4B20-4BDF-B2B6-544D280C439C}"/>
+                <a16:creationId xmlns:a16="http://schemas.microsoft.com/office/drawing/2014/main" id="{4CCDC34B-22D5-4B5E-9DE1-AB8D6287D8D8}"/>
               </a:ext>
             </a:extLst>
           </p:cNvPr>
@@ -8236,7 +8798,7 @@
           <p:cNvPr id="3" name="radar-rule">
             <a:extLst xmlns:a="http://schemas.openxmlformats.org/drawingml/2006/main">
               <a:ext uri="{FF2B5EF4-FFF2-40B4-BE49-F238E27FC236}">
-                <a16:creationId xmlns:a16="http://schemas.microsoft.com/office/drawing/2014/main" id="{AE8686A8-94D7-41F9-B421-C9EB5938536E}"/>
+                <a16:creationId xmlns:a16="http://schemas.microsoft.com/office/drawing/2014/main" id="{8BB52B4B-A880-4B55-91FE-2A8DCFDE3EB0}"/>
               </a:ext>
             </a:extLst>
           </p:cNvPr>
@@ -8287,7 +8849,7 @@
           <p:cNvPr id="4" name="ambient-glow">
             <a:extLst xmlns:a="http://schemas.openxmlformats.org/drawingml/2006/main">
               <a:ext uri="{FF2B5EF4-FFF2-40B4-BE49-F238E27FC236}">
-                <a16:creationId xmlns:a16="http://schemas.microsoft.com/office/drawing/2014/main" id="{9AB511C4-AA5E-4837-A940-D1F436AA0755}"/>
+                <a16:creationId xmlns:a16="http://schemas.microsoft.com/office/drawing/2014/main" id="{9C6C2A35-7319-4D04-B576-52BDBF5B5781}"/>
               </a:ext>
             </a:extLst>
           </p:cNvPr>
@@ -8324,7 +8886,7 @@
           <p:cNvPr id="5" name="ambient-core">
             <a:extLst xmlns:a="http://schemas.openxmlformats.org/drawingml/2006/main">
               <a:ext uri="{FF2B5EF4-FFF2-40B4-BE49-F238E27FC236}">
-                <a16:creationId xmlns:a16="http://schemas.microsoft.com/office/drawing/2014/main" id="{A00FD71A-DD02-4811-8F7C-B3658D57BBFD}"/>
+                <a16:creationId xmlns:a16="http://schemas.microsoft.com/office/drawing/2014/main" id="{1DEBAAD3-4446-49FB-9FBC-A6BFD1DD0021}"/>
               </a:ext>
             </a:extLst>
           </p:cNvPr>
@@ -8361,7 +8923,7 @@
           <p:cNvPr id="6" name="eyebrow">
             <a:extLst xmlns:a="http://schemas.openxmlformats.org/drawingml/2006/main">
               <a:ext uri="{FF2B5EF4-FFF2-40B4-BE49-F238E27FC236}">
-                <a16:creationId xmlns:a16="http://schemas.microsoft.com/office/drawing/2014/main" id="{C9620C13-0FFF-42F9-8BB2-B96B28A64F50}"/>
+                <a16:creationId xmlns:a16="http://schemas.microsoft.com/office/drawing/2014/main" id="{3F8F2228-9268-46A8-AFF8-7C3027E80868}"/>
               </a:ext>
             </a:extLst>
           </p:cNvPr>
@@ -8409,10 +8971,69 @@
       </p:sp>
       <p:sp>
         <p:nvSpPr>
-          <p:cNvPr id="7" name="footer-rule">
-            <a:extLst xmlns:a="http://schemas.openxmlformats.org/drawingml/2006/main">
-              <a:ext uri="{FF2B5EF4-FFF2-40B4-BE49-F238E27FC236}">
-                <a16:creationId xmlns:a16="http://schemas.microsoft.com/office/drawing/2014/main" id="{FF00451A-83FE-4521-943D-DCF74562D125}"/>
+          <p:cNvPr id="7" name="rescue-point-logo-background">
+            <a:extLst xmlns:a="http://schemas.openxmlformats.org/drawingml/2006/main">
+              <a:ext uri="{FF2B5EF4-FFF2-40B4-BE49-F238E27FC236}">
+                <a16:creationId xmlns:a16="http://schemas.microsoft.com/office/drawing/2014/main" id="{BEE85AF7-CDAD-4450-BAF3-B81E65E62820}"/>
+              </a:ext>
+            </a:extLst>
+          </p:cNvPr>
+          <p:cNvSpPr>
+            <a:spLocks xmlns:a="http://schemas.openxmlformats.org/drawingml/2006/main" noGrp="1"/>
+          </p:cNvSpPr>
+          <p:nvPr/>
+        </p:nvSpPr>
+        <p:spPr>
+          <a:xfrm xmlns:a="http://schemas.openxmlformats.org/drawingml/2006/main">
+            <a:off x="9772650" y="133350"/>
+            <a:ext cx="1733550" cy="457200"/>
+          </a:xfrm>
+          <a:prstGeom xmlns:a="http://schemas.openxmlformats.org/drawingml/2006/main" prst="roundRect">
+            <a:avLst>
+              <a:gd name="adj" fmla="val 16667"/>
+            </a:avLst>
+          </a:prstGeom>
+          <a:solidFill xmlns:a="http://schemas.openxmlformats.org/drawingml/2006/main">
+            <a:srgbClr val="06142E"/>
+          </a:solidFill>
+          <a:ln xmlns:a="http://schemas.openxmlformats.org/drawingml/2006/main" w="9525">
+            <a:solidFill>
+              <a:srgbClr val="1EC5FF">
+                <a:alpha val="33333"/>
+              </a:srgbClr>
+            </a:solidFill>
+            <a:prstDash val="solid"/>
+          </a:ln>
+        </p:spPr>
+      </p:sp>
+      <p:pic>
+        <p:nvPicPr>
+          <p:cNvPr id="21" name="" descr="Figura oficial da documentação dbt usada para explicar: RADAR — Mesh Enterprise entra somente quando dependência organizacional justificar o custo.."/>
+          <p:cNvPicPr>
+            <a:picLocks xmlns:a="http://schemas.openxmlformats.org/drawingml/2006/main" noChangeAspect="1"/>
+          </p:cNvPicPr>
+          <p:nvPr/>
+        </p:nvPicPr>
+        <p:blipFill>
+          <a:blip xmlns:r="http://schemas.openxmlformats.org/officeDocument/2006/relationships" xmlns:a="http://schemas.openxmlformats.org/drawingml/2006/main" r:embed="R26ba6610f2b44d1e"/>
+          <a:stretch xmlns:a="http://schemas.openxmlformats.org/drawingml/2006/main"/>
+        </p:blipFill>
+        <p:spPr>
+          <a:xfrm xmlns:a="http://schemas.openxmlformats.org/drawingml/2006/main">
+            <a:off x="9893718" y="209550"/>
+            <a:ext cx="1491414" cy="323850"/>
+          </a:xfrm>
+          <a:prstGeom xmlns:a="http://schemas.openxmlformats.org/drawingml/2006/main" prst="rect">
+            <a:avLst/>
+          </a:prstGeom>
+        </p:spPr>
+      </p:pic>
+      <p:sp>
+        <p:nvSpPr>
+          <p:cNvPr id="9" name="footer-rule">
+            <a:extLst xmlns:a="http://schemas.openxmlformats.org/drawingml/2006/main">
+              <a:ext uri="{FF2B5EF4-FFF2-40B4-BE49-F238E27FC236}">
+                <a16:creationId xmlns:a16="http://schemas.microsoft.com/office/drawing/2014/main" id="{85C93DA1-9876-4E79-9F69-17AF355FD212}"/>
               </a:ext>
             </a:extLst>
           </p:cNvPr>
@@ -8442,10 +9063,10 @@
       </p:sp>
       <p:sp>
         <p:nvSpPr>
-          <p:cNvPr id="8" name="footer">
-            <a:extLst xmlns:a="http://schemas.openxmlformats.org/drawingml/2006/main">
-              <a:ext uri="{FF2B5EF4-FFF2-40B4-BE49-F238E27FC236}">
-                <a16:creationId xmlns:a16="http://schemas.microsoft.com/office/drawing/2014/main" id="{12692112-2BFF-4DA9-B96B-7BA214946592}"/>
+          <p:cNvPr id="10" name="footer">
+            <a:extLst xmlns:a="http://schemas.openxmlformats.org/drawingml/2006/main">
+              <a:ext uri="{FF2B5EF4-FFF2-40B4-BE49-F238E27FC236}">
+                <a16:creationId xmlns:a16="http://schemas.microsoft.com/office/drawing/2014/main" id="{6430F662-9DF7-45B4-97DF-EB710A39BC34}"/>
               </a:ext>
             </a:extLst>
           </p:cNvPr>
@@ -8497,10 +9118,10 @@
       </p:sp>
       <p:sp>
         <p:nvSpPr>
-          <p:cNvPr id="9" name="page-number">
-            <a:extLst xmlns:a="http://schemas.openxmlformats.org/drawingml/2006/main">
-              <a:ext uri="{FF2B5EF4-FFF2-40B4-BE49-F238E27FC236}">
-                <a16:creationId xmlns:a16="http://schemas.microsoft.com/office/drawing/2014/main" id="{8E1511C9-3A7F-4A69-A1D6-FD3FD0F22461}"/>
+          <p:cNvPr id="11" name="page-number">
+            <a:extLst xmlns:a="http://schemas.openxmlformats.org/drawingml/2006/main">
+              <a:ext uri="{FF2B5EF4-FFF2-40B4-BE49-F238E27FC236}">
+                <a16:creationId xmlns:a16="http://schemas.microsoft.com/office/drawing/2014/main" id="{02B7BD65-1EA6-499D-B3B0-D91C63C68B19}"/>
               </a:ext>
             </a:extLst>
           </p:cNvPr>
@@ -8553,7 +9174,7 @@
     </p:spTree>
     <p:extLst>
       <p:ext uri="{BB962C8B-B14F-4D97-AF65-F5344CB8AC3E}">
-        <p14:creationId xmlns:p14="http://schemas.microsoft.com/office/powerpoint/2010/main" val="826655722"/>
+        <p14:creationId xmlns:p14="http://schemas.microsoft.com/office/powerpoint/2010/main" val="1575992197"/>
       </p:ext>
     </p:extLst>
   </p:cSld>
@@ -8581,10 +9202,10 @@
       </p:grpSpPr>
       <p:sp>
         <p:nvSpPr>
-          <p:cNvPr id="8" name="cta-label">
-            <a:extLst xmlns:a="http://schemas.openxmlformats.org/drawingml/2006/main">
-              <a:ext uri="{FF2B5EF4-FFF2-40B4-BE49-F238E27FC236}">
-                <a16:creationId xmlns:a16="http://schemas.microsoft.com/office/drawing/2014/main" id="{9ACC3704-C091-473C-A18E-A566AEF2F8FF}"/>
+          <p:cNvPr id="10" name="cta-label">
+            <a:extLst xmlns:a="http://schemas.openxmlformats.org/drawingml/2006/main">
+              <a:ext uri="{FF2B5EF4-FFF2-40B4-BE49-F238E27FC236}">
+                <a16:creationId xmlns:a16="http://schemas.microsoft.com/office/drawing/2014/main" id="{359717EA-B82F-4A5E-888C-D06B58F965D6}"/>
               </a:ext>
             </a:extLst>
           </p:cNvPr>
@@ -8635,7 +9256,7 @@
           <p:cNvPr id="2" name="cta">
             <a:extLst xmlns:a="http://schemas.openxmlformats.org/drawingml/2006/main">
               <a:ext uri="{FF2B5EF4-FFF2-40B4-BE49-F238E27FC236}">
-                <a16:creationId xmlns:a16="http://schemas.microsoft.com/office/drawing/2014/main" id="{BBC4F130-94C6-4C0C-AD21-D1230FC3D06D}"/>
+                <a16:creationId xmlns:a16="http://schemas.microsoft.com/office/drawing/2014/main" id="{CFE5E014-F0EE-485A-BBF1-168C22C82C96}"/>
               </a:ext>
             </a:extLst>
           </p:cNvPr>
@@ -8686,7 +9307,7 @@
           <p:cNvPr id="3" name="cta-meta">
             <a:extLst xmlns:a="http://schemas.openxmlformats.org/drawingml/2006/main">
               <a:ext uri="{FF2B5EF4-FFF2-40B4-BE49-F238E27FC236}">
-                <a16:creationId xmlns:a16="http://schemas.microsoft.com/office/drawing/2014/main" id="{A7217254-7250-4C25-B706-472650F95F25}"/>
+                <a16:creationId xmlns:a16="http://schemas.microsoft.com/office/drawing/2014/main" id="{71F8DA2B-89FB-422E-AB63-F56E0C4F8C84}"/>
               </a:ext>
             </a:extLst>
           </p:cNvPr>
@@ -8737,7 +9358,7 @@
           <p:cNvPr id="4" name="eyebrow">
             <a:extLst xmlns:a="http://schemas.openxmlformats.org/drawingml/2006/main">
               <a:ext uri="{FF2B5EF4-FFF2-40B4-BE49-F238E27FC236}">
-                <a16:creationId xmlns:a16="http://schemas.microsoft.com/office/drawing/2014/main" id="{0EE6F9AE-BF35-4CFC-96C3-69AB9C814481}"/>
+                <a16:creationId xmlns:a16="http://schemas.microsoft.com/office/drawing/2014/main" id="{10755A7E-D567-45AC-952D-530D9014626E}"/>
               </a:ext>
             </a:extLst>
           </p:cNvPr>
@@ -8785,10 +9406,69 @@
       </p:sp>
       <p:sp>
         <p:nvSpPr>
-          <p:cNvPr id="5" name="footer-rule">
-            <a:extLst xmlns:a="http://schemas.openxmlformats.org/drawingml/2006/main">
-              <a:ext uri="{FF2B5EF4-FFF2-40B4-BE49-F238E27FC236}">
-                <a16:creationId xmlns:a16="http://schemas.microsoft.com/office/drawing/2014/main" id="{AF44DB3F-B0E3-44C8-8525-11F36AE8C76D}"/>
+          <p:cNvPr id="5" name="rescue-point-logo-background">
+            <a:extLst xmlns:a="http://schemas.openxmlformats.org/drawingml/2006/main">
+              <a:ext uri="{FF2B5EF4-FFF2-40B4-BE49-F238E27FC236}">
+                <a16:creationId xmlns:a16="http://schemas.microsoft.com/office/drawing/2014/main" id="{F278789F-EC92-4A97-A470-BCD5F84F0903}"/>
+              </a:ext>
+            </a:extLst>
+          </p:cNvPr>
+          <p:cNvSpPr>
+            <a:spLocks xmlns:a="http://schemas.openxmlformats.org/drawingml/2006/main" noGrp="1"/>
+          </p:cNvSpPr>
+          <p:nvPr/>
+        </p:nvSpPr>
+        <p:spPr>
+          <a:xfrm xmlns:a="http://schemas.openxmlformats.org/drawingml/2006/main">
+            <a:off x="9772650" y="133350"/>
+            <a:ext cx="1733550" cy="457200"/>
+          </a:xfrm>
+          <a:prstGeom xmlns:a="http://schemas.openxmlformats.org/drawingml/2006/main" prst="roundRect">
+            <a:avLst>
+              <a:gd name="adj" fmla="val 16667"/>
+            </a:avLst>
+          </a:prstGeom>
+          <a:solidFill xmlns:a="http://schemas.openxmlformats.org/drawingml/2006/main">
+            <a:srgbClr val="06142E"/>
+          </a:solidFill>
+          <a:ln xmlns:a="http://schemas.openxmlformats.org/drawingml/2006/main" w="9525">
+            <a:solidFill>
+              <a:srgbClr val="1EC5FF">
+                <a:alpha val="33333"/>
+              </a:srgbClr>
+            </a:solidFill>
+            <a:prstDash val="solid"/>
+          </a:ln>
+        </p:spPr>
+      </p:sp>
+      <p:pic>
+        <p:nvPicPr>
+          <p:cNvPr id="17" name="" descr="Figura oficial da documentação dbt usada para explicar: PRÓXIMO PASSO — Defina um domínio, sua interface pública e duas dependências proibidas.."/>
+          <p:cNvPicPr>
+            <a:picLocks xmlns:a="http://schemas.openxmlformats.org/drawingml/2006/main" noChangeAspect="1"/>
+          </p:cNvPicPr>
+          <p:nvPr/>
+        </p:nvPicPr>
+        <p:blipFill>
+          <a:blip xmlns:r="http://schemas.openxmlformats.org/officeDocument/2006/relationships" xmlns:a="http://schemas.openxmlformats.org/drawingml/2006/main" r:embed="R0c4cd7916025431b"/>
+          <a:stretch xmlns:a="http://schemas.openxmlformats.org/drawingml/2006/main"/>
+        </p:blipFill>
+        <p:spPr>
+          <a:xfrm xmlns:a="http://schemas.openxmlformats.org/drawingml/2006/main">
+            <a:off x="9893718" y="209550"/>
+            <a:ext cx="1491414" cy="323850"/>
+          </a:xfrm>
+          <a:prstGeom xmlns:a="http://schemas.openxmlformats.org/drawingml/2006/main" prst="rect">
+            <a:avLst/>
+          </a:prstGeom>
+        </p:spPr>
+      </p:pic>
+      <p:sp>
+        <p:nvSpPr>
+          <p:cNvPr id="7" name="footer-rule">
+            <a:extLst xmlns:a="http://schemas.openxmlformats.org/drawingml/2006/main">
+              <a:ext uri="{FF2B5EF4-FFF2-40B4-BE49-F238E27FC236}">
+                <a16:creationId xmlns:a16="http://schemas.microsoft.com/office/drawing/2014/main" id="{D846BF7A-C60F-40E4-8C95-085AA52314D2}"/>
               </a:ext>
             </a:extLst>
           </p:cNvPr>
@@ -8818,10 +9498,10 @@
       </p:sp>
       <p:sp>
         <p:nvSpPr>
-          <p:cNvPr id="6" name="footer">
-            <a:extLst xmlns:a="http://schemas.openxmlformats.org/drawingml/2006/main">
-              <a:ext uri="{FF2B5EF4-FFF2-40B4-BE49-F238E27FC236}">
-                <a16:creationId xmlns:a16="http://schemas.microsoft.com/office/drawing/2014/main" id="{0B7AE4CC-8117-4A16-9F49-2122675ACBE7}"/>
+          <p:cNvPr id="8" name="footer">
+            <a:extLst xmlns:a="http://schemas.openxmlformats.org/drawingml/2006/main">
+              <a:ext uri="{FF2B5EF4-FFF2-40B4-BE49-F238E27FC236}">
+                <a16:creationId xmlns:a16="http://schemas.microsoft.com/office/drawing/2014/main" id="{1C566657-C658-4699-A872-37DD844D1CF7}"/>
               </a:ext>
             </a:extLst>
           </p:cNvPr>
@@ -8873,10 +9553,10 @@
       </p:sp>
       <p:sp>
         <p:nvSpPr>
-          <p:cNvPr id="7" name="page-number">
-            <a:extLst xmlns:a="http://schemas.openxmlformats.org/drawingml/2006/main">
-              <a:ext uri="{FF2B5EF4-FFF2-40B4-BE49-F238E27FC236}">
-                <a16:creationId xmlns:a16="http://schemas.microsoft.com/office/drawing/2014/main" id="{F64D1FE4-C46D-4A74-8748-018A5A87E292}"/>
+          <p:cNvPr id="9" name="page-number">
+            <a:extLst xmlns:a="http://schemas.openxmlformats.org/drawingml/2006/main">
+              <a:ext uri="{FF2B5EF4-FFF2-40B4-BE49-F238E27FC236}">
+                <a16:creationId xmlns:a16="http://schemas.microsoft.com/office/drawing/2014/main" id="{2593CE8A-ED97-4B58-BF0D-A511EC11E336}"/>
               </a:ext>
             </a:extLst>
           </p:cNvPr>
@@ -8929,7 +9609,7 @@
     </p:spTree>
     <p:extLst>
       <p:ext uri="{BB962C8B-B14F-4D97-AF65-F5344CB8AC3E}">
-        <p14:creationId xmlns:p14="http://schemas.microsoft.com/office/powerpoint/2010/main" val="633384681"/>
+        <p14:creationId xmlns:p14="http://schemas.microsoft.com/office/powerpoint/2010/main" val="1066551192"/>
       </p:ext>
     </p:extLst>
   </p:cSld>
@@ -8957,10 +9637,10 @@
       </p:grpSpPr>
       <p:sp>
         <p:nvSpPr>
-          <p:cNvPr id="10" name="hook">
-            <a:extLst xmlns:a="http://schemas.openxmlformats.org/drawingml/2006/main">
-              <a:ext uri="{FF2B5EF4-FFF2-40B4-BE49-F238E27FC236}">
-                <a16:creationId xmlns:a16="http://schemas.microsoft.com/office/drawing/2014/main" id="{F1994A7C-6059-464F-9576-C0C30A12B6E3}"/>
+          <p:cNvPr id="12" name="hook">
+            <a:extLst xmlns:a="http://schemas.openxmlformats.org/drawingml/2006/main">
+              <a:ext uri="{FF2B5EF4-FFF2-40B4-BE49-F238E27FC236}">
+                <a16:creationId xmlns:a16="http://schemas.microsoft.com/office/drawing/2014/main" id="{79A4C17C-6D44-44E1-8A55-5C562AB14342}"/>
               </a:ext>
             </a:extLst>
           </p:cNvPr>
@@ -9011,7 +9691,7 @@
           <p:cNvPr id="2" name="hook-rule">
             <a:extLst xmlns:a="http://schemas.openxmlformats.org/drawingml/2006/main">
               <a:ext uri="{FF2B5EF4-FFF2-40B4-BE49-F238E27FC236}">
-                <a16:creationId xmlns:a16="http://schemas.microsoft.com/office/drawing/2014/main" id="{1C6F59F6-0627-4AD1-9D7C-5A55F09F503A}"/>
+                <a16:creationId xmlns:a16="http://schemas.microsoft.com/office/drawing/2014/main" id="{02791739-98F5-4104-8350-624301E6B03E}"/>
               </a:ext>
             </a:extLst>
           </p:cNvPr>
@@ -9042,7 +9722,7 @@
           <p:cNvPr id="3" name="hook-label">
             <a:extLst xmlns:a="http://schemas.openxmlformats.org/drawingml/2006/main">
               <a:ext uri="{FF2B5EF4-FFF2-40B4-BE49-F238E27FC236}">
-                <a16:creationId xmlns:a16="http://schemas.microsoft.com/office/drawing/2014/main" id="{EFAA924F-5523-475B-B436-B01739C2A1E5}"/>
+                <a16:creationId xmlns:a16="http://schemas.microsoft.com/office/drawing/2014/main" id="{C7317D37-E70A-4BE3-A88D-CAAA4D4406ED}"/>
               </a:ext>
             </a:extLst>
           </p:cNvPr>
@@ -9093,7 +9773,7 @@
           <p:cNvPr id="4" name="diagram-surface">
             <a:extLst xmlns:a="http://schemas.openxmlformats.org/drawingml/2006/main">
               <a:ext uri="{FF2B5EF4-FFF2-40B4-BE49-F238E27FC236}">
-                <a16:creationId xmlns:a16="http://schemas.microsoft.com/office/drawing/2014/main" id="{0B7CDA5A-6BBD-48CA-B8EA-9B838694A52E}"/>
+                <a16:creationId xmlns:a16="http://schemas.microsoft.com/office/drawing/2014/main" id="{7BABC121-5288-49DC-AE32-BD1F2B6BAC2C}"/>
               </a:ext>
             </a:extLst>
           </p:cNvPr>
@@ -9125,14 +9805,14 @@
       </p:sp>
       <p:pic>
         <p:nvPicPr>
-          <p:cNvPr id="16" name="" descr="Diagrama didático autoral que apresenta: Produto de dados não é uma pasta Gold com nome novo. — A pergunta que guia a aula."/>
+          <p:cNvPr id="19" name="" descr="Diagrama didático autoral que apresenta: Produto de dados não é uma pasta Gold com nome novo. — A pergunta que guia a aula."/>
           <p:cNvPicPr>
             <a:picLocks xmlns:a="http://schemas.openxmlformats.org/drawingml/2006/main" noChangeAspect="1"/>
           </p:cNvPicPr>
           <p:nvPr/>
         </p:nvPicPr>
         <p:blipFill>
-          <a:blip xmlns:r="http://schemas.openxmlformats.org/officeDocument/2006/relationships" xmlns:a="http://schemas.openxmlformats.org/drawingml/2006/main" r:embed="Rfc7d91fdbb284da1"/>
+          <a:blip xmlns:r="http://schemas.openxmlformats.org/officeDocument/2006/relationships" xmlns:a="http://schemas.openxmlformats.org/drawingml/2006/main" r:embed="Rbd5a17f3c1ab44b8"/>
           <a:stretch xmlns:a="http://schemas.openxmlformats.org/drawingml/2006/main"/>
         </p:blipFill>
         <p:spPr>
@@ -9150,7 +9830,7 @@
           <p:cNvPr id="6" name="eyebrow">
             <a:extLst xmlns:a="http://schemas.openxmlformats.org/drawingml/2006/main">
               <a:ext uri="{FF2B5EF4-FFF2-40B4-BE49-F238E27FC236}">
-                <a16:creationId xmlns:a16="http://schemas.microsoft.com/office/drawing/2014/main" id="{0702949B-77FB-4644-A2BC-50481E3D1466}"/>
+                <a16:creationId xmlns:a16="http://schemas.microsoft.com/office/drawing/2014/main" id="{00A2662C-7B40-4A5A-83F0-43AB25598F6C}"/>
               </a:ext>
             </a:extLst>
           </p:cNvPr>
@@ -9198,10 +9878,69 @@
       </p:sp>
       <p:sp>
         <p:nvSpPr>
-          <p:cNvPr id="7" name="footer-rule">
-            <a:extLst xmlns:a="http://schemas.openxmlformats.org/drawingml/2006/main">
-              <a:ext uri="{FF2B5EF4-FFF2-40B4-BE49-F238E27FC236}">
-                <a16:creationId xmlns:a16="http://schemas.microsoft.com/office/drawing/2014/main" id="{B1AFE895-1B70-4738-B501-032285F6C425}"/>
+          <p:cNvPr id="7" name="rescue-point-logo-background">
+            <a:extLst xmlns:a="http://schemas.openxmlformats.org/drawingml/2006/main">
+              <a:ext uri="{FF2B5EF4-FFF2-40B4-BE49-F238E27FC236}">
+                <a16:creationId xmlns:a16="http://schemas.microsoft.com/office/drawing/2014/main" id="{AEF4EF7A-6091-4A0A-801D-74A6C4909AF3}"/>
+              </a:ext>
+            </a:extLst>
+          </p:cNvPr>
+          <p:cNvSpPr>
+            <a:spLocks xmlns:a="http://schemas.openxmlformats.org/drawingml/2006/main" noGrp="1"/>
+          </p:cNvSpPr>
+          <p:nvPr/>
+        </p:nvSpPr>
+        <p:spPr>
+          <a:xfrm xmlns:a="http://schemas.openxmlformats.org/drawingml/2006/main">
+            <a:off x="9772650" y="133350"/>
+            <a:ext cx="1733550" cy="457200"/>
+          </a:xfrm>
+          <a:prstGeom xmlns:a="http://schemas.openxmlformats.org/drawingml/2006/main" prst="roundRect">
+            <a:avLst>
+              <a:gd name="adj" fmla="val 16667"/>
+            </a:avLst>
+          </a:prstGeom>
+          <a:solidFill xmlns:a="http://schemas.openxmlformats.org/drawingml/2006/main">
+            <a:srgbClr val="06142E"/>
+          </a:solidFill>
+          <a:ln xmlns:a="http://schemas.openxmlformats.org/drawingml/2006/main" w="9525">
+            <a:solidFill>
+              <a:srgbClr val="1EC5FF">
+                <a:alpha val="33333"/>
+              </a:srgbClr>
+            </a:solidFill>
+            <a:prstDash val="solid"/>
+          </a:ln>
+        </p:spPr>
+      </p:sp>
+      <p:pic>
+        <p:nvPicPr>
+          <p:cNvPr id="22" name="" descr="Diagrama didático autoral que apresenta: Produto de dados não é uma pasta Gold com nome novo. — A pergunta que guia a aula."/>
+          <p:cNvPicPr>
+            <a:picLocks xmlns:a="http://schemas.openxmlformats.org/drawingml/2006/main" noChangeAspect="1"/>
+          </p:cNvPicPr>
+          <p:nvPr/>
+        </p:nvPicPr>
+        <p:blipFill>
+          <a:blip xmlns:r="http://schemas.openxmlformats.org/officeDocument/2006/relationships" xmlns:a="http://schemas.openxmlformats.org/drawingml/2006/main" r:embed="Rfb30b990fd88490e"/>
+          <a:stretch xmlns:a="http://schemas.openxmlformats.org/drawingml/2006/main"/>
+        </p:blipFill>
+        <p:spPr>
+          <a:xfrm xmlns:a="http://schemas.openxmlformats.org/drawingml/2006/main">
+            <a:off x="9893718" y="209550"/>
+            <a:ext cx="1491414" cy="323850"/>
+          </a:xfrm>
+          <a:prstGeom xmlns:a="http://schemas.openxmlformats.org/drawingml/2006/main" prst="rect">
+            <a:avLst/>
+          </a:prstGeom>
+        </p:spPr>
+      </p:pic>
+      <p:sp>
+        <p:nvSpPr>
+          <p:cNvPr id="9" name="footer-rule">
+            <a:extLst xmlns:a="http://schemas.openxmlformats.org/drawingml/2006/main">
+              <a:ext uri="{FF2B5EF4-FFF2-40B4-BE49-F238E27FC236}">
+                <a16:creationId xmlns:a16="http://schemas.microsoft.com/office/drawing/2014/main" id="{788BA848-80BA-4B36-98AB-5AC1C1130343}"/>
               </a:ext>
             </a:extLst>
           </p:cNvPr>
@@ -9231,10 +9970,10 @@
       </p:sp>
       <p:sp>
         <p:nvSpPr>
-          <p:cNvPr id="8" name="footer">
-            <a:extLst xmlns:a="http://schemas.openxmlformats.org/drawingml/2006/main">
-              <a:ext uri="{FF2B5EF4-FFF2-40B4-BE49-F238E27FC236}">
-                <a16:creationId xmlns:a16="http://schemas.microsoft.com/office/drawing/2014/main" id="{97B23B5F-8E4A-46C1-8111-805D45F1568D}"/>
+          <p:cNvPr id="10" name="footer">
+            <a:extLst xmlns:a="http://schemas.openxmlformats.org/drawingml/2006/main">
+              <a:ext uri="{FF2B5EF4-FFF2-40B4-BE49-F238E27FC236}">
+                <a16:creationId xmlns:a16="http://schemas.microsoft.com/office/drawing/2014/main" id="{BF40AC77-8A01-4A9C-A238-B5AB0AE48380}"/>
               </a:ext>
             </a:extLst>
           </p:cNvPr>
@@ -9286,10 +10025,10 @@
       </p:sp>
       <p:sp>
         <p:nvSpPr>
-          <p:cNvPr id="9" name="page-number">
-            <a:extLst xmlns:a="http://schemas.openxmlformats.org/drawingml/2006/main">
-              <a:ext uri="{FF2B5EF4-FFF2-40B4-BE49-F238E27FC236}">
-                <a16:creationId xmlns:a16="http://schemas.microsoft.com/office/drawing/2014/main" id="{64508F21-63BA-49A8-8F45-51A3D7E63F3A}"/>
+          <p:cNvPr id="11" name="page-number">
+            <a:extLst xmlns:a="http://schemas.openxmlformats.org/drawingml/2006/main">
+              <a:ext uri="{FF2B5EF4-FFF2-40B4-BE49-F238E27FC236}">
+                <a16:creationId xmlns:a16="http://schemas.microsoft.com/office/drawing/2014/main" id="{797097E6-E013-432C-B126-E90B1A49AA42}"/>
               </a:ext>
             </a:extLst>
           </p:cNvPr>
@@ -9342,7 +10081,7 @@
     </p:spTree>
     <p:extLst>
       <p:ext uri="{BB962C8B-B14F-4D97-AF65-F5344CB8AC3E}">
-        <p14:creationId xmlns:p14="http://schemas.microsoft.com/office/powerpoint/2010/main" val="583247610"/>
+        <p14:creationId xmlns:p14="http://schemas.microsoft.com/office/powerpoint/2010/main" val="557242455"/>
       </p:ext>
     </p:extLst>
   </p:cSld>
@@ -9378,10 +10117,10 @@
       </p:grpSpPr>
       <p:sp>
         <p:nvSpPr>
-          <p:cNvPr id="14" name="slide-title">
-            <a:extLst xmlns:a="http://schemas.openxmlformats.org/drawingml/2006/main">
-              <a:ext uri="{FF2B5EF4-FFF2-40B4-BE49-F238E27FC236}">
-                <a16:creationId xmlns:a16="http://schemas.microsoft.com/office/drawing/2014/main" id="{8DF4AC01-B520-4A09-9AD2-B17F8F7B6739}"/>
+          <p:cNvPr id="16" name="slide-title">
+            <a:extLst xmlns:a="http://schemas.openxmlformats.org/drawingml/2006/main">
+              <a:ext uri="{FF2B5EF4-FFF2-40B4-BE49-F238E27FC236}">
+                <a16:creationId xmlns:a16="http://schemas.microsoft.com/office/drawing/2014/main" id="{45E0CE5F-EEC5-45C8-88B4-7E4FA3F75AE4}"/>
               </a:ext>
             </a:extLst>
           </p:cNvPr>
@@ -9432,7 +10171,7 @@
           <p:cNvPr id="2" name="step-num-1">
             <a:extLst xmlns:a="http://schemas.openxmlformats.org/drawingml/2006/main">
               <a:ext uri="{FF2B5EF4-FFF2-40B4-BE49-F238E27FC236}">
-                <a16:creationId xmlns:a16="http://schemas.microsoft.com/office/drawing/2014/main" id="{6AF19737-2218-43C6-B402-722A3D5666E3}"/>
+                <a16:creationId xmlns:a16="http://schemas.microsoft.com/office/drawing/2014/main" id="{12F69E63-436E-4730-B33F-1829AB52D993}"/>
               </a:ext>
             </a:extLst>
           </p:cNvPr>
@@ -9483,7 +10222,7 @@
           <p:cNvPr id="3" name="step-label-1">
             <a:extLst xmlns:a="http://schemas.openxmlformats.org/drawingml/2006/main">
               <a:ext uri="{FF2B5EF4-FFF2-40B4-BE49-F238E27FC236}">
-                <a16:creationId xmlns:a16="http://schemas.microsoft.com/office/drawing/2014/main" id="{B7585756-340C-4DFE-9D15-4F4CA096E046}"/>
+                <a16:creationId xmlns:a16="http://schemas.microsoft.com/office/drawing/2014/main" id="{EAFF6277-4CAA-4F41-B167-C5A398D1731A}"/>
               </a:ext>
             </a:extLst>
           </p:cNvPr>
@@ -9534,7 +10273,7 @@
           <p:cNvPr id="4" name="step-line-1">
             <a:extLst xmlns:a="http://schemas.openxmlformats.org/drawingml/2006/main">
               <a:ext uri="{FF2B5EF4-FFF2-40B4-BE49-F238E27FC236}">
-                <a16:creationId xmlns:a16="http://schemas.microsoft.com/office/drawing/2014/main" id="{80390C91-207C-4680-858A-C12F860DA068}"/>
+                <a16:creationId xmlns:a16="http://schemas.microsoft.com/office/drawing/2014/main" id="{54046DB8-E54A-446C-9FD9-DEF1415DA74D}"/>
               </a:ext>
             </a:extLst>
           </p:cNvPr>
@@ -9565,7 +10304,7 @@
           <p:cNvPr id="5" name="step-num-2">
             <a:extLst xmlns:a="http://schemas.openxmlformats.org/drawingml/2006/main">
               <a:ext uri="{FF2B5EF4-FFF2-40B4-BE49-F238E27FC236}">
-                <a16:creationId xmlns:a16="http://schemas.microsoft.com/office/drawing/2014/main" id="{88D99D92-BF72-4401-A988-EFBD3E151EB5}"/>
+                <a16:creationId xmlns:a16="http://schemas.microsoft.com/office/drawing/2014/main" id="{FCA0CFAC-890D-48C0-9693-9F458A6A39AD}"/>
               </a:ext>
             </a:extLst>
           </p:cNvPr>
@@ -9616,7 +10355,7 @@
           <p:cNvPr id="6" name="step-label-2">
             <a:extLst xmlns:a="http://schemas.openxmlformats.org/drawingml/2006/main">
               <a:ext uri="{FF2B5EF4-FFF2-40B4-BE49-F238E27FC236}">
-                <a16:creationId xmlns:a16="http://schemas.microsoft.com/office/drawing/2014/main" id="{5764A9CD-6FDC-4171-AE13-A5DB1AFB4FE4}"/>
+                <a16:creationId xmlns:a16="http://schemas.microsoft.com/office/drawing/2014/main" id="{0DBF9405-E145-41EF-BD2C-D591829FA0C5}"/>
               </a:ext>
             </a:extLst>
           </p:cNvPr>
@@ -9667,7 +10406,7 @@
           <p:cNvPr id="7" name="step-line-2">
             <a:extLst xmlns:a="http://schemas.openxmlformats.org/drawingml/2006/main">
               <a:ext uri="{FF2B5EF4-FFF2-40B4-BE49-F238E27FC236}">
-                <a16:creationId xmlns:a16="http://schemas.microsoft.com/office/drawing/2014/main" id="{6A2C316F-0E87-446E-B2E6-50D925BDCEE0}"/>
+                <a16:creationId xmlns:a16="http://schemas.microsoft.com/office/drawing/2014/main" id="{92B069FF-88FE-4D6E-9117-E4930DF6F4FC}"/>
               </a:ext>
             </a:extLst>
           </p:cNvPr>
@@ -9698,7 +10437,7 @@
           <p:cNvPr id="8" name="step-num-3">
             <a:extLst xmlns:a="http://schemas.openxmlformats.org/drawingml/2006/main">
               <a:ext uri="{FF2B5EF4-FFF2-40B4-BE49-F238E27FC236}">
-                <a16:creationId xmlns:a16="http://schemas.microsoft.com/office/drawing/2014/main" id="{F32F683B-956B-4D6C-9E9F-0D7A7E47C32E}"/>
+                <a16:creationId xmlns:a16="http://schemas.microsoft.com/office/drawing/2014/main" id="{5D76A2D5-8B0D-475D-9900-16DD64B01BF5}"/>
               </a:ext>
             </a:extLst>
           </p:cNvPr>
@@ -9749,7 +10488,7 @@
           <p:cNvPr id="9" name="step-label-3">
             <a:extLst xmlns:a="http://schemas.openxmlformats.org/drawingml/2006/main">
               <a:ext uri="{FF2B5EF4-FFF2-40B4-BE49-F238E27FC236}">
-                <a16:creationId xmlns:a16="http://schemas.microsoft.com/office/drawing/2014/main" id="{6B0ED407-BC50-4EC8-AABC-D60553703F27}"/>
+                <a16:creationId xmlns:a16="http://schemas.microsoft.com/office/drawing/2014/main" id="{F6597953-DB0C-4CF3-945F-1F484A97C3D1}"/>
               </a:ext>
             </a:extLst>
           </p:cNvPr>
@@ -9800,7 +10539,7 @@
           <p:cNvPr id="10" name="eyebrow">
             <a:extLst xmlns:a="http://schemas.openxmlformats.org/drawingml/2006/main">
               <a:ext uri="{FF2B5EF4-FFF2-40B4-BE49-F238E27FC236}">
-                <a16:creationId xmlns:a16="http://schemas.microsoft.com/office/drawing/2014/main" id="{FB6D677F-31B1-4EAE-8155-85C4A20E3679}"/>
+                <a16:creationId xmlns:a16="http://schemas.microsoft.com/office/drawing/2014/main" id="{54FA062E-40CC-4153-9907-B41C93845C36}"/>
               </a:ext>
             </a:extLst>
           </p:cNvPr>
@@ -9848,10 +10587,69 @@
       </p:sp>
       <p:sp>
         <p:nvSpPr>
-          <p:cNvPr id="11" name="footer-rule">
-            <a:extLst xmlns:a="http://schemas.openxmlformats.org/drawingml/2006/main">
-              <a:ext uri="{FF2B5EF4-FFF2-40B4-BE49-F238E27FC236}">
-                <a16:creationId xmlns:a16="http://schemas.microsoft.com/office/drawing/2014/main" id="{B2BCC2BE-52F8-47EB-9AF5-85DA01057F0C}"/>
+          <p:cNvPr id="11" name="rescue-point-logo-background">
+            <a:extLst xmlns:a="http://schemas.openxmlformats.org/drawingml/2006/main">
+              <a:ext uri="{FF2B5EF4-FFF2-40B4-BE49-F238E27FC236}">
+                <a16:creationId xmlns:a16="http://schemas.microsoft.com/office/drawing/2014/main" id="{757AA333-B9E9-466B-8F77-8B5C1FA612F9}"/>
+              </a:ext>
+            </a:extLst>
+          </p:cNvPr>
+          <p:cNvSpPr>
+            <a:spLocks xmlns:a="http://schemas.openxmlformats.org/drawingml/2006/main" noGrp="1"/>
+          </p:cNvSpPr>
+          <p:nvPr/>
+        </p:nvSpPr>
+        <p:spPr>
+          <a:xfrm xmlns:a="http://schemas.openxmlformats.org/drawingml/2006/main">
+            <a:off x="9772650" y="133350"/>
+            <a:ext cx="1733550" cy="457200"/>
+          </a:xfrm>
+          <a:prstGeom xmlns:a="http://schemas.openxmlformats.org/drawingml/2006/main" prst="roundRect">
+            <a:avLst>
+              <a:gd name="adj" fmla="val 16667"/>
+            </a:avLst>
+          </a:prstGeom>
+          <a:solidFill xmlns:a="http://schemas.openxmlformats.org/drawingml/2006/main">
+            <a:srgbClr val="06142E"/>
+          </a:solidFill>
+          <a:ln xmlns:a="http://schemas.openxmlformats.org/drawingml/2006/main" w="9525">
+            <a:solidFill>
+              <a:srgbClr val="1EC5FF">
+                <a:alpha val="33333"/>
+              </a:srgbClr>
+            </a:solidFill>
+            <a:prstDash val="solid"/>
+          </a:ln>
+        </p:spPr>
+      </p:sp>
+      <p:pic>
+        <p:nvPicPr>
+          <p:cNvPr id="29" name="" descr="Figura oficial da documentação dbt usada para explicar: Ao final, você consegue... — 01."/>
+          <p:cNvPicPr>
+            <a:picLocks xmlns:a="http://schemas.openxmlformats.org/drawingml/2006/main" noChangeAspect="1"/>
+          </p:cNvPicPr>
+          <p:nvPr/>
+        </p:nvPicPr>
+        <p:blipFill>
+          <a:blip xmlns:r="http://schemas.openxmlformats.org/officeDocument/2006/relationships" xmlns:a="http://schemas.openxmlformats.org/drawingml/2006/main" r:embed="R68f3fabd45874f14"/>
+          <a:stretch xmlns:a="http://schemas.openxmlformats.org/drawingml/2006/main"/>
+        </p:blipFill>
+        <p:spPr>
+          <a:xfrm xmlns:a="http://schemas.openxmlformats.org/drawingml/2006/main">
+            <a:off x="9893718" y="209550"/>
+            <a:ext cx="1491414" cy="323850"/>
+          </a:xfrm>
+          <a:prstGeom xmlns:a="http://schemas.openxmlformats.org/drawingml/2006/main" prst="rect">
+            <a:avLst/>
+          </a:prstGeom>
+        </p:spPr>
+      </p:pic>
+      <p:sp>
+        <p:nvSpPr>
+          <p:cNvPr id="13" name="footer-rule">
+            <a:extLst xmlns:a="http://schemas.openxmlformats.org/drawingml/2006/main">
+              <a:ext uri="{FF2B5EF4-FFF2-40B4-BE49-F238E27FC236}">
+                <a16:creationId xmlns:a16="http://schemas.microsoft.com/office/drawing/2014/main" id="{ADAB802A-31BA-4253-A128-96D4C2D710B3}"/>
               </a:ext>
             </a:extLst>
           </p:cNvPr>
@@ -9881,10 +10679,10 @@
       </p:sp>
       <p:sp>
         <p:nvSpPr>
-          <p:cNvPr id="12" name="footer">
-            <a:extLst xmlns:a="http://schemas.openxmlformats.org/drawingml/2006/main">
-              <a:ext uri="{FF2B5EF4-FFF2-40B4-BE49-F238E27FC236}">
-                <a16:creationId xmlns:a16="http://schemas.microsoft.com/office/drawing/2014/main" id="{17AB8E01-B10F-471F-A0D4-C55694ED31C5}"/>
+          <p:cNvPr id="14" name="footer">
+            <a:extLst xmlns:a="http://schemas.openxmlformats.org/drawingml/2006/main">
+              <a:ext uri="{FF2B5EF4-FFF2-40B4-BE49-F238E27FC236}">
+                <a16:creationId xmlns:a16="http://schemas.microsoft.com/office/drawing/2014/main" id="{13053FF7-243F-4722-86E3-6C0E756CBA79}"/>
               </a:ext>
             </a:extLst>
           </p:cNvPr>
@@ -9936,10 +10734,10 @@
       </p:sp>
       <p:sp>
         <p:nvSpPr>
-          <p:cNvPr id="13" name="page-number">
-            <a:extLst xmlns:a="http://schemas.openxmlformats.org/drawingml/2006/main">
-              <a:ext uri="{FF2B5EF4-FFF2-40B4-BE49-F238E27FC236}">
-                <a16:creationId xmlns:a16="http://schemas.microsoft.com/office/drawing/2014/main" id="{CE083E06-F137-4158-95C9-7A34DC26A737}"/>
+          <p:cNvPr id="15" name="page-number">
+            <a:extLst xmlns:a="http://schemas.openxmlformats.org/drawingml/2006/main">
+              <a:ext uri="{FF2B5EF4-FFF2-40B4-BE49-F238E27FC236}">
+                <a16:creationId xmlns:a16="http://schemas.microsoft.com/office/drawing/2014/main" id="{6CC321C2-2099-46FE-81D0-950A9B623472}"/>
               </a:ext>
             </a:extLst>
           </p:cNvPr>
@@ -9992,7 +10790,7 @@
     </p:spTree>
     <p:extLst>
       <p:ext uri="{BB962C8B-B14F-4D97-AF65-F5344CB8AC3E}">
-        <p14:creationId xmlns:p14="http://schemas.microsoft.com/office/powerpoint/2010/main" val="1872623741"/>
+        <p14:creationId xmlns:p14="http://schemas.microsoft.com/office/powerpoint/2010/main" val="1947071004"/>
       </p:ext>
     </p:extLst>
   </p:cSld>
@@ -10028,10 +10826,10 @@
       </p:grpSpPr>
       <p:sp>
         <p:nvSpPr>
-          <p:cNvPr id="11" name="slide-title">
-            <a:extLst xmlns:a="http://schemas.openxmlformats.org/drawingml/2006/main">
-              <a:ext uri="{FF2B5EF4-FFF2-40B4-BE49-F238E27FC236}">
-                <a16:creationId xmlns:a16="http://schemas.microsoft.com/office/drawing/2014/main" id="{FCF25414-80CC-4440-A2FE-634114570595}"/>
+          <p:cNvPr id="13" name="slide-title">
+            <a:extLst xmlns:a="http://schemas.openxmlformats.org/drawingml/2006/main">
+              <a:ext uri="{FF2B5EF4-FFF2-40B4-BE49-F238E27FC236}">
+                <a16:creationId xmlns:a16="http://schemas.microsoft.com/office/drawing/2014/main" id="{1033CE50-BE10-4D55-A1B1-866C3566C17F}"/>
               </a:ext>
             </a:extLst>
           </p:cNvPr>
@@ -10082,7 +10880,7 @@
           <p:cNvPr id="2" name="slide-subtitle">
             <a:extLst xmlns:a="http://schemas.openxmlformats.org/drawingml/2006/main">
               <a:ext uri="{FF2B5EF4-FFF2-40B4-BE49-F238E27FC236}">
-                <a16:creationId xmlns:a16="http://schemas.microsoft.com/office/drawing/2014/main" id="{E2EE2028-3C85-47A0-989D-77E71AAE82A3}"/>
+                <a16:creationId xmlns:a16="http://schemas.microsoft.com/office/drawing/2014/main" id="{89418274-78F5-4292-8B85-97090F3C83DB}"/>
               </a:ext>
             </a:extLst>
           </p:cNvPr>
@@ -10133,7 +10931,7 @@
           <p:cNvPr id="3" name="bullets">
             <a:extLst xmlns:a="http://schemas.openxmlformats.org/drawingml/2006/main">
               <a:ext uri="{FF2B5EF4-FFF2-40B4-BE49-F238E27FC236}">
-                <a16:creationId xmlns:a16="http://schemas.microsoft.com/office/drawing/2014/main" id="{B6E2CA58-8EDF-41C8-8E85-766EECC9F656}"/>
+                <a16:creationId xmlns:a16="http://schemas.microsoft.com/office/drawing/2014/main" id="{9216715F-248B-4891-9463-0B31730F3D4C}"/>
               </a:ext>
             </a:extLst>
           </p:cNvPr>
@@ -10220,7 +11018,7 @@
           <p:cNvPr id="4" name="ambient-glow">
             <a:extLst xmlns:a="http://schemas.openxmlformats.org/drawingml/2006/main">
               <a:ext uri="{FF2B5EF4-FFF2-40B4-BE49-F238E27FC236}">
-                <a16:creationId xmlns:a16="http://schemas.microsoft.com/office/drawing/2014/main" id="{CE05C0DD-21F7-4F2D-9EFA-7915610815BA}"/>
+                <a16:creationId xmlns:a16="http://schemas.microsoft.com/office/drawing/2014/main" id="{FD603F14-E7C9-486B-AEE9-2FF2EE0C0B2B}"/>
               </a:ext>
             </a:extLst>
           </p:cNvPr>
@@ -10257,7 +11055,7 @@
           <p:cNvPr id="5" name="ambient-core">
             <a:extLst xmlns:a="http://schemas.openxmlformats.org/drawingml/2006/main">
               <a:ext uri="{FF2B5EF4-FFF2-40B4-BE49-F238E27FC236}">
-                <a16:creationId xmlns:a16="http://schemas.microsoft.com/office/drawing/2014/main" id="{320DC838-E84B-41AE-AEE8-B4F8354198F4}"/>
+                <a16:creationId xmlns:a16="http://schemas.microsoft.com/office/drawing/2014/main" id="{DAC7F2FB-7FA1-45D5-91F7-D04DF9C91953}"/>
               </a:ext>
             </a:extLst>
           </p:cNvPr>
@@ -10294,7 +11092,7 @@
           <p:cNvPr id="6" name="section-number">
             <a:extLst xmlns:a="http://schemas.openxmlformats.org/drawingml/2006/main">
               <a:ext uri="{FF2B5EF4-FFF2-40B4-BE49-F238E27FC236}">
-                <a16:creationId xmlns:a16="http://schemas.microsoft.com/office/drawing/2014/main" id="{4262F397-4873-4385-A298-DF51B8355854}"/>
+                <a16:creationId xmlns:a16="http://schemas.microsoft.com/office/drawing/2014/main" id="{F8FE033D-F4C4-4531-BF09-A234E4F743B0}"/>
               </a:ext>
             </a:extLst>
           </p:cNvPr>
@@ -10345,7 +11143,7 @@
           <p:cNvPr id="7" name="eyebrow">
             <a:extLst xmlns:a="http://schemas.openxmlformats.org/drawingml/2006/main">
               <a:ext uri="{FF2B5EF4-FFF2-40B4-BE49-F238E27FC236}">
-                <a16:creationId xmlns:a16="http://schemas.microsoft.com/office/drawing/2014/main" id="{CBA3C808-5CE5-45CB-9DA3-D86B1EC284CF}"/>
+                <a16:creationId xmlns:a16="http://schemas.microsoft.com/office/drawing/2014/main" id="{231A797C-CD34-4734-8937-E796FCB56897}"/>
               </a:ext>
             </a:extLst>
           </p:cNvPr>
@@ -10393,10 +11191,69 @@
       </p:sp>
       <p:sp>
         <p:nvSpPr>
-          <p:cNvPr id="8" name="footer-rule">
-            <a:extLst xmlns:a="http://schemas.openxmlformats.org/drawingml/2006/main">
-              <a:ext uri="{FF2B5EF4-FFF2-40B4-BE49-F238E27FC236}">
-                <a16:creationId xmlns:a16="http://schemas.microsoft.com/office/drawing/2014/main" id="{4C914E25-CFE2-4E98-86C9-52818FA6E31E}"/>
+          <p:cNvPr id="8" name="rescue-point-logo-background">
+            <a:extLst xmlns:a="http://schemas.openxmlformats.org/drawingml/2006/main">
+              <a:ext uri="{FF2B5EF4-FFF2-40B4-BE49-F238E27FC236}">
+                <a16:creationId xmlns:a16="http://schemas.microsoft.com/office/drawing/2014/main" id="{A6EC2C91-B1EC-44A0-AEBD-0074B24102EF}"/>
+              </a:ext>
+            </a:extLst>
+          </p:cNvPr>
+          <p:cNvSpPr>
+            <a:spLocks xmlns:a="http://schemas.openxmlformats.org/drawingml/2006/main" noGrp="1"/>
+          </p:cNvSpPr>
+          <p:nvPr/>
+        </p:nvSpPr>
+        <p:spPr>
+          <a:xfrm xmlns:a="http://schemas.openxmlformats.org/drawingml/2006/main">
+            <a:off x="9772650" y="133350"/>
+            <a:ext cx="1733550" cy="457200"/>
+          </a:xfrm>
+          <a:prstGeom xmlns:a="http://schemas.openxmlformats.org/drawingml/2006/main" prst="roundRect">
+            <a:avLst>
+              <a:gd name="adj" fmla="val 16667"/>
+            </a:avLst>
+          </a:prstGeom>
+          <a:solidFill xmlns:a="http://schemas.openxmlformats.org/drawingml/2006/main">
+            <a:srgbClr val="06142E"/>
+          </a:solidFill>
+          <a:ln xmlns:a="http://schemas.openxmlformats.org/drawingml/2006/main" w="9525">
+            <a:solidFill>
+              <a:srgbClr val="1EC5FF">
+                <a:alpha val="33333"/>
+              </a:srgbClr>
+            </a:solidFill>
+            <a:prstDash val="solid"/>
+          </a:ln>
+        </p:spPr>
+      </p:sp>
+      <p:pic>
+        <p:nvPicPr>
+          <p:cNvPr id="23" name="" descr="Figura oficial da documentação dbt usada para explicar: Produto combina contrato e responsabilidade — Interface, owner, SLA e consumidores importam mais que a pasta.."/>
+          <p:cNvPicPr>
+            <a:picLocks xmlns:a="http://schemas.openxmlformats.org/drawingml/2006/main" noChangeAspect="1"/>
+          </p:cNvPicPr>
+          <p:nvPr/>
+        </p:nvPicPr>
+        <p:blipFill>
+          <a:blip xmlns:r="http://schemas.openxmlformats.org/officeDocument/2006/relationships" xmlns:a="http://schemas.openxmlformats.org/drawingml/2006/main" r:embed="R66d6f6444da545e2"/>
+          <a:stretch xmlns:a="http://schemas.openxmlformats.org/drawingml/2006/main"/>
+        </p:blipFill>
+        <p:spPr>
+          <a:xfrm xmlns:a="http://schemas.openxmlformats.org/drawingml/2006/main">
+            <a:off x="9893718" y="209550"/>
+            <a:ext cx="1491414" cy="323850"/>
+          </a:xfrm>
+          <a:prstGeom xmlns:a="http://schemas.openxmlformats.org/drawingml/2006/main" prst="rect">
+            <a:avLst/>
+          </a:prstGeom>
+        </p:spPr>
+      </p:pic>
+      <p:sp>
+        <p:nvSpPr>
+          <p:cNvPr id="10" name="footer-rule">
+            <a:extLst xmlns:a="http://schemas.openxmlformats.org/drawingml/2006/main">
+              <a:ext uri="{FF2B5EF4-FFF2-40B4-BE49-F238E27FC236}">
+                <a16:creationId xmlns:a16="http://schemas.microsoft.com/office/drawing/2014/main" id="{A52DE094-07B0-4C9F-82D3-40CBF65EC3AB}"/>
               </a:ext>
             </a:extLst>
           </p:cNvPr>
@@ -10426,10 +11283,10 @@
       </p:sp>
       <p:sp>
         <p:nvSpPr>
-          <p:cNvPr id="9" name="footer">
-            <a:extLst xmlns:a="http://schemas.openxmlformats.org/drawingml/2006/main">
-              <a:ext uri="{FF2B5EF4-FFF2-40B4-BE49-F238E27FC236}">
-                <a16:creationId xmlns:a16="http://schemas.microsoft.com/office/drawing/2014/main" id="{7A020D06-2FE3-4348-A30B-1EF610F7C8D0}"/>
+          <p:cNvPr id="11" name="footer">
+            <a:extLst xmlns:a="http://schemas.openxmlformats.org/drawingml/2006/main">
+              <a:ext uri="{FF2B5EF4-FFF2-40B4-BE49-F238E27FC236}">
+                <a16:creationId xmlns:a16="http://schemas.microsoft.com/office/drawing/2014/main" id="{0D44B4DC-0ECF-4AC4-888B-18556DFCDA8F}"/>
               </a:ext>
             </a:extLst>
           </p:cNvPr>
@@ -10481,10 +11338,10 @@
       </p:sp>
       <p:sp>
         <p:nvSpPr>
-          <p:cNvPr id="10" name="page-number">
-            <a:extLst xmlns:a="http://schemas.openxmlformats.org/drawingml/2006/main">
-              <a:ext uri="{FF2B5EF4-FFF2-40B4-BE49-F238E27FC236}">
-                <a16:creationId xmlns:a16="http://schemas.microsoft.com/office/drawing/2014/main" id="{7CC073E8-CE35-4A12-8D6D-6F61DCB21A51}"/>
+          <p:cNvPr id="12" name="page-number">
+            <a:extLst xmlns:a="http://schemas.openxmlformats.org/drawingml/2006/main">
+              <a:ext uri="{FF2B5EF4-FFF2-40B4-BE49-F238E27FC236}">
+                <a16:creationId xmlns:a16="http://schemas.microsoft.com/office/drawing/2014/main" id="{DA4BB67D-AE7B-4703-9700-7A1E920222F6}"/>
               </a:ext>
             </a:extLst>
           </p:cNvPr>
@@ -10537,7 +11394,7 @@
     </p:spTree>
     <p:extLst>
       <p:ext uri="{BB962C8B-B14F-4D97-AF65-F5344CB8AC3E}">
-        <p14:creationId xmlns:p14="http://schemas.microsoft.com/office/powerpoint/2010/main" val="1998980468"/>
+        <p14:creationId xmlns:p14="http://schemas.microsoft.com/office/powerpoint/2010/main" val="1304717617"/>
       </p:ext>
     </p:extLst>
   </p:cSld>
@@ -10565,10 +11422,10 @@
       </p:grpSpPr>
       <p:sp>
         <p:nvSpPr>
-          <p:cNvPr id="11" name="slide-title">
-            <a:extLst xmlns:a="http://schemas.openxmlformats.org/drawingml/2006/main">
-              <a:ext uri="{FF2B5EF4-FFF2-40B4-BE49-F238E27FC236}">
-                <a16:creationId xmlns:a16="http://schemas.microsoft.com/office/drawing/2014/main" id="{E43E0085-3458-4340-A87D-19D4AA8D904E}"/>
+          <p:cNvPr id="13" name="slide-title">
+            <a:extLst xmlns:a="http://schemas.openxmlformats.org/drawingml/2006/main">
+              <a:ext uri="{FF2B5EF4-FFF2-40B4-BE49-F238E27FC236}">
+                <a16:creationId xmlns:a16="http://schemas.microsoft.com/office/drawing/2014/main" id="{5FDE818E-ED48-4D20-8A51-02E15A0B5D66}"/>
               </a:ext>
             </a:extLst>
           </p:cNvPr>
@@ -10619,7 +11476,7 @@
           <p:cNvPr id="2" name="slide-subtitle">
             <a:extLst xmlns:a="http://schemas.openxmlformats.org/drawingml/2006/main">
               <a:ext uri="{FF2B5EF4-FFF2-40B4-BE49-F238E27FC236}">
-                <a16:creationId xmlns:a16="http://schemas.microsoft.com/office/drawing/2014/main" id="{9F730F97-927E-49BF-827C-0FD5CBA91D60}"/>
+                <a16:creationId xmlns:a16="http://schemas.microsoft.com/office/drawing/2014/main" id="{E0513C78-81EE-4493-8490-E15563BA0AB0}"/>
               </a:ext>
             </a:extLst>
           </p:cNvPr>
@@ -10670,7 +11527,7 @@
           <p:cNvPr id="3" name="bullets">
             <a:extLst xmlns:a="http://schemas.openxmlformats.org/drawingml/2006/main">
               <a:ext uri="{FF2B5EF4-FFF2-40B4-BE49-F238E27FC236}">
-                <a16:creationId xmlns:a16="http://schemas.microsoft.com/office/drawing/2014/main" id="{A5143652-2B5A-48C7-904C-CEED10E9D0AF}"/>
+                <a16:creationId xmlns:a16="http://schemas.microsoft.com/office/drawing/2014/main" id="{3BC7008E-03FA-4274-9AA0-11497E447E74}"/>
               </a:ext>
             </a:extLst>
           </p:cNvPr>
@@ -10757,7 +11614,7 @@
           <p:cNvPr id="4" name="ambient-glow">
             <a:extLst xmlns:a="http://schemas.openxmlformats.org/drawingml/2006/main">
               <a:ext uri="{FF2B5EF4-FFF2-40B4-BE49-F238E27FC236}">
-                <a16:creationId xmlns:a16="http://schemas.microsoft.com/office/drawing/2014/main" id="{4545A4AA-131F-4428-8FD9-35E760A2B9C3}"/>
+                <a16:creationId xmlns:a16="http://schemas.microsoft.com/office/drawing/2014/main" id="{55984911-CD78-4E0D-BF78-857D5D390F00}"/>
               </a:ext>
             </a:extLst>
           </p:cNvPr>
@@ -10794,7 +11651,7 @@
           <p:cNvPr id="5" name="ambient-core">
             <a:extLst xmlns:a="http://schemas.openxmlformats.org/drawingml/2006/main">
               <a:ext uri="{FF2B5EF4-FFF2-40B4-BE49-F238E27FC236}">
-                <a16:creationId xmlns:a16="http://schemas.microsoft.com/office/drawing/2014/main" id="{369D432D-752B-45F8-948B-ABAB9012C898}"/>
+                <a16:creationId xmlns:a16="http://schemas.microsoft.com/office/drawing/2014/main" id="{160103E7-C553-4847-994D-10C779C056EF}"/>
               </a:ext>
             </a:extLst>
           </p:cNvPr>
@@ -10831,7 +11688,7 @@
           <p:cNvPr id="6" name="section-number">
             <a:extLst xmlns:a="http://schemas.openxmlformats.org/drawingml/2006/main">
               <a:ext uri="{FF2B5EF4-FFF2-40B4-BE49-F238E27FC236}">
-                <a16:creationId xmlns:a16="http://schemas.microsoft.com/office/drawing/2014/main" id="{E1C10359-F3FF-45EE-B023-81EA563C9630}"/>
+                <a16:creationId xmlns:a16="http://schemas.microsoft.com/office/drawing/2014/main" id="{E1169ABD-F59F-45AD-AB07-16A5DEE3B8B7}"/>
               </a:ext>
             </a:extLst>
           </p:cNvPr>
@@ -10882,7 +11739,7 @@
           <p:cNvPr id="7" name="eyebrow">
             <a:extLst xmlns:a="http://schemas.openxmlformats.org/drawingml/2006/main">
               <a:ext uri="{FF2B5EF4-FFF2-40B4-BE49-F238E27FC236}">
-                <a16:creationId xmlns:a16="http://schemas.microsoft.com/office/drawing/2014/main" id="{1D72F3D2-DEC4-47A6-9352-D1BC92CE7C64}"/>
+                <a16:creationId xmlns:a16="http://schemas.microsoft.com/office/drawing/2014/main" id="{9D7DBC4F-9C2A-417E-BD7D-D3AACFA994A0}"/>
               </a:ext>
             </a:extLst>
           </p:cNvPr>
@@ -10930,10 +11787,69 @@
       </p:sp>
       <p:sp>
         <p:nvSpPr>
-          <p:cNvPr id="8" name="footer-rule">
-            <a:extLst xmlns:a="http://schemas.openxmlformats.org/drawingml/2006/main">
-              <a:ext uri="{FF2B5EF4-FFF2-40B4-BE49-F238E27FC236}">
-                <a16:creationId xmlns:a16="http://schemas.microsoft.com/office/drawing/2014/main" id="{ADDCCB61-393C-4AF8-BE37-E42B2BD1EE61}"/>
+          <p:cNvPr id="8" name="rescue-point-logo-background">
+            <a:extLst xmlns:a="http://schemas.openxmlformats.org/drawingml/2006/main">
+              <a:ext uri="{FF2B5EF4-FFF2-40B4-BE49-F238E27FC236}">
+                <a16:creationId xmlns:a16="http://schemas.microsoft.com/office/drawing/2014/main" id="{67F2F8C9-0915-40A8-9F7B-B994FF68D96A}"/>
+              </a:ext>
+            </a:extLst>
+          </p:cNvPr>
+          <p:cNvSpPr>
+            <a:spLocks xmlns:a="http://schemas.openxmlformats.org/drawingml/2006/main" noGrp="1"/>
+          </p:cNvSpPr>
+          <p:nvPr/>
+        </p:nvSpPr>
+        <p:spPr>
+          <a:xfrm xmlns:a="http://schemas.openxmlformats.org/drawingml/2006/main">
+            <a:off x="9772650" y="133350"/>
+            <a:ext cx="1733550" cy="457200"/>
+          </a:xfrm>
+          <a:prstGeom xmlns:a="http://schemas.openxmlformats.org/drawingml/2006/main" prst="roundRect">
+            <a:avLst>
+              <a:gd name="adj" fmla="val 16667"/>
+            </a:avLst>
+          </a:prstGeom>
+          <a:solidFill xmlns:a="http://schemas.openxmlformats.org/drawingml/2006/main">
+            <a:srgbClr val="06142E"/>
+          </a:solidFill>
+          <a:ln xmlns:a="http://schemas.openxmlformats.org/drawingml/2006/main" w="9525">
+            <a:solidFill>
+              <a:srgbClr val="1EC5FF">
+                <a:alpha val="33333"/>
+              </a:srgbClr>
+            </a:solidFill>
+            <a:prstDash val="solid"/>
+          </a:ln>
+        </p:spPr>
+      </p:sp>
+      <p:pic>
+        <p:nvPicPr>
+          <p:cNvPr id="23" name="" descr="Figura oficial da documentação dbt usada para explicar: Separações horizontal e vertical resolvem problemas diferentes — A topologia deve seguir ownership e ciclo de mudança.."/>
+          <p:cNvPicPr>
+            <a:picLocks xmlns:a="http://schemas.openxmlformats.org/drawingml/2006/main" noChangeAspect="1"/>
+          </p:cNvPicPr>
+          <p:nvPr/>
+        </p:nvPicPr>
+        <p:blipFill>
+          <a:blip xmlns:r="http://schemas.openxmlformats.org/officeDocument/2006/relationships" xmlns:a="http://schemas.openxmlformats.org/drawingml/2006/main" r:embed="R6ace99c7d143423a"/>
+          <a:stretch xmlns:a="http://schemas.openxmlformats.org/drawingml/2006/main"/>
+        </p:blipFill>
+        <p:spPr>
+          <a:xfrm xmlns:a="http://schemas.openxmlformats.org/drawingml/2006/main">
+            <a:off x="9893718" y="209550"/>
+            <a:ext cx="1491414" cy="323850"/>
+          </a:xfrm>
+          <a:prstGeom xmlns:a="http://schemas.openxmlformats.org/drawingml/2006/main" prst="rect">
+            <a:avLst/>
+          </a:prstGeom>
+        </p:spPr>
+      </p:pic>
+      <p:sp>
+        <p:nvSpPr>
+          <p:cNvPr id="10" name="footer-rule">
+            <a:extLst xmlns:a="http://schemas.openxmlformats.org/drawingml/2006/main">
+              <a:ext uri="{FF2B5EF4-FFF2-40B4-BE49-F238E27FC236}">
+                <a16:creationId xmlns:a16="http://schemas.microsoft.com/office/drawing/2014/main" id="{8B848698-E688-45EF-96D8-CBC9892B3EE1}"/>
               </a:ext>
             </a:extLst>
           </p:cNvPr>
@@ -10963,10 +11879,10 @@
       </p:sp>
       <p:sp>
         <p:nvSpPr>
-          <p:cNvPr id="9" name="footer">
-            <a:extLst xmlns:a="http://schemas.openxmlformats.org/drawingml/2006/main">
-              <a:ext uri="{FF2B5EF4-FFF2-40B4-BE49-F238E27FC236}">
-                <a16:creationId xmlns:a16="http://schemas.microsoft.com/office/drawing/2014/main" id="{7A08612F-3B61-4740-8434-F7C7E1140ADB}"/>
+          <p:cNvPr id="11" name="footer">
+            <a:extLst xmlns:a="http://schemas.openxmlformats.org/drawingml/2006/main">
+              <a:ext uri="{FF2B5EF4-FFF2-40B4-BE49-F238E27FC236}">
+                <a16:creationId xmlns:a16="http://schemas.microsoft.com/office/drawing/2014/main" id="{7CB228F0-4A85-4B78-8A79-83F48516210B}"/>
               </a:ext>
             </a:extLst>
           </p:cNvPr>
@@ -11018,10 +11934,10 @@
       </p:sp>
       <p:sp>
         <p:nvSpPr>
-          <p:cNvPr id="10" name="page-number">
-            <a:extLst xmlns:a="http://schemas.openxmlformats.org/drawingml/2006/main">
-              <a:ext uri="{FF2B5EF4-FFF2-40B4-BE49-F238E27FC236}">
-                <a16:creationId xmlns:a16="http://schemas.microsoft.com/office/drawing/2014/main" id="{B670C429-57BE-4088-8471-96E3A97EDFCA}"/>
+          <p:cNvPr id="12" name="page-number">
+            <a:extLst xmlns:a="http://schemas.openxmlformats.org/drawingml/2006/main">
+              <a:ext uri="{FF2B5EF4-FFF2-40B4-BE49-F238E27FC236}">
+                <a16:creationId xmlns:a16="http://schemas.microsoft.com/office/drawing/2014/main" id="{2909A1A4-AC5E-4936-8378-255CE9FBB5CD}"/>
               </a:ext>
             </a:extLst>
           </p:cNvPr>
@@ -11074,7 +11990,7 @@
     </p:spTree>
     <p:extLst>
       <p:ext uri="{BB962C8B-B14F-4D97-AF65-F5344CB8AC3E}">
-        <p14:creationId xmlns:p14="http://schemas.microsoft.com/office/powerpoint/2010/main" val="1247556005"/>
+        <p14:creationId xmlns:p14="http://schemas.microsoft.com/office/powerpoint/2010/main" val="663625020"/>
       </p:ext>
     </p:extLst>
   </p:cSld>
@@ -11110,10 +12026,10 @@
       </p:grpSpPr>
       <p:sp>
         <p:nvSpPr>
-          <p:cNvPr id="10" name="slide-title">
-            <a:extLst xmlns:a="http://schemas.openxmlformats.org/drawingml/2006/main">
-              <a:ext uri="{FF2B5EF4-FFF2-40B4-BE49-F238E27FC236}">
-                <a16:creationId xmlns:a16="http://schemas.microsoft.com/office/drawing/2014/main" id="{F6351783-F62F-4137-A124-9B6F59C46344}"/>
+          <p:cNvPr id="12" name="slide-title">
+            <a:extLst xmlns:a="http://schemas.openxmlformats.org/drawingml/2006/main">
+              <a:ext uri="{FF2B5EF4-FFF2-40B4-BE49-F238E27FC236}">
+                <a16:creationId xmlns:a16="http://schemas.microsoft.com/office/drawing/2014/main" id="{707760B8-C2C9-4A96-B337-962A24D78689}"/>
               </a:ext>
             </a:extLst>
           </p:cNvPr>
@@ -11164,7 +12080,7 @@
           <p:cNvPr id="2" name="visual-claim">
             <a:extLst xmlns:a="http://schemas.openxmlformats.org/drawingml/2006/main">
               <a:ext uri="{FF2B5EF4-FFF2-40B4-BE49-F238E27FC236}">
-                <a16:creationId xmlns:a16="http://schemas.microsoft.com/office/drawing/2014/main" id="{F17F11BC-6296-4F25-84AA-9FC11899B0F8}"/>
+                <a16:creationId xmlns:a16="http://schemas.microsoft.com/office/drawing/2014/main" id="{7E4A8DEE-B581-48A1-B105-611BB48D705F}"/>
               </a:ext>
             </a:extLst>
           </p:cNvPr>
@@ -11215,7 +12131,7 @@
           <p:cNvPr id="3" name="image-surface">
             <a:extLst xmlns:a="http://schemas.openxmlformats.org/drawingml/2006/main">
               <a:ext uri="{FF2B5EF4-FFF2-40B4-BE49-F238E27FC236}">
-                <a16:creationId xmlns:a16="http://schemas.microsoft.com/office/drawing/2014/main" id="{B14225F6-3241-4698-A1F4-0A0318095A3A}"/>
+                <a16:creationId xmlns:a16="http://schemas.microsoft.com/office/drawing/2014/main" id="{5C60239F-393A-44A7-8A6E-BC330F7F7800}"/>
               </a:ext>
             </a:extLst>
           </p:cNvPr>
@@ -11249,14 +12165,14 @@
       </p:sp>
       <p:pic>
         <p:nvPicPr>
-          <p:cNvPr id="15" name="" descr="Figura oficial da documentação dbt usada para explicar: Separações horizontal e vertical resolvem problemas diferentes — A topologia deve seguir ownership e ciclo de mudança.."/>
+          <p:cNvPr id="18" name="" descr="Figura oficial da documentação dbt usada para explicar: Separações horizontal e vertical resolvem problemas diferentes — A topologia deve seguir ownership e ciclo de mudança.."/>
           <p:cNvPicPr>
             <a:picLocks xmlns:a="http://schemas.openxmlformats.org/drawingml/2006/main" noChangeAspect="1"/>
           </p:cNvPicPr>
           <p:nvPr/>
         </p:nvPicPr>
         <p:blipFill>
-          <a:blip xmlns:r="http://schemas.openxmlformats.org/officeDocument/2006/relationships" xmlns:a="http://schemas.openxmlformats.org/drawingml/2006/main" r:embed="R333f33d65de14da2"/>
+          <a:blip xmlns:r="http://schemas.openxmlformats.org/officeDocument/2006/relationships" xmlns:a="http://schemas.openxmlformats.org/drawingml/2006/main" r:embed="R1866d65d83034ac0"/>
           <a:stretch xmlns:a="http://schemas.openxmlformats.org/drawingml/2006/main"/>
         </p:blipFill>
         <p:spPr>
@@ -11274,7 +12190,7 @@
           <p:cNvPr id="5" name="image-caption">
             <a:extLst xmlns:a="http://schemas.openxmlformats.org/drawingml/2006/main">
               <a:ext uri="{FF2B5EF4-FFF2-40B4-BE49-F238E27FC236}">
-                <a16:creationId xmlns:a16="http://schemas.microsoft.com/office/drawing/2014/main" id="{4B859D2D-0F64-4B6A-9E3B-299F514C0273}"/>
+                <a16:creationId xmlns:a16="http://schemas.microsoft.com/office/drawing/2014/main" id="{58D02D47-EF64-4E5A-9BEA-E84DE92A429B}"/>
               </a:ext>
             </a:extLst>
           </p:cNvPr>
@@ -11325,7 +12241,7 @@
           <p:cNvPr id="6" name="eyebrow">
             <a:extLst xmlns:a="http://schemas.openxmlformats.org/drawingml/2006/main">
               <a:ext uri="{FF2B5EF4-FFF2-40B4-BE49-F238E27FC236}">
-                <a16:creationId xmlns:a16="http://schemas.microsoft.com/office/drawing/2014/main" id="{A255E1A1-1F66-41D3-8833-599567CE7B79}"/>
+                <a16:creationId xmlns:a16="http://schemas.microsoft.com/office/drawing/2014/main" id="{1D4B2957-3565-4C68-99C5-2F1B49274FE5}"/>
               </a:ext>
             </a:extLst>
           </p:cNvPr>
@@ -11373,10 +12289,69 @@
       </p:sp>
       <p:sp>
         <p:nvSpPr>
-          <p:cNvPr id="7" name="footer-rule">
-            <a:extLst xmlns:a="http://schemas.openxmlformats.org/drawingml/2006/main">
-              <a:ext uri="{FF2B5EF4-FFF2-40B4-BE49-F238E27FC236}">
-                <a16:creationId xmlns:a16="http://schemas.microsoft.com/office/drawing/2014/main" id="{0DBF9A89-B655-4306-B5F7-3421FADC809D}"/>
+          <p:cNvPr id="7" name="rescue-point-logo-background">
+            <a:extLst xmlns:a="http://schemas.openxmlformats.org/drawingml/2006/main">
+              <a:ext uri="{FF2B5EF4-FFF2-40B4-BE49-F238E27FC236}">
+                <a16:creationId xmlns:a16="http://schemas.microsoft.com/office/drawing/2014/main" id="{64428094-6536-474A-A1FF-DE7DCAD1D2C3}"/>
+              </a:ext>
+            </a:extLst>
+          </p:cNvPr>
+          <p:cNvSpPr>
+            <a:spLocks xmlns:a="http://schemas.openxmlformats.org/drawingml/2006/main" noGrp="1"/>
+          </p:cNvSpPr>
+          <p:nvPr/>
+        </p:nvSpPr>
+        <p:spPr>
+          <a:xfrm xmlns:a="http://schemas.openxmlformats.org/drawingml/2006/main">
+            <a:off x="9772650" y="133350"/>
+            <a:ext cx="1733550" cy="457200"/>
+          </a:xfrm>
+          <a:prstGeom xmlns:a="http://schemas.openxmlformats.org/drawingml/2006/main" prst="roundRect">
+            <a:avLst>
+              <a:gd name="adj" fmla="val 16667"/>
+            </a:avLst>
+          </a:prstGeom>
+          <a:solidFill xmlns:a="http://schemas.openxmlformats.org/drawingml/2006/main">
+            <a:srgbClr val="06142E"/>
+          </a:solidFill>
+          <a:ln xmlns:a="http://schemas.openxmlformats.org/drawingml/2006/main" w="9525">
+            <a:solidFill>
+              <a:srgbClr val="1EC5FF">
+                <a:alpha val="33333"/>
+              </a:srgbClr>
+            </a:solidFill>
+            <a:prstDash val="solid"/>
+          </a:ln>
+        </p:spPr>
+      </p:sp>
+      <p:pic>
+        <p:nvPicPr>
+          <p:cNvPr id="22" name="" descr="Figura oficial da documentação dbt usada para explicar: Separações horizontal e vertical resolvem problemas diferentes — A topologia deve seguir ownership e ciclo de mudança.."/>
+          <p:cNvPicPr>
+            <a:picLocks xmlns:a="http://schemas.openxmlformats.org/drawingml/2006/main" noChangeAspect="1"/>
+          </p:cNvPicPr>
+          <p:nvPr/>
+        </p:nvPicPr>
+        <p:blipFill>
+          <a:blip xmlns:r="http://schemas.openxmlformats.org/officeDocument/2006/relationships" xmlns:a="http://schemas.openxmlformats.org/drawingml/2006/main" r:embed="R25dc45aa76754f56"/>
+          <a:stretch xmlns:a="http://schemas.openxmlformats.org/drawingml/2006/main"/>
+        </p:blipFill>
+        <p:spPr>
+          <a:xfrm xmlns:a="http://schemas.openxmlformats.org/drawingml/2006/main">
+            <a:off x="9893718" y="209550"/>
+            <a:ext cx="1491414" cy="323850"/>
+          </a:xfrm>
+          <a:prstGeom xmlns:a="http://schemas.openxmlformats.org/drawingml/2006/main" prst="rect">
+            <a:avLst/>
+          </a:prstGeom>
+        </p:spPr>
+      </p:pic>
+      <p:sp>
+        <p:nvSpPr>
+          <p:cNvPr id="9" name="footer-rule">
+            <a:extLst xmlns:a="http://schemas.openxmlformats.org/drawingml/2006/main">
+              <a:ext uri="{FF2B5EF4-FFF2-40B4-BE49-F238E27FC236}">
+                <a16:creationId xmlns:a16="http://schemas.microsoft.com/office/drawing/2014/main" id="{A27B4B4A-2607-4398-AE79-ECC030B3DB74}"/>
               </a:ext>
             </a:extLst>
           </p:cNvPr>
@@ -11406,10 +12381,10 @@
       </p:sp>
       <p:sp>
         <p:nvSpPr>
-          <p:cNvPr id="8" name="footer">
-            <a:extLst xmlns:a="http://schemas.openxmlformats.org/drawingml/2006/main">
-              <a:ext uri="{FF2B5EF4-FFF2-40B4-BE49-F238E27FC236}">
-                <a16:creationId xmlns:a16="http://schemas.microsoft.com/office/drawing/2014/main" id="{58A2E09B-14F0-4C31-9486-BFEA99BAA6B3}"/>
+          <p:cNvPr id="10" name="footer">
+            <a:extLst xmlns:a="http://schemas.openxmlformats.org/drawingml/2006/main">
+              <a:ext uri="{FF2B5EF4-FFF2-40B4-BE49-F238E27FC236}">
+                <a16:creationId xmlns:a16="http://schemas.microsoft.com/office/drawing/2014/main" id="{61B584E6-5197-4A19-83E7-0A8069DF117A}"/>
               </a:ext>
             </a:extLst>
           </p:cNvPr>
@@ -11461,10 +12436,10 @@
       </p:sp>
       <p:sp>
         <p:nvSpPr>
-          <p:cNvPr id="9" name="page-number">
-            <a:extLst xmlns:a="http://schemas.openxmlformats.org/drawingml/2006/main">
-              <a:ext uri="{FF2B5EF4-FFF2-40B4-BE49-F238E27FC236}">
-                <a16:creationId xmlns:a16="http://schemas.microsoft.com/office/drawing/2014/main" id="{58733EC3-03D3-456A-B0C9-A37E2246E85C}"/>
+          <p:cNvPr id="11" name="page-number">
+            <a:extLst xmlns:a="http://schemas.openxmlformats.org/drawingml/2006/main">
+              <a:ext uri="{FF2B5EF4-FFF2-40B4-BE49-F238E27FC236}">
+                <a16:creationId xmlns:a16="http://schemas.microsoft.com/office/drawing/2014/main" id="{B002C524-E303-486D-BBD7-440879F17AA6}"/>
               </a:ext>
             </a:extLst>
           </p:cNvPr>
@@ -11517,7 +12492,7 @@
     </p:spTree>
     <p:extLst>
       <p:ext uri="{BB962C8B-B14F-4D97-AF65-F5344CB8AC3E}">
-        <p14:creationId xmlns:p14="http://schemas.microsoft.com/office/powerpoint/2010/main" val="443600461"/>
+        <p14:creationId xmlns:p14="http://schemas.microsoft.com/office/powerpoint/2010/main" val="382409208"/>
       </p:ext>
     </p:extLst>
   </p:cSld>
@@ -11553,10 +12528,10 @@
       </p:grpSpPr>
       <p:sp>
         <p:nvSpPr>
-          <p:cNvPr id="11" name="slide-title">
-            <a:extLst xmlns:a="http://schemas.openxmlformats.org/drawingml/2006/main">
-              <a:ext uri="{FF2B5EF4-FFF2-40B4-BE49-F238E27FC236}">
-                <a16:creationId xmlns:a16="http://schemas.microsoft.com/office/drawing/2014/main" id="{BC29D6D0-50F0-4CE8-97E4-DD1FE252708F}"/>
+          <p:cNvPr id="13" name="slide-title">
+            <a:extLst xmlns:a="http://schemas.openxmlformats.org/drawingml/2006/main">
+              <a:ext uri="{FF2B5EF4-FFF2-40B4-BE49-F238E27FC236}">
+                <a16:creationId xmlns:a16="http://schemas.microsoft.com/office/drawing/2014/main" id="{A818E14E-59FC-4F3C-9F64-B05733F80412}"/>
               </a:ext>
             </a:extLst>
           </p:cNvPr>
@@ -11607,7 +12582,7 @@
           <p:cNvPr id="2" name="slide-subtitle">
             <a:extLst xmlns:a="http://schemas.openxmlformats.org/drawingml/2006/main">
               <a:ext uri="{FF2B5EF4-FFF2-40B4-BE49-F238E27FC236}">
-                <a16:creationId xmlns:a16="http://schemas.microsoft.com/office/drawing/2014/main" id="{407056A8-8DBD-4B61-9682-47BAB65D71D5}"/>
+                <a16:creationId xmlns:a16="http://schemas.microsoft.com/office/drawing/2014/main" id="{C3472A7C-2DF8-44CC-95FD-25195EFB6724}"/>
               </a:ext>
             </a:extLst>
           </p:cNvPr>
@@ -11658,7 +12633,7 @@
           <p:cNvPr id="3" name="bullets">
             <a:extLst xmlns:a="http://schemas.openxmlformats.org/drawingml/2006/main">
               <a:ext uri="{FF2B5EF4-FFF2-40B4-BE49-F238E27FC236}">
-                <a16:creationId xmlns:a16="http://schemas.microsoft.com/office/drawing/2014/main" id="{BE346D5A-53E5-4953-B483-6ECAD7B32036}"/>
+                <a16:creationId xmlns:a16="http://schemas.microsoft.com/office/drawing/2014/main" id="{50675E77-643C-4FEF-9689-B9EFD43A87E4}"/>
               </a:ext>
             </a:extLst>
           </p:cNvPr>
@@ -11745,7 +12720,7 @@
           <p:cNvPr id="4" name="ambient-glow">
             <a:extLst xmlns:a="http://schemas.openxmlformats.org/drawingml/2006/main">
               <a:ext uri="{FF2B5EF4-FFF2-40B4-BE49-F238E27FC236}">
-                <a16:creationId xmlns:a16="http://schemas.microsoft.com/office/drawing/2014/main" id="{1AC1750A-9D86-4BBC-B494-40EDD5B6226B}"/>
+                <a16:creationId xmlns:a16="http://schemas.microsoft.com/office/drawing/2014/main" id="{E694E766-0A6F-46EF-A5BA-884D4DFB2606}"/>
               </a:ext>
             </a:extLst>
           </p:cNvPr>
@@ -11782,7 +12757,7 @@
           <p:cNvPr id="5" name="ambient-core">
             <a:extLst xmlns:a="http://schemas.openxmlformats.org/drawingml/2006/main">
               <a:ext uri="{FF2B5EF4-FFF2-40B4-BE49-F238E27FC236}">
-                <a16:creationId xmlns:a16="http://schemas.microsoft.com/office/drawing/2014/main" id="{1C2D3315-C328-40A6-B6F5-9FC72477E7D1}"/>
+                <a16:creationId xmlns:a16="http://schemas.microsoft.com/office/drawing/2014/main" id="{28FFCF3F-C882-4BBC-AD3D-64D3FFC9F90E}"/>
               </a:ext>
             </a:extLst>
           </p:cNvPr>
@@ -11819,7 +12794,7 @@
           <p:cNvPr id="6" name="section-number">
             <a:extLst xmlns:a="http://schemas.openxmlformats.org/drawingml/2006/main">
               <a:ext uri="{FF2B5EF4-FFF2-40B4-BE49-F238E27FC236}">
-                <a16:creationId xmlns:a16="http://schemas.microsoft.com/office/drawing/2014/main" id="{DBDD0845-9A78-40D7-8A76-6B9CE8E2E0EE}"/>
+                <a16:creationId xmlns:a16="http://schemas.microsoft.com/office/drawing/2014/main" id="{1682C531-1B13-4D1A-9B4F-5EE97B707606}"/>
               </a:ext>
             </a:extLst>
           </p:cNvPr>
@@ -11870,7 +12845,7 @@
           <p:cNvPr id="7" name="eyebrow">
             <a:extLst xmlns:a="http://schemas.openxmlformats.org/drawingml/2006/main">
               <a:ext uri="{FF2B5EF4-FFF2-40B4-BE49-F238E27FC236}">
-                <a16:creationId xmlns:a16="http://schemas.microsoft.com/office/drawing/2014/main" id="{0327FF85-74BE-49CC-85DE-D4649F61EBC7}"/>
+                <a16:creationId xmlns:a16="http://schemas.microsoft.com/office/drawing/2014/main" id="{14718B56-E575-482F-9576-94C1963B8B6F}"/>
               </a:ext>
             </a:extLst>
           </p:cNvPr>
@@ -11918,10 +12893,69 @@
       </p:sp>
       <p:sp>
         <p:nvSpPr>
-          <p:cNvPr id="8" name="footer-rule">
-            <a:extLst xmlns:a="http://schemas.openxmlformats.org/drawingml/2006/main">
-              <a:ext uri="{FF2B5EF4-FFF2-40B4-BE49-F238E27FC236}">
-                <a16:creationId xmlns:a16="http://schemas.microsoft.com/office/drawing/2014/main" id="{5CD657C0-49A0-44D0-B94D-65D936CD91CF}"/>
+          <p:cNvPr id="8" name="rescue-point-logo-background">
+            <a:extLst xmlns:a="http://schemas.openxmlformats.org/drawingml/2006/main">
+              <a:ext uri="{FF2B5EF4-FFF2-40B4-BE49-F238E27FC236}">
+                <a16:creationId xmlns:a16="http://schemas.microsoft.com/office/drawing/2014/main" id="{D3E1D8ED-BEEB-4CA6-9FD0-9C51BF003BD2}"/>
+              </a:ext>
+            </a:extLst>
+          </p:cNvPr>
+          <p:cNvSpPr>
+            <a:spLocks xmlns:a="http://schemas.openxmlformats.org/drawingml/2006/main" noGrp="1"/>
+          </p:cNvSpPr>
+          <p:nvPr/>
+        </p:nvSpPr>
+        <p:spPr>
+          <a:xfrm xmlns:a="http://schemas.openxmlformats.org/drawingml/2006/main">
+            <a:off x="9772650" y="133350"/>
+            <a:ext cx="1733550" cy="457200"/>
+          </a:xfrm>
+          <a:prstGeom xmlns:a="http://schemas.openxmlformats.org/drawingml/2006/main" prst="roundRect">
+            <a:avLst>
+              <a:gd name="adj" fmla="val 16667"/>
+            </a:avLst>
+          </a:prstGeom>
+          <a:solidFill xmlns:a="http://schemas.openxmlformats.org/drawingml/2006/main">
+            <a:srgbClr val="06142E"/>
+          </a:solidFill>
+          <a:ln xmlns:a="http://schemas.openxmlformats.org/drawingml/2006/main" w="9525">
+            <a:solidFill>
+              <a:srgbClr val="1EC5FF">
+                <a:alpha val="33333"/>
+              </a:srgbClr>
+            </a:solidFill>
+            <a:prstDash val="solid"/>
+          </a:ln>
+        </p:spPr>
+      </p:sp>
+      <p:pic>
+        <p:nvPicPr>
+          <p:cNvPr id="23" name="" descr="Figura oficial da documentação dbt usada para explicar: Core aberto já oferece limites úteis — Groups, access, packages e refs organizam dependências dentro do projeto.."/>
+          <p:cNvPicPr>
+            <a:picLocks xmlns:a="http://schemas.openxmlformats.org/drawingml/2006/main" noChangeAspect="1"/>
+          </p:cNvPicPr>
+          <p:nvPr/>
+        </p:nvPicPr>
+        <p:blipFill>
+          <a:blip xmlns:r="http://schemas.openxmlformats.org/officeDocument/2006/relationships" xmlns:a="http://schemas.openxmlformats.org/drawingml/2006/main" r:embed="Re2c47745318d433e"/>
+          <a:stretch xmlns:a="http://schemas.openxmlformats.org/drawingml/2006/main"/>
+        </p:blipFill>
+        <p:spPr>
+          <a:xfrm xmlns:a="http://schemas.openxmlformats.org/drawingml/2006/main">
+            <a:off x="9893718" y="209550"/>
+            <a:ext cx="1491414" cy="323850"/>
+          </a:xfrm>
+          <a:prstGeom xmlns:a="http://schemas.openxmlformats.org/drawingml/2006/main" prst="rect">
+            <a:avLst/>
+          </a:prstGeom>
+        </p:spPr>
+      </p:pic>
+      <p:sp>
+        <p:nvSpPr>
+          <p:cNvPr id="10" name="footer-rule">
+            <a:extLst xmlns:a="http://schemas.openxmlformats.org/drawingml/2006/main">
+              <a:ext uri="{FF2B5EF4-FFF2-40B4-BE49-F238E27FC236}">
+                <a16:creationId xmlns:a16="http://schemas.microsoft.com/office/drawing/2014/main" id="{B252133D-F700-41DB-8F26-927726BC4B9F}"/>
               </a:ext>
             </a:extLst>
           </p:cNvPr>
@@ -11951,10 +12985,10 @@
       </p:sp>
       <p:sp>
         <p:nvSpPr>
-          <p:cNvPr id="9" name="footer">
-            <a:extLst xmlns:a="http://schemas.openxmlformats.org/drawingml/2006/main">
-              <a:ext uri="{FF2B5EF4-FFF2-40B4-BE49-F238E27FC236}">
-                <a16:creationId xmlns:a16="http://schemas.microsoft.com/office/drawing/2014/main" id="{023DF7C5-03CB-4DF5-A779-26192EDC8BC5}"/>
+          <p:cNvPr id="11" name="footer">
+            <a:extLst xmlns:a="http://schemas.openxmlformats.org/drawingml/2006/main">
+              <a:ext uri="{FF2B5EF4-FFF2-40B4-BE49-F238E27FC236}">
+                <a16:creationId xmlns:a16="http://schemas.microsoft.com/office/drawing/2014/main" id="{1542C8CF-9F7C-46F7-91F2-3728A47503A6}"/>
               </a:ext>
             </a:extLst>
           </p:cNvPr>
@@ -12006,10 +13040,10 @@
       </p:sp>
       <p:sp>
         <p:nvSpPr>
-          <p:cNvPr id="10" name="page-number">
-            <a:extLst xmlns:a="http://schemas.openxmlformats.org/drawingml/2006/main">
-              <a:ext uri="{FF2B5EF4-FFF2-40B4-BE49-F238E27FC236}">
-                <a16:creationId xmlns:a16="http://schemas.microsoft.com/office/drawing/2014/main" id="{D128ECB0-2626-44B8-8FFB-BFBBCEFE8063}"/>
+          <p:cNvPr id="12" name="page-number">
+            <a:extLst xmlns:a="http://schemas.openxmlformats.org/drawingml/2006/main">
+              <a:ext uri="{FF2B5EF4-FFF2-40B4-BE49-F238E27FC236}">
+                <a16:creationId xmlns:a16="http://schemas.microsoft.com/office/drawing/2014/main" id="{ACD60069-5EFB-4BA6-AB07-CF13252473EC}"/>
               </a:ext>
             </a:extLst>
           </p:cNvPr>
@@ -12062,7 +13096,7 @@
     </p:spTree>
     <p:extLst>
       <p:ext uri="{BB962C8B-B14F-4D97-AF65-F5344CB8AC3E}">
-        <p14:creationId xmlns:p14="http://schemas.microsoft.com/office/powerpoint/2010/main" val="1131631654"/>
+        <p14:creationId xmlns:p14="http://schemas.microsoft.com/office/powerpoint/2010/main" val="1446266318"/>
       </p:ext>
     </p:extLst>
   </p:cSld>
@@ -12090,10 +13124,10 @@
       </p:grpSpPr>
       <p:sp>
         <p:nvSpPr>
-          <p:cNvPr id="9" name="slide-title">
-            <a:extLst xmlns:a="http://schemas.openxmlformats.org/drawingml/2006/main">
-              <a:ext uri="{FF2B5EF4-FFF2-40B4-BE49-F238E27FC236}">
-                <a16:creationId xmlns:a16="http://schemas.microsoft.com/office/drawing/2014/main" id="{E5872059-4230-45F1-BDF0-2441DF8C457B}"/>
+          <p:cNvPr id="11" name="slide-title">
+            <a:extLst xmlns:a="http://schemas.openxmlformats.org/drawingml/2006/main">
+              <a:ext uri="{FF2B5EF4-FFF2-40B4-BE49-F238E27FC236}">
+                <a16:creationId xmlns:a16="http://schemas.microsoft.com/office/drawing/2014/main" id="{7670FCDF-93DA-4D0B-B9CB-C4C52A2AF622}"/>
               </a:ext>
             </a:extLst>
           </p:cNvPr>
@@ -12144,7 +13178,7 @@
           <p:cNvPr id="2" name="layer-1">
             <a:extLst xmlns:a="http://schemas.openxmlformats.org/drawingml/2006/main">
               <a:ext uri="{FF2B5EF4-FFF2-40B4-BE49-F238E27FC236}">
-                <a16:creationId xmlns:a16="http://schemas.microsoft.com/office/drawing/2014/main" id="{BA83C8C6-25CC-4C04-8AE0-8A93D51E553A}"/>
+                <a16:creationId xmlns:a16="http://schemas.microsoft.com/office/drawing/2014/main" id="{D1AC95BC-A94E-4E4D-893A-9BE42BBC8103}"/>
               </a:ext>
             </a:extLst>
           </p:cNvPr>
@@ -12201,7 +13235,7 @@
           <p:cNvPr id="3" name="layer-2">
             <a:extLst xmlns:a="http://schemas.openxmlformats.org/drawingml/2006/main">
               <a:ext uri="{FF2B5EF4-FFF2-40B4-BE49-F238E27FC236}">
-                <a16:creationId xmlns:a16="http://schemas.microsoft.com/office/drawing/2014/main" id="{3645817B-26FA-4B4E-A821-6A8CA64E68D9}"/>
+                <a16:creationId xmlns:a16="http://schemas.microsoft.com/office/drawing/2014/main" id="{C01B4D2F-0C5C-4124-8F33-3D147FAA74F0}"/>
               </a:ext>
             </a:extLst>
           </p:cNvPr>
@@ -12258,7 +13292,7 @@
           <p:cNvPr id="4" name="layer-3">
             <a:extLst xmlns:a="http://schemas.openxmlformats.org/drawingml/2006/main">
               <a:ext uri="{FF2B5EF4-FFF2-40B4-BE49-F238E27FC236}">
-                <a16:creationId xmlns:a16="http://schemas.microsoft.com/office/drawing/2014/main" id="{0DAF69C0-0B42-4FEC-9986-182B506A7D52}"/>
+                <a16:creationId xmlns:a16="http://schemas.microsoft.com/office/drawing/2014/main" id="{9D7DBAC6-2034-422E-8233-5B55E92369B4}"/>
               </a:ext>
             </a:extLst>
           </p:cNvPr>
@@ -12315,7 +13349,7 @@
           <p:cNvPr id="5" name="eyebrow">
             <a:extLst xmlns:a="http://schemas.openxmlformats.org/drawingml/2006/main">
               <a:ext uri="{FF2B5EF4-FFF2-40B4-BE49-F238E27FC236}">
-                <a16:creationId xmlns:a16="http://schemas.microsoft.com/office/drawing/2014/main" id="{39E58F2A-E797-43BC-8B65-16394F4CE23A}"/>
+                <a16:creationId xmlns:a16="http://schemas.microsoft.com/office/drawing/2014/main" id="{7AF5A9B8-7425-4CDD-A5AB-0689E8573951}"/>
               </a:ext>
             </a:extLst>
           </p:cNvPr>
@@ -12363,10 +13397,69 @@
       </p:sp>
       <p:sp>
         <p:nvSpPr>
-          <p:cNvPr id="6" name="footer-rule">
-            <a:extLst xmlns:a="http://schemas.openxmlformats.org/drawingml/2006/main">
-              <a:ext uri="{FF2B5EF4-FFF2-40B4-BE49-F238E27FC236}">
-                <a16:creationId xmlns:a16="http://schemas.microsoft.com/office/drawing/2014/main" id="{725263CE-F3EE-41A1-ADC2-5BABDA9E91EA}"/>
+          <p:cNvPr id="6" name="rescue-point-logo-background">
+            <a:extLst xmlns:a="http://schemas.openxmlformats.org/drawingml/2006/main">
+              <a:ext uri="{FF2B5EF4-FFF2-40B4-BE49-F238E27FC236}">
+                <a16:creationId xmlns:a16="http://schemas.microsoft.com/office/drawing/2014/main" id="{69263AD0-2ABC-41C0-AA79-161B6ECB2ACF}"/>
+              </a:ext>
+            </a:extLst>
+          </p:cNvPr>
+          <p:cNvSpPr>
+            <a:spLocks xmlns:a="http://schemas.openxmlformats.org/drawingml/2006/main" noGrp="1"/>
+          </p:cNvSpPr>
+          <p:nvPr/>
+        </p:nvSpPr>
+        <p:spPr>
+          <a:xfrm xmlns:a="http://schemas.openxmlformats.org/drawingml/2006/main">
+            <a:off x="9772650" y="133350"/>
+            <a:ext cx="1733550" cy="457200"/>
+          </a:xfrm>
+          <a:prstGeom xmlns:a="http://schemas.openxmlformats.org/drawingml/2006/main" prst="roundRect">
+            <a:avLst>
+              <a:gd name="adj" fmla="val 16667"/>
+            </a:avLst>
+          </a:prstGeom>
+          <a:solidFill xmlns:a="http://schemas.openxmlformats.org/drawingml/2006/main">
+            <a:srgbClr val="06142E"/>
+          </a:solidFill>
+          <a:ln xmlns:a="http://schemas.openxmlformats.org/drawingml/2006/main" w="9525">
+            <a:solidFill>
+              <a:srgbClr val="1EC5FF">
+                <a:alpha val="33333"/>
+              </a:srgbClr>
+            </a:solidFill>
+            <a:prstDash val="solid"/>
+          </a:ln>
+        </p:spPr>
+      </p:sp>
+      <p:pic>
+        <p:nvPicPr>
+          <p:cNvPr id="19" name="" descr="Figura oficial da documentação dbt usada para explicar: Core aberto já oferece limites úteis — Domínio A."/>
+          <p:cNvPicPr>
+            <a:picLocks xmlns:a="http://schemas.openxmlformats.org/drawingml/2006/main" noChangeAspect="1"/>
+          </p:cNvPicPr>
+          <p:nvPr/>
+        </p:nvPicPr>
+        <p:blipFill>
+          <a:blip xmlns:r="http://schemas.openxmlformats.org/officeDocument/2006/relationships" xmlns:a="http://schemas.openxmlformats.org/drawingml/2006/main" r:embed="Ra566e9c7133145a4"/>
+          <a:stretch xmlns:a="http://schemas.openxmlformats.org/drawingml/2006/main"/>
+        </p:blipFill>
+        <p:spPr>
+          <a:xfrm xmlns:a="http://schemas.openxmlformats.org/drawingml/2006/main">
+            <a:off x="9893718" y="209550"/>
+            <a:ext cx="1491414" cy="323850"/>
+          </a:xfrm>
+          <a:prstGeom xmlns:a="http://schemas.openxmlformats.org/drawingml/2006/main" prst="rect">
+            <a:avLst/>
+          </a:prstGeom>
+        </p:spPr>
+      </p:pic>
+      <p:sp>
+        <p:nvSpPr>
+          <p:cNvPr id="8" name="footer-rule">
+            <a:extLst xmlns:a="http://schemas.openxmlformats.org/drawingml/2006/main">
+              <a:ext uri="{FF2B5EF4-FFF2-40B4-BE49-F238E27FC236}">
+                <a16:creationId xmlns:a16="http://schemas.microsoft.com/office/drawing/2014/main" id="{ABE949C5-ECE8-4542-BEA6-38CAA73D478E}"/>
               </a:ext>
             </a:extLst>
           </p:cNvPr>
@@ -12396,10 +13489,10 @@
       </p:sp>
       <p:sp>
         <p:nvSpPr>
-          <p:cNvPr id="7" name="footer">
-            <a:extLst xmlns:a="http://schemas.openxmlformats.org/drawingml/2006/main">
-              <a:ext uri="{FF2B5EF4-FFF2-40B4-BE49-F238E27FC236}">
-                <a16:creationId xmlns:a16="http://schemas.microsoft.com/office/drawing/2014/main" id="{E8C66D51-58F7-4F1E-92E9-DCB8B06327A7}"/>
+          <p:cNvPr id="9" name="footer">
+            <a:extLst xmlns:a="http://schemas.openxmlformats.org/drawingml/2006/main">
+              <a:ext uri="{FF2B5EF4-FFF2-40B4-BE49-F238E27FC236}">
+                <a16:creationId xmlns:a16="http://schemas.microsoft.com/office/drawing/2014/main" id="{18391D67-22F7-4480-8ABC-46A924DF76C6}"/>
               </a:ext>
             </a:extLst>
           </p:cNvPr>
@@ -12451,10 +13544,10 @@
       </p:sp>
       <p:sp>
         <p:nvSpPr>
-          <p:cNvPr id="8" name="page-number">
-            <a:extLst xmlns:a="http://schemas.openxmlformats.org/drawingml/2006/main">
-              <a:ext uri="{FF2B5EF4-FFF2-40B4-BE49-F238E27FC236}">
-                <a16:creationId xmlns:a16="http://schemas.microsoft.com/office/drawing/2014/main" id="{B7654300-615D-4939-8970-4B2546B78770}"/>
+          <p:cNvPr id="10" name="page-number">
+            <a:extLst xmlns:a="http://schemas.openxmlformats.org/drawingml/2006/main">
+              <a:ext uri="{FF2B5EF4-FFF2-40B4-BE49-F238E27FC236}">
+                <a16:creationId xmlns:a16="http://schemas.microsoft.com/office/drawing/2014/main" id="{3156F253-7101-4007-B18A-2242BD6ACC6D}"/>
               </a:ext>
             </a:extLst>
           </p:cNvPr>
@@ -12507,7 +13600,7 @@
     </p:spTree>
     <p:extLst>
       <p:ext uri="{BB962C8B-B14F-4D97-AF65-F5344CB8AC3E}">
-        <p14:creationId xmlns:p14="http://schemas.microsoft.com/office/powerpoint/2010/main" val="613361146"/>
+        <p14:creationId xmlns:p14="http://schemas.microsoft.com/office/powerpoint/2010/main" val="854500067"/>
       </p:ext>
     </p:extLst>
   </p:cSld>
@@ -12535,10 +13628,10 @@
       </p:grpSpPr>
       <p:sp>
         <p:nvSpPr>
-          <p:cNvPr id="11" name="slide-title">
-            <a:extLst xmlns:a="http://schemas.openxmlformats.org/drawingml/2006/main">
-              <a:ext uri="{FF2B5EF4-FFF2-40B4-BE49-F238E27FC236}">
-                <a16:creationId xmlns:a16="http://schemas.microsoft.com/office/drawing/2014/main" id="{5FB4F585-C0ED-4E10-9D0A-6FB34A060AFA}"/>
+          <p:cNvPr id="13" name="slide-title">
+            <a:extLst xmlns:a="http://schemas.openxmlformats.org/drawingml/2006/main">
+              <a:ext uri="{FF2B5EF4-FFF2-40B4-BE49-F238E27FC236}">
+                <a16:creationId xmlns:a16="http://schemas.microsoft.com/office/drawing/2014/main" id="{FB78583D-6F68-4464-9FB5-AF789CCD2E29}"/>
               </a:ext>
             </a:extLst>
           </p:cNvPr>
@@ -12589,7 +13682,7 @@
           <p:cNvPr id="2" name="slide-subtitle">
             <a:extLst xmlns:a="http://schemas.openxmlformats.org/drawingml/2006/main">
               <a:ext uri="{FF2B5EF4-FFF2-40B4-BE49-F238E27FC236}">
-                <a16:creationId xmlns:a16="http://schemas.microsoft.com/office/drawing/2014/main" id="{11D29010-0DB9-4096-B0E1-8CC067102E9D}"/>
+                <a16:creationId xmlns:a16="http://schemas.microsoft.com/office/drawing/2014/main" id="{6E57B6D2-C834-4555-A178-4B0E47DDDC65}"/>
               </a:ext>
             </a:extLst>
           </p:cNvPr>
@@ -12640,7 +13733,7 @@
           <p:cNvPr id="3" name="bullets">
             <a:extLst xmlns:a="http://schemas.openxmlformats.org/drawingml/2006/main">
               <a:ext uri="{FF2B5EF4-FFF2-40B4-BE49-F238E27FC236}">
-                <a16:creationId xmlns:a16="http://schemas.microsoft.com/office/drawing/2014/main" id="{90F3EC5B-C73E-4FDE-BBFC-20DB4892FCA8}"/>
+                <a16:creationId xmlns:a16="http://schemas.microsoft.com/office/drawing/2014/main" id="{BFCCCAE5-EF32-47A3-8275-3151E0D8B7EE}"/>
               </a:ext>
             </a:extLst>
           </p:cNvPr>
@@ -12727,7 +13820,7 @@
           <p:cNvPr id="4" name="ambient-glow">
             <a:extLst xmlns:a="http://schemas.openxmlformats.org/drawingml/2006/main">
               <a:ext uri="{FF2B5EF4-FFF2-40B4-BE49-F238E27FC236}">
-                <a16:creationId xmlns:a16="http://schemas.microsoft.com/office/drawing/2014/main" id="{6E6C8C65-77A1-4B1D-957E-823860FC617F}"/>
+                <a16:creationId xmlns:a16="http://schemas.microsoft.com/office/drawing/2014/main" id="{A834F6F6-09B7-4851-9B06-3B4202BD76D1}"/>
               </a:ext>
             </a:extLst>
           </p:cNvPr>
@@ -12764,7 +13857,7 @@
           <p:cNvPr id="5" name="ambient-core">
             <a:extLst xmlns:a="http://schemas.openxmlformats.org/drawingml/2006/main">
               <a:ext uri="{FF2B5EF4-FFF2-40B4-BE49-F238E27FC236}">
-                <a16:creationId xmlns:a16="http://schemas.microsoft.com/office/drawing/2014/main" id="{F08AA58E-F571-41F0-ABB9-1CE67BE0174F}"/>
+                <a16:creationId xmlns:a16="http://schemas.microsoft.com/office/drawing/2014/main" id="{5DF9AADD-49F1-45C0-8919-9E38001E97D7}"/>
               </a:ext>
             </a:extLst>
           </p:cNvPr>
@@ -12801,7 +13894,7 @@
           <p:cNvPr id="6" name="section-number">
             <a:extLst xmlns:a="http://schemas.openxmlformats.org/drawingml/2006/main">
               <a:ext uri="{FF2B5EF4-FFF2-40B4-BE49-F238E27FC236}">
-                <a16:creationId xmlns:a16="http://schemas.microsoft.com/office/drawing/2014/main" id="{0615826C-420E-4C45-AFE4-6F52FFD2E05F}"/>
+                <a16:creationId xmlns:a16="http://schemas.microsoft.com/office/drawing/2014/main" id="{A28AB51D-9A5F-4CFF-B34A-5515E1D90102}"/>
               </a:ext>
             </a:extLst>
           </p:cNvPr>
@@ -12852,7 +13945,7 @@
           <p:cNvPr id="7" name="eyebrow">
             <a:extLst xmlns:a="http://schemas.openxmlformats.org/drawingml/2006/main">
               <a:ext uri="{FF2B5EF4-FFF2-40B4-BE49-F238E27FC236}">
-                <a16:creationId xmlns:a16="http://schemas.microsoft.com/office/drawing/2014/main" id="{D4F32B02-4BC7-488B-873F-02310D75C22C}"/>
+                <a16:creationId xmlns:a16="http://schemas.microsoft.com/office/drawing/2014/main" id="{B197F3F7-05B9-4BDD-BD22-D12296D8DAAE}"/>
               </a:ext>
             </a:extLst>
           </p:cNvPr>
@@ -12900,10 +13993,69 @@
       </p:sp>
       <p:sp>
         <p:nvSpPr>
-          <p:cNvPr id="8" name="footer-rule">
-            <a:extLst xmlns:a="http://schemas.openxmlformats.org/drawingml/2006/main">
-              <a:ext uri="{FF2B5EF4-FFF2-40B4-BE49-F238E27FC236}">
-                <a16:creationId xmlns:a16="http://schemas.microsoft.com/office/drawing/2014/main" id="{859B8E47-8B58-4E7C-BAC0-8EBD623939E3}"/>
+          <p:cNvPr id="8" name="rescue-point-logo-background">
+            <a:extLst xmlns:a="http://schemas.openxmlformats.org/drawingml/2006/main">
+              <a:ext uri="{FF2B5EF4-FFF2-40B4-BE49-F238E27FC236}">
+                <a16:creationId xmlns:a16="http://schemas.microsoft.com/office/drawing/2014/main" id="{4A6B29AB-83E1-4D8B-92CD-D734056C9381}"/>
+              </a:ext>
+            </a:extLst>
+          </p:cNvPr>
+          <p:cNvSpPr>
+            <a:spLocks xmlns:a="http://schemas.openxmlformats.org/drawingml/2006/main" noGrp="1"/>
+          </p:cNvSpPr>
+          <p:nvPr/>
+        </p:nvSpPr>
+        <p:spPr>
+          <a:xfrm xmlns:a="http://schemas.openxmlformats.org/drawingml/2006/main">
+            <a:off x="9772650" y="133350"/>
+            <a:ext cx="1733550" cy="457200"/>
+          </a:xfrm>
+          <a:prstGeom xmlns:a="http://schemas.openxmlformats.org/drawingml/2006/main" prst="roundRect">
+            <a:avLst>
+              <a:gd name="adj" fmla="val 16667"/>
+            </a:avLst>
+          </a:prstGeom>
+          <a:solidFill xmlns:a="http://schemas.openxmlformats.org/drawingml/2006/main">
+            <a:srgbClr val="06142E"/>
+          </a:solidFill>
+          <a:ln xmlns:a="http://schemas.openxmlformats.org/drawingml/2006/main" w="9525">
+            <a:solidFill>
+              <a:srgbClr val="1EC5FF">
+                <a:alpha val="33333"/>
+              </a:srgbClr>
+            </a:solidFill>
+            <a:prstDash val="solid"/>
+          </a:ln>
+        </p:spPr>
+      </p:sp>
+      <p:pic>
+        <p:nvPicPr>
+          <p:cNvPr id="23" name="" descr="Figura oficial da documentação dbt usada para explicar: Separe fisicamente quando o custo se paga — Autonomia, segurança e ciclos independentes precisam superar a complexidade.."/>
+          <p:cNvPicPr>
+            <a:picLocks xmlns:a="http://schemas.openxmlformats.org/drawingml/2006/main" noChangeAspect="1"/>
+          </p:cNvPicPr>
+          <p:nvPr/>
+        </p:nvPicPr>
+        <p:blipFill>
+          <a:blip xmlns:r="http://schemas.openxmlformats.org/officeDocument/2006/relationships" xmlns:a="http://schemas.openxmlformats.org/drawingml/2006/main" r:embed="R08eab81509734b3e"/>
+          <a:stretch xmlns:a="http://schemas.openxmlformats.org/drawingml/2006/main"/>
+        </p:blipFill>
+        <p:spPr>
+          <a:xfrm xmlns:a="http://schemas.openxmlformats.org/drawingml/2006/main">
+            <a:off x="9893718" y="209550"/>
+            <a:ext cx="1491414" cy="323850"/>
+          </a:xfrm>
+          <a:prstGeom xmlns:a="http://schemas.openxmlformats.org/drawingml/2006/main" prst="rect">
+            <a:avLst/>
+          </a:prstGeom>
+        </p:spPr>
+      </p:pic>
+      <p:sp>
+        <p:nvSpPr>
+          <p:cNvPr id="10" name="footer-rule">
+            <a:extLst xmlns:a="http://schemas.openxmlformats.org/drawingml/2006/main">
+              <a:ext uri="{FF2B5EF4-FFF2-40B4-BE49-F238E27FC236}">
+                <a16:creationId xmlns:a16="http://schemas.microsoft.com/office/drawing/2014/main" id="{2D3FE708-2B43-47F1-8AD4-64F619AB4E0A}"/>
               </a:ext>
             </a:extLst>
           </p:cNvPr>
@@ -12933,10 +14085,10 @@
       </p:sp>
       <p:sp>
         <p:nvSpPr>
-          <p:cNvPr id="9" name="footer">
-            <a:extLst xmlns:a="http://schemas.openxmlformats.org/drawingml/2006/main">
-              <a:ext uri="{FF2B5EF4-FFF2-40B4-BE49-F238E27FC236}">
-                <a16:creationId xmlns:a16="http://schemas.microsoft.com/office/drawing/2014/main" id="{1627BF69-354B-466A-A10C-9610578A2E9C}"/>
+          <p:cNvPr id="11" name="footer">
+            <a:extLst xmlns:a="http://schemas.openxmlformats.org/drawingml/2006/main">
+              <a:ext uri="{FF2B5EF4-FFF2-40B4-BE49-F238E27FC236}">
+                <a16:creationId xmlns:a16="http://schemas.microsoft.com/office/drawing/2014/main" id="{760712BF-3B51-484B-AAEC-A9B618EE82BE}"/>
               </a:ext>
             </a:extLst>
           </p:cNvPr>
@@ -12988,10 +14140,10 @@
       </p:sp>
       <p:sp>
         <p:nvSpPr>
-          <p:cNvPr id="10" name="page-number">
-            <a:extLst xmlns:a="http://schemas.openxmlformats.org/drawingml/2006/main">
-              <a:ext uri="{FF2B5EF4-FFF2-40B4-BE49-F238E27FC236}">
-                <a16:creationId xmlns:a16="http://schemas.microsoft.com/office/drawing/2014/main" id="{2C881569-DB0D-46B6-AACD-F2C0838A5756}"/>
+          <p:cNvPr id="12" name="page-number">
+            <a:extLst xmlns:a="http://schemas.openxmlformats.org/drawingml/2006/main">
+              <a:ext uri="{FF2B5EF4-FFF2-40B4-BE49-F238E27FC236}">
+                <a16:creationId xmlns:a16="http://schemas.microsoft.com/office/drawing/2014/main" id="{8B7CB3E1-89C2-40F1-B6D6-2B9AE5088FFD}"/>
               </a:ext>
             </a:extLst>
           </p:cNvPr>
@@ -13044,7 +14196,7 @@
     </p:spTree>
     <p:extLst>
       <p:ext uri="{BB962C8B-B14F-4D97-AF65-F5344CB8AC3E}">
-        <p14:creationId xmlns:p14="http://schemas.microsoft.com/office/powerpoint/2010/main" val="370375907"/>
+        <p14:creationId xmlns:p14="http://schemas.microsoft.com/office/powerpoint/2010/main" val="130102470"/>
       </p:ext>
     </p:extLst>
   </p:cSld>
